--- a/public/dist/img/update/Presentación1.pptx
+++ b/public/dist/img/update/Presentación1.pptx
@@ -5,8 +5,9 @@
     <p:sldMasterId id="2147483720" r:id="rId1"/>
   </p:sldMasterIdLst>
   <p:sldIdLst>
-    <p:sldId id="256" r:id="rId2"/>
-    <p:sldId id="258" r:id="rId3"/>
+    <p:sldId id="259" r:id="rId2"/>
+    <p:sldId id="256" r:id="rId3"/>
+    <p:sldId id="258" r:id="rId4"/>
   </p:sldIdLst>
   <p:sldSz cx="12192000" cy="6858000"/>
   <p:notesSz cx="6858000" cy="9144000"/>
@@ -105,6 +106,11 @@
       </a:defRPr>
     </a:lvl9pPr>
   </p:defaultTextStyle>
+  <p:extLst>
+    <p:ext uri="{EFAFB233-063F-42B5-8137-9DF3F51BA10A}">
+      <p15:sldGuideLst xmlns:p15="http://schemas.microsoft.com/office/powerpoint/2012/main"/>
+    </p:ext>
+  </p:extLst>
 </p:presentation>
 </file>
 
@@ -257,7 +263,7 @@
           <a:p>
             <a:fld id="{F7EB7AD6-F7F4-4A3B-9140-B8481AFC5E85}" type="datetimeFigureOut">
               <a:rPr lang="es-CO" smtClean="0"/>
-              <a:t>24/04/2023</a:t>
+              <a:t>23/05/2023</a:t>
             </a:fld>
             <a:endParaRPr lang="es-CO"/>
           </a:p>
@@ -457,7 +463,7 @@
           <a:p>
             <a:fld id="{F7EB7AD6-F7F4-4A3B-9140-B8481AFC5E85}" type="datetimeFigureOut">
               <a:rPr lang="es-CO" smtClean="0"/>
-              <a:t>24/04/2023</a:t>
+              <a:t>23/05/2023</a:t>
             </a:fld>
             <a:endParaRPr lang="es-CO"/>
           </a:p>
@@ -667,7 +673,7 @@
           <a:p>
             <a:fld id="{F7EB7AD6-F7F4-4A3B-9140-B8481AFC5E85}" type="datetimeFigureOut">
               <a:rPr lang="es-CO" smtClean="0"/>
-              <a:t>24/04/2023</a:t>
+              <a:t>23/05/2023</a:t>
             </a:fld>
             <a:endParaRPr lang="es-CO"/>
           </a:p>
@@ -867,7 +873,7 @@
           <a:p>
             <a:fld id="{F7EB7AD6-F7F4-4A3B-9140-B8481AFC5E85}" type="datetimeFigureOut">
               <a:rPr lang="es-CO" smtClean="0"/>
-              <a:t>24/04/2023</a:t>
+              <a:t>23/05/2023</a:t>
             </a:fld>
             <a:endParaRPr lang="es-CO"/>
           </a:p>
@@ -1143,7 +1149,7 @@
           <a:p>
             <a:fld id="{F7EB7AD6-F7F4-4A3B-9140-B8481AFC5E85}" type="datetimeFigureOut">
               <a:rPr lang="es-CO" smtClean="0"/>
-              <a:t>24/04/2023</a:t>
+              <a:t>23/05/2023</a:t>
             </a:fld>
             <a:endParaRPr lang="es-CO"/>
           </a:p>
@@ -1411,7 +1417,7 @@
           <a:p>
             <a:fld id="{F7EB7AD6-F7F4-4A3B-9140-B8481AFC5E85}" type="datetimeFigureOut">
               <a:rPr lang="es-CO" smtClean="0"/>
-              <a:t>24/04/2023</a:t>
+              <a:t>23/05/2023</a:t>
             </a:fld>
             <a:endParaRPr lang="es-CO"/>
           </a:p>
@@ -1826,7 +1832,7 @@
           <a:p>
             <a:fld id="{F7EB7AD6-F7F4-4A3B-9140-B8481AFC5E85}" type="datetimeFigureOut">
               <a:rPr lang="es-CO" smtClean="0"/>
-              <a:t>24/04/2023</a:t>
+              <a:t>23/05/2023</a:t>
             </a:fld>
             <a:endParaRPr lang="es-CO"/>
           </a:p>
@@ -1968,7 +1974,7 @@
           <a:p>
             <a:fld id="{F7EB7AD6-F7F4-4A3B-9140-B8481AFC5E85}" type="datetimeFigureOut">
               <a:rPr lang="es-CO" smtClean="0"/>
-              <a:t>24/04/2023</a:t>
+              <a:t>23/05/2023</a:t>
             </a:fld>
             <a:endParaRPr lang="es-CO"/>
           </a:p>
@@ -2081,7 +2087,7 @@
           <a:p>
             <a:fld id="{F7EB7AD6-F7F4-4A3B-9140-B8481AFC5E85}" type="datetimeFigureOut">
               <a:rPr lang="es-CO" smtClean="0"/>
-              <a:t>24/04/2023</a:t>
+              <a:t>23/05/2023</a:t>
             </a:fld>
             <a:endParaRPr lang="es-CO"/>
           </a:p>
@@ -2394,7 +2400,7 @@
           <a:p>
             <a:fld id="{F7EB7AD6-F7F4-4A3B-9140-B8481AFC5E85}" type="datetimeFigureOut">
               <a:rPr lang="es-CO" smtClean="0"/>
-              <a:t>24/04/2023</a:t>
+              <a:t>23/05/2023</a:t>
             </a:fld>
             <a:endParaRPr lang="es-CO"/>
           </a:p>
@@ -2683,7 +2689,7 @@
           <a:p>
             <a:fld id="{F7EB7AD6-F7F4-4A3B-9140-B8481AFC5E85}" type="datetimeFigureOut">
               <a:rPr lang="es-CO" smtClean="0"/>
-              <a:t>24/04/2023</a:t>
+              <a:t>23/05/2023</a:t>
             </a:fld>
             <a:endParaRPr lang="es-CO"/>
           </a:p>
@@ -2926,7 +2932,7 @@
           <a:p>
             <a:fld id="{F7EB7AD6-F7F4-4A3B-9140-B8481AFC5E85}" type="datetimeFigureOut">
               <a:rPr lang="es-CO" smtClean="0"/>
-              <a:t>24/04/2023</a:t>
+              <a:t>23/05/2023</a:t>
             </a:fld>
             <a:endParaRPr lang="es-CO"/>
           </a:p>
@@ -3332,9 +3338,8 @@
     <p:bg>
       <p:bgPr>
         <a:solidFill>
-          <a:schemeClr val="tx1">
-            <a:lumMod val="65000"/>
-            <a:lumOff val="35000"/>
+          <a:schemeClr val="bg1">
+            <a:alpha val="40000"/>
           </a:schemeClr>
         </a:solidFill>
         <a:effectLst/>
@@ -3411,8 +3416,8 @@
             <a:avLst/>
           </a:prstGeom>
           <a:solidFill>
-            <a:srgbClr val="1AA513">
-              <a:alpha val="31765"/>
+            <a:srgbClr val="FF0066">
+              <a:alpha val="38000"/>
             </a:srgbClr>
           </a:solidFill>
           <a:ln>
@@ -3459,7 +3464,7 @@
         <p:spPr>
           <a:xfrm>
             <a:off x="269496" y="1005125"/>
-            <a:ext cx="5205500" cy="4847749"/>
+            <a:ext cx="5205500" cy="1771293"/>
           </a:xfrm>
           <a:prstGeom prst="round2SameRect">
             <a:avLst>
@@ -3489,7 +3494,7 @@
             </a:pPr>
             <a:r>
               <a:rPr lang="es-CO" b="1" dirty="0"/>
-              <a:t>Al cerrar el corte se aplicaran notas a aquellos casos de seguimiento que después de 30 días de asignado NO tienen actuaciones (o anexos). También a aquellos que tienen entre una actuación y otra mas de 30 días. </a:t>
+              <a:t>Al cerrar el corte se aplicaran notas a aquellos casos que después de asignado tenga mas de 5 días en redactar los datos del caso o respuesta del estudiante. </a:t>
             </a:r>
           </a:p>
           <a:p>
@@ -3497,38 +3502,7 @@
               <a:buFont typeface="Wingdings" panose="05000000000000000000" pitchFamily="2" charset="2"/>
               <a:buChar char="Ø"/>
             </a:pPr>
-            <a:r>
-              <a:rPr lang="es-CO" b="1" dirty="0"/>
-              <a:t>En el reporte de notas usted podrá ver de manera detallada el motivo de la nota. Si la nota se aplicó por lo expresado en el </a:t>
-            </a:r>
-            <a:r>
-              <a:rPr lang="es-CO" b="1" dirty="0" err="1"/>
-              <a:t>item</a:t>
-            </a:r>
-            <a:r>
-              <a:rPr lang="es-CO" b="1" dirty="0"/>
-              <a:t> anterior el sistema le indica el periodo evaluado.</a:t>
-            </a:r>
-          </a:p>
-          <a:p>
-            <a:pPr marL="285750" indent="-285750" algn="just">
-              <a:buFont typeface="Wingdings" panose="05000000000000000000" pitchFamily="2" charset="2"/>
-              <a:buChar char="Ø"/>
-            </a:pPr>
-            <a:r>
-              <a:rPr lang="es-CO" b="1" dirty="0"/>
-              <a:t>Para verificar el periodo ingrese al caso y en la pestaña de actuaciones, en el listado puede ver la fecha de creación. </a:t>
-            </a:r>
-          </a:p>
-          <a:p>
-            <a:pPr marL="285750" indent="-285750" algn="just">
-              <a:buFont typeface="Wingdings" panose="05000000000000000000" pitchFamily="2" charset="2"/>
-              <a:buChar char="Ø"/>
-            </a:pPr>
-            <a:r>
-              <a:rPr lang="es-CO" b="1" dirty="0"/>
-              <a:t>Recuerde que solo se tendrán en cuenta aquellas actuaciones creadas por el estudiante, mas no las creadas por el docente asesor y aquellos anexos que no estén anulados.</a:t>
-            </a:r>
+            <a:endParaRPr lang="es-CO" b="1" dirty="0"/>
           </a:p>
         </p:txBody>
       </p:sp>
@@ -3638,53 +3612,12 @@
           </a:p>
         </p:txBody>
       </p:sp>
-      <p:pic>
-        <p:nvPicPr>
-          <p:cNvPr id="19" name="Imagen 18">
-            <a:extLst>
-              <a:ext uri="{FF2B5EF4-FFF2-40B4-BE49-F238E27FC236}">
-                <a16:creationId xmlns:a16="http://schemas.microsoft.com/office/drawing/2014/main" id="{9A4DA2B7-9B4A-5FD1-E61F-594084326029}"/>
-              </a:ext>
-            </a:extLst>
-          </p:cNvPr>
-          <p:cNvPicPr>
-            <a:picLocks noChangeAspect="1"/>
-          </p:cNvPicPr>
-          <p:nvPr/>
-        </p:nvPicPr>
-        <p:blipFill>
-          <a:blip r:embed="rId3"/>
-          <a:stretch>
-            <a:fillRect/>
-          </a:stretch>
-        </p:blipFill>
-        <p:spPr>
-          <a:xfrm>
-            <a:off x="5734464" y="301672"/>
-            <a:ext cx="6340732" cy="2900430"/>
-          </a:xfrm>
-          <a:prstGeom prst="roundRect">
-            <a:avLst>
-              <a:gd name="adj" fmla="val 8594"/>
-            </a:avLst>
-          </a:prstGeom>
-          <a:solidFill>
-            <a:srgbClr val="FFFFFF">
-              <a:shade val="85000"/>
-            </a:srgbClr>
-          </a:solidFill>
-          <a:ln>
-            <a:noFill/>
-          </a:ln>
-          <a:effectLst/>
-        </p:spPr>
-      </p:pic>
-      <p:sp>
-        <p:nvSpPr>
-          <p:cNvPr id="20" name="Flecha: arriba y abajo 19">
-            <a:extLst>
-              <a:ext uri="{FF2B5EF4-FFF2-40B4-BE49-F238E27FC236}">
-                <a16:creationId xmlns:a16="http://schemas.microsoft.com/office/drawing/2014/main" id="{B0CFC603-9496-72A3-0EA0-40CAF706B026}"/>
+      <p:sp>
+        <p:nvSpPr>
+          <p:cNvPr id="37" name="Rectángulo: esquinas redondeadas 36">
+            <a:extLst>
+              <a:ext uri="{FF2B5EF4-FFF2-40B4-BE49-F238E27FC236}">
+                <a16:creationId xmlns:a16="http://schemas.microsoft.com/office/drawing/2014/main" id="{0F8C11D3-3C42-C4A7-61A0-5C4948094B3E}"/>
               </a:ext>
             </a:extLst>
           </p:cNvPr>
@@ -3693,14 +3626,14 @@
         </p:nvSpPr>
         <p:spPr>
           <a:xfrm>
-            <a:off x="11264649" y="2162229"/>
-            <a:ext cx="177299" cy="436099"/>
-          </a:xfrm>
-          <a:prstGeom prst="upDownArrow">
+            <a:off x="8374930" y="2742526"/>
+            <a:ext cx="1407114" cy="216977"/>
+          </a:xfrm>
+          <a:prstGeom prst="roundRect">
             <a:avLst/>
           </a:prstGeom>
           <a:solidFill>
-            <a:srgbClr val="00B050"/>
+            <a:schemeClr val="bg1"/>
           </a:solidFill>
           <a:ln>
             <a:noFill/>
@@ -3727,16 +3660,23 @@
           <a:lstStyle/>
           <a:p>
             <a:pPr algn="ctr"/>
-            <a:endParaRPr lang="es-CO"/>
-          </a:p>
-        </p:txBody>
-      </p:sp>
-      <p:sp>
-        <p:nvSpPr>
-          <p:cNvPr id="22" name="Flecha: arriba y abajo 21">
-            <a:extLst>
-              <a:ext uri="{FF2B5EF4-FFF2-40B4-BE49-F238E27FC236}">
-                <a16:creationId xmlns:a16="http://schemas.microsoft.com/office/drawing/2014/main" id="{25A4025E-8E2E-F8EE-A06B-9A4274F7904D}"/>
+            <a:r>
+              <a:rPr lang="es-CO" sz="1600" dirty="0">
+                <a:solidFill>
+                  <a:schemeClr val="tx1"/>
+                </a:solidFill>
+              </a:rPr>
+              <a:t>Conocimiento</a:t>
+            </a:r>
+          </a:p>
+        </p:txBody>
+      </p:sp>
+      <p:sp>
+        <p:nvSpPr>
+          <p:cNvPr id="39" name="Rectángulo: esquinas redondeadas 38">
+            <a:extLst>
+              <a:ext uri="{FF2B5EF4-FFF2-40B4-BE49-F238E27FC236}">
+                <a16:creationId xmlns:a16="http://schemas.microsoft.com/office/drawing/2014/main" id="{ABCBF60F-DDBE-BF0C-0635-73DD99A347C2}"/>
               </a:ext>
             </a:extLst>
           </p:cNvPr>
@@ -3745,14 +3685,14 @@
         </p:nvSpPr>
         <p:spPr>
           <a:xfrm>
-            <a:off x="11264649" y="1328385"/>
-            <a:ext cx="177299" cy="436099"/>
-          </a:xfrm>
-          <a:prstGeom prst="upDownArrow">
+            <a:off x="8374930" y="3096916"/>
+            <a:ext cx="1407114" cy="216977"/>
+          </a:xfrm>
+          <a:prstGeom prst="roundRect">
             <a:avLst/>
           </a:prstGeom>
           <a:solidFill>
-            <a:srgbClr val="00B050"/>
+            <a:schemeClr val="bg1"/>
           </a:solidFill>
           <a:ln>
             <a:noFill/>
@@ -3779,16 +3719,23 @@
           <a:lstStyle/>
           <a:p>
             <a:pPr algn="ctr"/>
-            <a:endParaRPr lang="es-CO" dirty="0"/>
-          </a:p>
-        </p:txBody>
-      </p:sp>
-      <p:sp>
-        <p:nvSpPr>
-          <p:cNvPr id="23" name="Rectángulo: esquinas redondeadas 22">
-            <a:extLst>
-              <a:ext uri="{FF2B5EF4-FFF2-40B4-BE49-F238E27FC236}">
-                <a16:creationId xmlns:a16="http://schemas.microsoft.com/office/drawing/2014/main" id="{9C3D4B20-63DD-3680-857C-38710B747EF8}"/>
+            <a:r>
+              <a:rPr lang="es-CO" sz="1600" dirty="0">
+                <a:solidFill>
+                  <a:schemeClr val="tx1"/>
+                </a:solidFill>
+              </a:rPr>
+              <a:t>Aplicación</a:t>
+            </a:r>
+          </a:p>
+        </p:txBody>
+      </p:sp>
+      <p:sp>
+        <p:nvSpPr>
+          <p:cNvPr id="40" name="Rectángulo: esquinas redondeadas 39">
+            <a:extLst>
+              <a:ext uri="{FF2B5EF4-FFF2-40B4-BE49-F238E27FC236}">
+                <a16:creationId xmlns:a16="http://schemas.microsoft.com/office/drawing/2014/main" id="{554B48CA-F605-55A2-1EF5-77444550B7F6}"/>
               </a:ext>
             </a:extLst>
           </p:cNvPr>
@@ -3797,8 +3744,8 @@
         </p:nvSpPr>
         <p:spPr>
           <a:xfrm>
-            <a:off x="5786412" y="907158"/>
-            <a:ext cx="4810109" cy="705974"/>
+            <a:off x="8374930" y="3447163"/>
+            <a:ext cx="1407114" cy="216977"/>
           </a:xfrm>
           <a:prstGeom prst="roundRect">
             <a:avLst/>
@@ -3832,22 +3779,22 @@
           <a:p>
             <a:pPr algn="ctr"/>
             <a:r>
-              <a:rPr lang="es-CO" dirty="0">
+              <a:rPr lang="es-CO" sz="1600" dirty="0">
                 <a:solidFill>
                   <a:schemeClr val="tx1"/>
                 </a:solidFill>
               </a:rPr>
-              <a:t>ACTUACIÓN 3</a:t>
-            </a:r>
-          </a:p>
-        </p:txBody>
-      </p:sp>
-      <p:sp>
-        <p:nvSpPr>
-          <p:cNvPr id="24" name="Rectángulo: esquinas redondeadas 23">
-            <a:extLst>
-              <a:ext uri="{FF2B5EF4-FFF2-40B4-BE49-F238E27FC236}">
-                <a16:creationId xmlns:a16="http://schemas.microsoft.com/office/drawing/2014/main" id="{31BF783D-3BDF-57A3-102B-B03418B30E08}"/>
+              <a:t>Ética</a:t>
+            </a:r>
+          </a:p>
+        </p:txBody>
+      </p:sp>
+      <p:sp>
+        <p:nvSpPr>
+          <p:cNvPr id="41" name="Rectángulo: esquinas redondeadas 40">
+            <a:extLst>
+              <a:ext uri="{FF2B5EF4-FFF2-40B4-BE49-F238E27FC236}">
+                <a16:creationId xmlns:a16="http://schemas.microsoft.com/office/drawing/2014/main" id="{FB23FACC-0927-6527-8210-9E07CFE76CE3}"/>
               </a:ext>
             </a:extLst>
           </p:cNvPr>
@@ -3856,8 +3803,8 @@
         </p:nvSpPr>
         <p:spPr>
           <a:xfrm>
-            <a:off x="5786412" y="1679484"/>
-            <a:ext cx="4810109" cy="711200"/>
+            <a:off x="8249939" y="3819802"/>
+            <a:ext cx="1407114" cy="216977"/>
           </a:xfrm>
           <a:prstGeom prst="roundRect">
             <a:avLst/>
@@ -3891,296 +3838,51 @@
           <a:p>
             <a:pPr algn="ctr"/>
             <a:r>
-              <a:rPr lang="es-CO" dirty="0">
+              <a:rPr lang="es-CO" sz="1600" dirty="0">
                 <a:solidFill>
                   <a:schemeClr val="tx1"/>
                 </a:solidFill>
               </a:rPr>
-              <a:t>ACTUACIÓN 2</a:t>
-            </a:r>
-          </a:p>
-        </p:txBody>
-      </p:sp>
-      <p:sp>
-        <p:nvSpPr>
-          <p:cNvPr id="25" name="Rectángulo: esquinas redondeadas 24">
-            <a:extLst>
-              <a:ext uri="{FF2B5EF4-FFF2-40B4-BE49-F238E27FC236}">
-                <a16:creationId xmlns:a16="http://schemas.microsoft.com/office/drawing/2014/main" id="{60382C07-4DC0-C195-ADC4-E8177385D3F6}"/>
-              </a:ext>
-            </a:extLst>
-          </p:cNvPr>
-          <p:cNvSpPr/>
+              <a:t>Concepto</a:t>
+            </a:r>
+          </a:p>
+        </p:txBody>
+      </p:sp>
+      <p:pic>
+        <p:nvPicPr>
+          <p:cNvPr id="3" name="Imagen 2">
+            <a:extLst>
+              <a:ext uri="{FF2B5EF4-FFF2-40B4-BE49-F238E27FC236}">
+                <a16:creationId xmlns:a16="http://schemas.microsoft.com/office/drawing/2014/main" id="{995671C8-3B28-B2CD-FF83-79ACF9D3783E}"/>
+              </a:ext>
+            </a:extLst>
+          </p:cNvPr>
+          <p:cNvPicPr>
+            <a:picLocks noChangeAspect="1"/>
+          </p:cNvPicPr>
           <p:nvPr/>
-        </p:nvSpPr>
-        <p:spPr>
-          <a:xfrm>
-            <a:off x="5786412" y="2440103"/>
-            <a:ext cx="4810109" cy="711200"/>
-          </a:xfrm>
-          <a:prstGeom prst="roundRect">
+        </p:nvPicPr>
+        <p:blipFill rotWithShape="1">
+          <a:blip r:embed="rId3"/>
+          <a:srcRect r="36561"/>
+          <a:stretch/>
+        </p:blipFill>
+        <p:spPr>
+          <a:xfrm>
+            <a:off x="5617660" y="1265356"/>
+            <a:ext cx="6574340" cy="4645114"/>
+          </a:xfrm>
+          <a:prstGeom prst="rect">
             <a:avLst/>
           </a:prstGeom>
-          <a:solidFill>
-            <a:schemeClr val="bg1"/>
-          </a:solidFill>
-          <a:ln>
-            <a:noFill/>
-          </a:ln>
-        </p:spPr>
-        <p:style>
-          <a:lnRef idx="2">
-            <a:schemeClr val="accent1">
-              <a:shade val="50000"/>
-            </a:schemeClr>
-          </a:lnRef>
-          <a:fillRef idx="1">
-            <a:schemeClr val="accent1"/>
-          </a:fillRef>
-          <a:effectRef idx="0">
-            <a:schemeClr val="accent1"/>
-          </a:effectRef>
-          <a:fontRef idx="minor">
-            <a:schemeClr val="lt1"/>
-          </a:fontRef>
-        </p:style>
-        <p:txBody>
-          <a:bodyPr rtlCol="0" anchor="ctr"/>
-          <a:lstStyle/>
-          <a:p>
-            <a:pPr algn="ctr"/>
-            <a:r>
-              <a:rPr lang="es-CO" dirty="0">
-                <a:solidFill>
-                  <a:schemeClr val="tx1"/>
-                </a:solidFill>
-              </a:rPr>
-              <a:t>ACTUACIÓN 1</a:t>
-            </a:r>
-          </a:p>
-        </p:txBody>
-      </p:sp>
-      <p:sp>
-        <p:nvSpPr>
-          <p:cNvPr id="31" name="Rectángulo: esquinas redondeadas 30">
-            <a:extLst>
-              <a:ext uri="{FF2B5EF4-FFF2-40B4-BE49-F238E27FC236}">
-                <a16:creationId xmlns:a16="http://schemas.microsoft.com/office/drawing/2014/main" id="{D65F22FE-C3CC-98BC-033F-7D0B73AC22F0}"/>
-              </a:ext>
-            </a:extLst>
-          </p:cNvPr>
-          <p:cNvSpPr/>
-          <p:nvPr/>
-        </p:nvSpPr>
-        <p:spPr>
-          <a:xfrm>
-            <a:off x="10735059" y="907158"/>
-            <a:ext cx="1201598" cy="291065"/>
-          </a:xfrm>
-          <a:prstGeom prst="roundRect">
-            <a:avLst/>
-          </a:prstGeom>
-          <a:solidFill>
-            <a:schemeClr val="accent3">
-              <a:lumMod val="75000"/>
-            </a:schemeClr>
-          </a:solidFill>
-          <a:ln>
-            <a:noFill/>
-          </a:ln>
-        </p:spPr>
-        <p:style>
-          <a:lnRef idx="2">
-            <a:schemeClr val="accent1">
-              <a:shade val="50000"/>
-            </a:schemeClr>
-          </a:lnRef>
-          <a:fillRef idx="1">
-            <a:schemeClr val="accent1"/>
-          </a:fillRef>
-          <a:effectRef idx="0">
-            <a:schemeClr val="accent1"/>
-          </a:effectRef>
-          <a:fontRef idx="minor">
-            <a:schemeClr val="lt1"/>
-          </a:fontRef>
-        </p:style>
-        <p:txBody>
-          <a:bodyPr rtlCol="0" anchor="ctr"/>
-          <a:lstStyle/>
-          <a:p>
-            <a:pPr algn="ctr"/>
-            <a:r>
-              <a:rPr lang="es-CO" sz="1600" dirty="0"/>
-              <a:t>04-17-2023</a:t>
-            </a:r>
-          </a:p>
-        </p:txBody>
-      </p:sp>
-      <p:sp>
-        <p:nvSpPr>
-          <p:cNvPr id="32" name="Rectángulo: esquinas redondeadas 31">
-            <a:extLst>
-              <a:ext uri="{FF2B5EF4-FFF2-40B4-BE49-F238E27FC236}">
-                <a16:creationId xmlns:a16="http://schemas.microsoft.com/office/drawing/2014/main" id="{2E38185E-328B-9863-B21B-04C76E33B7C5}"/>
-              </a:ext>
-            </a:extLst>
-          </p:cNvPr>
-          <p:cNvSpPr/>
-          <p:nvPr/>
-        </p:nvSpPr>
-        <p:spPr>
-          <a:xfrm>
-            <a:off x="10719802" y="1815283"/>
-            <a:ext cx="1201598" cy="291065"/>
-          </a:xfrm>
-          <a:prstGeom prst="roundRect">
-            <a:avLst/>
-          </a:prstGeom>
-          <a:solidFill>
-            <a:schemeClr val="accent3">
-              <a:lumMod val="75000"/>
-            </a:schemeClr>
-          </a:solidFill>
-          <a:ln>
-            <a:noFill/>
-          </a:ln>
-        </p:spPr>
-        <p:style>
-          <a:lnRef idx="2">
-            <a:schemeClr val="accent1">
-              <a:shade val="50000"/>
-            </a:schemeClr>
-          </a:lnRef>
-          <a:fillRef idx="1">
-            <a:schemeClr val="accent1"/>
-          </a:fillRef>
-          <a:effectRef idx="0">
-            <a:schemeClr val="accent1"/>
-          </a:effectRef>
-          <a:fontRef idx="minor">
-            <a:schemeClr val="lt1"/>
-          </a:fontRef>
-        </p:style>
-        <p:txBody>
-          <a:bodyPr rtlCol="0" anchor="ctr"/>
-          <a:lstStyle/>
-          <a:p>
-            <a:pPr algn="ctr"/>
-            <a:r>
-              <a:rPr lang="es-CO" sz="1600" dirty="0"/>
-              <a:t>03-23-2023</a:t>
-            </a:r>
-          </a:p>
-        </p:txBody>
-      </p:sp>
-      <p:sp>
-        <p:nvSpPr>
-          <p:cNvPr id="33" name="Rectángulo: esquinas redondeadas 32">
-            <a:extLst>
-              <a:ext uri="{FF2B5EF4-FFF2-40B4-BE49-F238E27FC236}">
-                <a16:creationId xmlns:a16="http://schemas.microsoft.com/office/drawing/2014/main" id="{0A3A0831-102F-E364-A31A-5287AA2245D6}"/>
-              </a:ext>
-            </a:extLst>
-          </p:cNvPr>
-          <p:cNvSpPr/>
-          <p:nvPr/>
-        </p:nvSpPr>
-        <p:spPr>
-          <a:xfrm>
-            <a:off x="10719802" y="2623728"/>
-            <a:ext cx="1201598" cy="291065"/>
-          </a:xfrm>
-          <a:prstGeom prst="roundRect">
-            <a:avLst/>
-          </a:prstGeom>
-          <a:solidFill>
-            <a:schemeClr val="accent3">
-              <a:lumMod val="75000"/>
-            </a:schemeClr>
-          </a:solidFill>
-          <a:ln>
-            <a:noFill/>
-          </a:ln>
-        </p:spPr>
-        <p:style>
-          <a:lnRef idx="2">
-            <a:schemeClr val="accent1">
-              <a:shade val="50000"/>
-            </a:schemeClr>
-          </a:lnRef>
-          <a:fillRef idx="1">
-            <a:schemeClr val="accent1"/>
-          </a:fillRef>
-          <a:effectRef idx="0">
-            <a:schemeClr val="accent1"/>
-          </a:effectRef>
-          <a:fontRef idx="minor">
-            <a:schemeClr val="lt1"/>
-          </a:fontRef>
-        </p:style>
-        <p:txBody>
-          <a:bodyPr rtlCol="0" anchor="ctr"/>
-          <a:lstStyle/>
-          <a:p>
-            <a:pPr algn="ctr"/>
-            <a:r>
-              <a:rPr lang="es-CO" sz="1600" dirty="0"/>
-              <a:t>02-10-2023</a:t>
-            </a:r>
-          </a:p>
-        </p:txBody>
-      </p:sp>
-      <p:sp>
-        <p:nvSpPr>
-          <p:cNvPr id="34" name="CuadroTexto 33">
-            <a:extLst>
-              <a:ext uri="{FF2B5EF4-FFF2-40B4-BE49-F238E27FC236}">
-                <a16:creationId xmlns:a16="http://schemas.microsoft.com/office/drawing/2014/main" id="{97B49A1F-CE3C-01F0-779D-C75766075C77}"/>
-              </a:ext>
-            </a:extLst>
-          </p:cNvPr>
-          <p:cNvSpPr txBox="1"/>
-          <p:nvPr/>
-        </p:nvSpPr>
-        <p:spPr>
-          <a:xfrm>
-            <a:off x="269496" y="5699064"/>
-            <a:ext cx="5205500" cy="1021556"/>
-          </a:xfrm>
-          <a:prstGeom prst="roundRect">
-            <a:avLst/>
-          </a:prstGeom>
-          <a:solidFill>
-            <a:schemeClr val="bg1">
-              <a:alpha val="90000"/>
-            </a:schemeClr>
-          </a:solidFill>
-        </p:spPr>
-        <p:txBody>
-          <a:bodyPr wrap="square" rtlCol="0">
-            <a:spAutoFit/>
-          </a:bodyPr>
-          <a:lstStyle>
-            <a:defPPr>
-              <a:defRPr lang="es-CO"/>
-            </a:defPPr>
-            <a:lvl1pPr algn="just"/>
-          </a:lstStyle>
-          <a:p>
-            <a:r>
-              <a:rPr lang="es-CO" dirty="0"/>
-              <a:t>Si después de revisar evidencia que el sistema le puso una nota por fuera de los parámetros establecidos comuníquese al 3106038006</a:t>
-            </a:r>
-          </a:p>
-        </p:txBody>
-      </p:sp>
+        </p:spPr>
+      </p:pic>
       <p:pic>
         <p:nvPicPr>
-          <p:cNvPr id="36" name="Imagen 35">
-            <a:extLst>
-              <a:ext uri="{FF2B5EF4-FFF2-40B4-BE49-F238E27FC236}">
-                <a16:creationId xmlns:a16="http://schemas.microsoft.com/office/drawing/2014/main" id="{D5853CEA-810C-67E6-860C-D713A3A1C1C3}"/>
+          <p:cNvPr id="6" name="Imagen 5">
+            <a:extLst>
+              <a:ext uri="{FF2B5EF4-FFF2-40B4-BE49-F238E27FC236}">
+                <a16:creationId xmlns:a16="http://schemas.microsoft.com/office/drawing/2014/main" id="{1C154C18-F086-4C83-BB0B-1F851677755A}"/>
               </a:ext>
             </a:extLst>
           </p:cNvPr>
@@ -4197,267 +3899,20 @@
         </p:blipFill>
         <p:spPr>
           <a:xfrm>
-            <a:off x="5734464" y="3282517"/>
-            <a:ext cx="6340732" cy="3114675"/>
-          </a:xfrm>
-          <a:prstGeom prst="roundRect">
-            <a:avLst>
-              <a:gd name="adj" fmla="val 8594"/>
-            </a:avLst>
-          </a:prstGeom>
-          <a:solidFill>
-            <a:srgbClr val="FFFFFF">
-              <a:shade val="85000"/>
-            </a:srgbClr>
-          </a:solidFill>
-          <a:ln>
-            <a:noFill/>
-          </a:ln>
-          <a:effectLst/>
-        </p:spPr>
-      </p:pic>
-      <p:sp>
-        <p:nvSpPr>
-          <p:cNvPr id="37" name="Rectángulo: esquinas redondeadas 36">
-            <a:extLst>
-              <a:ext uri="{FF2B5EF4-FFF2-40B4-BE49-F238E27FC236}">
-                <a16:creationId xmlns:a16="http://schemas.microsoft.com/office/drawing/2014/main" id="{0F8C11D3-3C42-C4A7-61A0-5C4948094B3E}"/>
-              </a:ext>
-            </a:extLst>
-          </p:cNvPr>
-          <p:cNvSpPr/>
-          <p:nvPr/>
-        </p:nvSpPr>
-        <p:spPr>
-          <a:xfrm>
-            <a:off x="8364902" y="4293030"/>
-            <a:ext cx="1407114" cy="216977"/>
-          </a:xfrm>
-          <a:prstGeom prst="roundRect">
+            <a:off x="6471138" y="1426853"/>
+            <a:ext cx="5206655" cy="930849"/>
+          </a:xfrm>
+          <a:prstGeom prst="rect">
             <a:avLst/>
           </a:prstGeom>
-          <a:solidFill>
-            <a:schemeClr val="bg1"/>
-          </a:solidFill>
-          <a:ln>
-            <a:noFill/>
-          </a:ln>
-        </p:spPr>
-        <p:style>
-          <a:lnRef idx="2">
-            <a:schemeClr val="accent1">
-              <a:shade val="50000"/>
-            </a:schemeClr>
-          </a:lnRef>
-          <a:fillRef idx="1">
-            <a:schemeClr val="accent1"/>
-          </a:fillRef>
-          <a:effectRef idx="0">
-            <a:schemeClr val="accent1"/>
-          </a:effectRef>
-          <a:fontRef idx="minor">
-            <a:schemeClr val="lt1"/>
-          </a:fontRef>
-        </p:style>
-        <p:txBody>
-          <a:bodyPr rtlCol="0" anchor="ctr"/>
-          <a:lstStyle/>
-          <a:p>
-            <a:pPr algn="ctr"/>
-            <a:r>
-              <a:rPr lang="es-CO" sz="1600" dirty="0">
-                <a:solidFill>
-                  <a:schemeClr val="tx1"/>
-                </a:solidFill>
-              </a:rPr>
-              <a:t>Conocimiento</a:t>
-            </a:r>
-          </a:p>
-        </p:txBody>
-      </p:sp>
-      <p:sp>
-        <p:nvSpPr>
-          <p:cNvPr id="39" name="Rectángulo: esquinas redondeadas 38">
-            <a:extLst>
-              <a:ext uri="{FF2B5EF4-FFF2-40B4-BE49-F238E27FC236}">
-                <a16:creationId xmlns:a16="http://schemas.microsoft.com/office/drawing/2014/main" id="{ABCBF60F-DDBE-BF0C-0635-73DD99A347C2}"/>
-              </a:ext>
-            </a:extLst>
-          </p:cNvPr>
-          <p:cNvSpPr/>
-          <p:nvPr/>
-        </p:nvSpPr>
-        <p:spPr>
-          <a:xfrm>
-            <a:off x="8364902" y="4647420"/>
-            <a:ext cx="1407114" cy="216977"/>
-          </a:xfrm>
-          <a:prstGeom prst="roundRect">
-            <a:avLst/>
-          </a:prstGeom>
-          <a:solidFill>
-            <a:schemeClr val="bg1"/>
-          </a:solidFill>
-          <a:ln>
-            <a:noFill/>
-          </a:ln>
-        </p:spPr>
-        <p:style>
-          <a:lnRef idx="2">
-            <a:schemeClr val="accent1">
-              <a:shade val="50000"/>
-            </a:schemeClr>
-          </a:lnRef>
-          <a:fillRef idx="1">
-            <a:schemeClr val="accent1"/>
-          </a:fillRef>
-          <a:effectRef idx="0">
-            <a:schemeClr val="accent1"/>
-          </a:effectRef>
-          <a:fontRef idx="minor">
-            <a:schemeClr val="lt1"/>
-          </a:fontRef>
-        </p:style>
-        <p:txBody>
-          <a:bodyPr rtlCol="0" anchor="ctr"/>
-          <a:lstStyle/>
-          <a:p>
-            <a:pPr algn="ctr"/>
-            <a:r>
-              <a:rPr lang="es-CO" sz="1600" dirty="0">
-                <a:solidFill>
-                  <a:schemeClr val="tx1"/>
-                </a:solidFill>
-              </a:rPr>
-              <a:t>Aplicación</a:t>
-            </a:r>
-          </a:p>
-        </p:txBody>
-      </p:sp>
-      <p:sp>
-        <p:nvSpPr>
-          <p:cNvPr id="40" name="Rectángulo: esquinas redondeadas 39">
-            <a:extLst>
-              <a:ext uri="{FF2B5EF4-FFF2-40B4-BE49-F238E27FC236}">
-                <a16:creationId xmlns:a16="http://schemas.microsoft.com/office/drawing/2014/main" id="{554B48CA-F605-55A2-1EF5-77444550B7F6}"/>
-              </a:ext>
-            </a:extLst>
-          </p:cNvPr>
-          <p:cNvSpPr/>
-          <p:nvPr/>
-        </p:nvSpPr>
-        <p:spPr>
-          <a:xfrm>
-            <a:off x="8364902" y="4997667"/>
-            <a:ext cx="1407114" cy="216977"/>
-          </a:xfrm>
-          <a:prstGeom prst="roundRect">
-            <a:avLst/>
-          </a:prstGeom>
-          <a:solidFill>
-            <a:schemeClr val="bg1"/>
-          </a:solidFill>
-          <a:ln>
-            <a:noFill/>
-          </a:ln>
-        </p:spPr>
-        <p:style>
-          <a:lnRef idx="2">
-            <a:schemeClr val="accent1">
-              <a:shade val="50000"/>
-            </a:schemeClr>
-          </a:lnRef>
-          <a:fillRef idx="1">
-            <a:schemeClr val="accent1"/>
-          </a:fillRef>
-          <a:effectRef idx="0">
-            <a:schemeClr val="accent1"/>
-          </a:effectRef>
-          <a:fontRef idx="minor">
-            <a:schemeClr val="lt1"/>
-          </a:fontRef>
-        </p:style>
-        <p:txBody>
-          <a:bodyPr rtlCol="0" anchor="ctr"/>
-          <a:lstStyle/>
-          <a:p>
-            <a:pPr algn="ctr"/>
-            <a:r>
-              <a:rPr lang="es-CO" sz="1600" dirty="0">
-                <a:solidFill>
-                  <a:schemeClr val="tx1"/>
-                </a:solidFill>
-              </a:rPr>
-              <a:t>Ética</a:t>
-            </a:r>
-          </a:p>
-        </p:txBody>
-      </p:sp>
-      <p:sp>
-        <p:nvSpPr>
-          <p:cNvPr id="41" name="Rectángulo: esquinas redondeadas 40">
-            <a:extLst>
-              <a:ext uri="{FF2B5EF4-FFF2-40B4-BE49-F238E27FC236}">
-                <a16:creationId xmlns:a16="http://schemas.microsoft.com/office/drawing/2014/main" id="{FB23FACC-0927-6527-8210-9E07CFE76CE3}"/>
-              </a:ext>
-            </a:extLst>
-          </p:cNvPr>
-          <p:cNvSpPr/>
-          <p:nvPr/>
-        </p:nvSpPr>
-        <p:spPr>
-          <a:xfrm>
-            <a:off x="8239911" y="5370306"/>
-            <a:ext cx="1407114" cy="216977"/>
-          </a:xfrm>
-          <a:prstGeom prst="roundRect">
-            <a:avLst/>
-          </a:prstGeom>
-          <a:solidFill>
-            <a:schemeClr val="bg1"/>
-          </a:solidFill>
-          <a:ln>
-            <a:noFill/>
-          </a:ln>
-        </p:spPr>
-        <p:style>
-          <a:lnRef idx="2">
-            <a:schemeClr val="accent1">
-              <a:shade val="50000"/>
-            </a:schemeClr>
-          </a:lnRef>
-          <a:fillRef idx="1">
-            <a:schemeClr val="accent1"/>
-          </a:fillRef>
-          <a:effectRef idx="0">
-            <a:schemeClr val="accent1"/>
-          </a:effectRef>
-          <a:fontRef idx="minor">
-            <a:schemeClr val="lt1"/>
-          </a:fontRef>
-        </p:style>
-        <p:txBody>
-          <a:bodyPr rtlCol="0" anchor="ctr"/>
-          <a:lstStyle/>
-          <a:p>
-            <a:pPr algn="ctr"/>
-            <a:r>
-              <a:rPr lang="es-CO" sz="1600" dirty="0">
-                <a:solidFill>
-                  <a:schemeClr val="tx1"/>
-                </a:solidFill>
-              </a:rPr>
-              <a:t>Concepto</a:t>
-            </a:r>
-          </a:p>
-        </p:txBody>
-      </p:sp>
+        </p:spPr>
+      </p:pic>
       <p:pic>
         <p:nvPicPr>
-          <p:cNvPr id="43" name="Imagen 42">
-            <a:extLst>
-              <a:ext uri="{FF2B5EF4-FFF2-40B4-BE49-F238E27FC236}">
-                <a16:creationId xmlns:a16="http://schemas.microsoft.com/office/drawing/2014/main" id="{CFBF11B3-35EA-96C3-2C34-8CA8D1FE4098}"/>
+          <p:cNvPr id="45" name="Gráfico 44" descr="Lupa">
+            <a:extLst>
+              <a:ext uri="{FF2B5EF4-FFF2-40B4-BE49-F238E27FC236}">
+                <a16:creationId xmlns:a16="http://schemas.microsoft.com/office/drawing/2014/main" id="{F69B865E-9B16-5794-6A67-0567EA8D5C79}"/>
               </a:ext>
             </a:extLst>
           </p:cNvPr>
@@ -4466,16 +3921,24 @@
           </p:cNvPicPr>
           <p:nvPr/>
         </p:nvPicPr>
-        <p:blipFill>
-          <a:blip r:embed="rId5"/>
-          <a:stretch>
-            <a:fillRect/>
-          </a:stretch>
+        <p:blipFill rotWithShape="1">
+          <a:blip r:embed="rId5">
+            <a:extLst>
+              <a:ext uri="{28A0092B-C50C-407E-A947-70E740481C1C}">
+                <a14:useLocalDpi xmlns:a14="http://schemas.microsoft.com/office/drawing/2010/main" val="0"/>
+              </a:ext>
+              <a:ext uri="{96DAC541-7B7A-43D3-8B79-37D633B846F1}">
+                <asvg:svgBlip xmlns:asvg="http://schemas.microsoft.com/office/drawing/2016/SVG/main" r:embed="rId6"/>
+              </a:ext>
+            </a:extLst>
+          </a:blip>
+          <a:srcRect l="7681" t="8073" b="8034"/>
+          <a:stretch/>
         </p:blipFill>
         <p:spPr>
-          <a:xfrm>
-            <a:off x="9585033" y="4920926"/>
-            <a:ext cx="2250314" cy="1274618"/>
+          <a:xfrm rot="6564120">
+            <a:off x="7828760" y="404965"/>
+            <a:ext cx="4447765" cy="4066781"/>
           </a:xfrm>
           <a:prstGeom prst="rect">
             <a:avLst/>
@@ -4484,99 +3947,56 @@
       </p:pic>
       <p:sp>
         <p:nvSpPr>
-          <p:cNvPr id="46" name="Rectángulo 45">
-            <a:extLst>
-              <a:ext uri="{FF2B5EF4-FFF2-40B4-BE49-F238E27FC236}">
-                <a16:creationId xmlns:a16="http://schemas.microsoft.com/office/drawing/2014/main" id="{E36FE3F4-9027-D2B2-0CA0-775BBDEE594D}"/>
-              </a:ext>
-            </a:extLst>
-          </p:cNvPr>
-          <p:cNvSpPr/>
+          <p:cNvPr id="34" name="CuadroTexto 33">
+            <a:extLst>
+              <a:ext uri="{FF2B5EF4-FFF2-40B4-BE49-F238E27FC236}">
+                <a16:creationId xmlns:a16="http://schemas.microsoft.com/office/drawing/2014/main" id="{97B49A1F-CE3C-01F0-779D-C75766075C77}"/>
+              </a:ext>
+            </a:extLst>
+          </p:cNvPr>
+          <p:cNvSpPr txBox="1"/>
           <p:nvPr/>
         </p:nvSpPr>
         <p:spPr>
           <a:xfrm>
-            <a:off x="9170815" y="6195544"/>
-            <a:ext cx="2250314" cy="133270"/>
-          </a:xfrm>
-          <a:prstGeom prst="rect">
+            <a:off x="196753" y="3096916"/>
+            <a:ext cx="5295344" cy="1328023"/>
+          </a:xfrm>
+          <a:prstGeom prst="roundRect">
             <a:avLst/>
           </a:prstGeom>
           <a:solidFill>
-            <a:schemeClr val="bg1"/>
+            <a:schemeClr val="bg1">
+              <a:alpha val="90000"/>
+            </a:schemeClr>
           </a:solidFill>
-          <a:ln>
-            <a:noFill/>
-          </a:ln>
-        </p:spPr>
-        <p:style>
-          <a:lnRef idx="2">
-            <a:schemeClr val="accent1">
-              <a:shade val="50000"/>
-            </a:schemeClr>
-          </a:lnRef>
-          <a:fillRef idx="1">
-            <a:schemeClr val="accent1"/>
-          </a:fillRef>
-          <a:effectRef idx="0">
-            <a:schemeClr val="accent1"/>
-          </a:effectRef>
-          <a:fontRef idx="minor">
-            <a:schemeClr val="lt1"/>
-          </a:fontRef>
-        </p:style>
-        <p:txBody>
-          <a:bodyPr rtlCol="0" anchor="ctr"/>
-          <a:lstStyle/>
-          <a:p>
-            <a:pPr algn="ctr"/>
-            <a:endParaRPr lang="es-CO"/>
-          </a:p>
-        </p:txBody>
-      </p:sp>
-      <p:pic>
-        <p:nvPicPr>
-          <p:cNvPr id="45" name="Gráfico 44" descr="Lupa">
-            <a:extLst>
-              <a:ext uri="{FF2B5EF4-FFF2-40B4-BE49-F238E27FC236}">
-                <a16:creationId xmlns:a16="http://schemas.microsoft.com/office/drawing/2014/main" id="{F69B865E-9B16-5794-6A67-0567EA8D5C79}"/>
-              </a:ext>
-            </a:extLst>
-          </p:cNvPr>
-          <p:cNvPicPr>
-            <a:picLocks noChangeAspect="1"/>
-          </p:cNvPicPr>
-          <p:nvPr/>
-        </p:nvPicPr>
-        <p:blipFill>
-          <a:blip r:embed="rId6">
-            <a:extLst>
-              <a:ext uri="{28A0092B-C50C-407E-A947-70E740481C1C}">
-                <a14:useLocalDpi xmlns:a14="http://schemas.microsoft.com/office/drawing/2010/main" val="0"/>
-              </a:ext>
-              <a:ext uri="{96DAC541-7B7A-43D3-8B79-37D633B846F1}">
-                <asvg:svgBlip xmlns:asvg="http://schemas.microsoft.com/office/drawing/2016/SVG/main" r:embed="rId7"/>
-              </a:ext>
-            </a:extLst>
-          </a:blip>
-          <a:stretch>
-            <a:fillRect/>
-          </a:stretch>
-        </p:blipFill>
-        <p:spPr>
-          <a:xfrm rot="10800000">
-            <a:off x="7818335" y="2883760"/>
-            <a:ext cx="4735291" cy="4367636"/>
-          </a:xfrm>
-          <a:prstGeom prst="rect">
-            <a:avLst/>
-          </a:prstGeom>
-        </p:spPr>
-      </p:pic>
+        </p:spPr>
+        <p:txBody>
+          <a:bodyPr wrap="square" rtlCol="0">
+            <a:spAutoFit/>
+          </a:bodyPr>
+          <a:lstStyle>
+            <a:defPPr>
+              <a:defRPr lang="es-CO"/>
+            </a:defPPr>
+            <a:lvl1pPr algn="just"/>
+          </a:lstStyle>
+          <a:p>
+            <a:r>
+              <a:rPr lang="es-CO" b="1" dirty="0"/>
+              <a:t>Nota</a:t>
+            </a:r>
+            <a:r>
+              <a:rPr lang="es-CO" dirty="0"/>
+              <a:t>: Si el caso es reasignado no lo exime del ítem anterior, ya que es deber del estudiante comunicarse con la usuaria o usuario y redactar nuevamente según su entendimiento.</a:t>
+            </a:r>
+          </a:p>
+        </p:txBody>
+      </p:sp>
     </p:spTree>
     <p:extLst>
       <p:ext uri="{BB962C8B-B14F-4D97-AF65-F5344CB8AC3E}">
-        <p14:creationId xmlns:p14="http://schemas.microsoft.com/office/powerpoint/2010/main" val="2222916504"/>
+        <p14:creationId xmlns:p14="http://schemas.microsoft.com/office/powerpoint/2010/main" val="1776731106"/>
       </p:ext>
     </p:extLst>
   </p:cSld>
@@ -4595,6 +4015,7 @@
           <a:schemeClr val="tx1">
             <a:lumMod val="65000"/>
             <a:lumOff val="35000"/>
+            <a:alpha val="72000"/>
           </a:schemeClr>
         </a:solidFill>
         <a:effectLst/>
@@ -4672,7 +4093,7 @@
           </a:prstGeom>
           <a:solidFill>
             <a:srgbClr val="1AA513">
-              <a:alpha val="44000"/>
+              <a:alpha val="31765"/>
             </a:srgbClr>
           </a:solidFill>
           <a:ln>
@@ -4706,6 +4127,1269 @@
       </p:sp>
       <p:sp>
         <p:nvSpPr>
+          <p:cNvPr id="4" name="CuadroTexto 3">
+            <a:extLst>
+              <a:ext uri="{FF2B5EF4-FFF2-40B4-BE49-F238E27FC236}">
+                <a16:creationId xmlns:a16="http://schemas.microsoft.com/office/drawing/2014/main" id="{17E1BAEB-D355-DE0F-EF5A-E4CC5574A2A8}"/>
+              </a:ext>
+            </a:extLst>
+          </p:cNvPr>
+          <p:cNvSpPr txBox="1"/>
+          <p:nvPr/>
+        </p:nvSpPr>
+        <p:spPr>
+          <a:xfrm>
+            <a:off x="269496" y="1005125"/>
+            <a:ext cx="5205500" cy="4847749"/>
+          </a:xfrm>
+          <a:prstGeom prst="round2SameRect">
+            <a:avLst>
+              <a:gd name="adj1" fmla="val 3841"/>
+              <a:gd name="adj2" fmla="val 0"/>
+            </a:avLst>
+          </a:prstGeom>
+          <a:solidFill>
+            <a:schemeClr val="bg1">
+              <a:alpha val="90000"/>
+            </a:schemeClr>
+          </a:solidFill>
+        </p:spPr>
+        <p:txBody>
+          <a:bodyPr wrap="square" rtlCol="0">
+            <a:spAutoFit/>
+          </a:bodyPr>
+          <a:lstStyle/>
+          <a:p>
+            <a:pPr algn="just"/>
+            <a:endParaRPr lang="es-CO" dirty="0"/>
+          </a:p>
+          <a:p>
+            <a:pPr marL="285750" indent="-285750" algn="just">
+              <a:buFont typeface="Wingdings" panose="05000000000000000000" pitchFamily="2" charset="2"/>
+              <a:buChar char="Ø"/>
+            </a:pPr>
+            <a:r>
+              <a:rPr lang="es-CO" b="1" dirty="0"/>
+              <a:t>Al cerrar el corte se aplicaran notas a aquellos casos de seguimiento que después de 30 días de asignado NO tienen actuaciones (o anexos). También a aquellos que tienen entre una actuación y otra mas de 30 días. </a:t>
+            </a:r>
+          </a:p>
+          <a:p>
+            <a:pPr marL="285750" indent="-285750" algn="just">
+              <a:buFont typeface="Wingdings" panose="05000000000000000000" pitchFamily="2" charset="2"/>
+              <a:buChar char="Ø"/>
+            </a:pPr>
+            <a:r>
+              <a:rPr lang="es-CO" b="1" dirty="0"/>
+              <a:t>En el reporte de notas usted podrá ver de manera detallada el motivo de la nota. Si la nota se aplicó por lo expresado en el </a:t>
+            </a:r>
+            <a:r>
+              <a:rPr lang="es-CO" b="1" dirty="0" err="1"/>
+              <a:t>item</a:t>
+            </a:r>
+            <a:r>
+              <a:rPr lang="es-CO" b="1" dirty="0"/>
+              <a:t> anterior el sistema le indica el periodo evaluado.</a:t>
+            </a:r>
+          </a:p>
+          <a:p>
+            <a:pPr marL="285750" indent="-285750" algn="just">
+              <a:buFont typeface="Wingdings" panose="05000000000000000000" pitchFamily="2" charset="2"/>
+              <a:buChar char="Ø"/>
+            </a:pPr>
+            <a:r>
+              <a:rPr lang="es-CO" b="1" dirty="0"/>
+              <a:t>Para verificar el periodo ingrese al caso y en la pestaña de actuaciones, en el listado puede ver la fecha de creación. </a:t>
+            </a:r>
+          </a:p>
+          <a:p>
+            <a:pPr marL="285750" indent="-285750" algn="just">
+              <a:buFont typeface="Wingdings" panose="05000000000000000000" pitchFamily="2" charset="2"/>
+              <a:buChar char="Ø"/>
+            </a:pPr>
+            <a:r>
+              <a:rPr lang="es-CO" b="1" dirty="0"/>
+              <a:t>Recuerde que solo se tendrán en cuenta aquellas actuaciones creadas por el estudiante, mas no las creadas por el docente asesor y aquellos anexos que no estén anulados.</a:t>
+            </a:r>
+          </a:p>
+        </p:txBody>
+      </p:sp>
+      <p:sp>
+        <p:nvSpPr>
+          <p:cNvPr id="8" name="CuadroTexto 7">
+            <a:extLst>
+              <a:ext uri="{FF2B5EF4-FFF2-40B4-BE49-F238E27FC236}">
+                <a16:creationId xmlns:a16="http://schemas.microsoft.com/office/drawing/2014/main" id="{30609EE1-495E-A80D-AD8C-B0A890710151}"/>
+              </a:ext>
+            </a:extLst>
+          </p:cNvPr>
+          <p:cNvSpPr txBox="1"/>
+          <p:nvPr/>
+        </p:nvSpPr>
+        <p:spPr>
+          <a:xfrm>
+            <a:off x="71191" y="507048"/>
+            <a:ext cx="5546469" cy="408623"/>
+          </a:xfrm>
+          <a:prstGeom prst="roundRect">
+            <a:avLst/>
+          </a:prstGeom>
+          <a:solidFill>
+            <a:schemeClr val="bg1">
+              <a:alpha val="90000"/>
+            </a:schemeClr>
+          </a:solidFill>
+        </p:spPr>
+        <p:txBody>
+          <a:bodyPr wrap="square" rtlCol="0">
+            <a:spAutoFit/>
+          </a:bodyPr>
+          <a:lstStyle>
+            <a:defPPr>
+              <a:defRPr lang="es-CO"/>
+            </a:defPPr>
+            <a:lvl1pPr algn="just">
+              <a:defRPr>
+                <a:solidFill>
+                  <a:schemeClr val="tx1"/>
+                </a:solidFill>
+              </a:defRPr>
+            </a:lvl1pPr>
+            <a:lvl2pPr>
+              <a:defRPr>
+                <a:solidFill>
+                  <a:schemeClr val="tx1"/>
+                </a:solidFill>
+              </a:defRPr>
+            </a:lvl2pPr>
+            <a:lvl3pPr>
+              <a:defRPr>
+                <a:solidFill>
+                  <a:schemeClr val="tx1"/>
+                </a:solidFill>
+              </a:defRPr>
+            </a:lvl3pPr>
+            <a:lvl4pPr>
+              <a:defRPr>
+                <a:solidFill>
+                  <a:schemeClr val="tx1"/>
+                </a:solidFill>
+              </a:defRPr>
+            </a:lvl4pPr>
+            <a:lvl5pPr>
+              <a:defRPr>
+                <a:solidFill>
+                  <a:schemeClr val="tx1"/>
+                </a:solidFill>
+              </a:defRPr>
+            </a:lvl5pPr>
+            <a:lvl6pPr>
+              <a:defRPr>
+                <a:solidFill>
+                  <a:schemeClr val="tx1"/>
+                </a:solidFill>
+              </a:defRPr>
+            </a:lvl6pPr>
+            <a:lvl7pPr>
+              <a:defRPr>
+                <a:solidFill>
+                  <a:schemeClr val="tx1"/>
+                </a:solidFill>
+              </a:defRPr>
+            </a:lvl7pPr>
+            <a:lvl8pPr>
+              <a:defRPr>
+                <a:solidFill>
+                  <a:schemeClr val="tx1"/>
+                </a:solidFill>
+              </a:defRPr>
+            </a:lvl8pPr>
+            <a:lvl9pPr>
+              <a:defRPr>
+                <a:solidFill>
+                  <a:schemeClr val="tx1"/>
+                </a:solidFill>
+              </a:defRPr>
+            </a:lvl9pPr>
+          </a:lstStyle>
+          <a:p>
+            <a:r>
+              <a:rPr lang="es-CO" dirty="0"/>
+              <a:t>Estimado estudiante tenga en cuenta lo siguiente:</a:t>
+            </a:r>
+          </a:p>
+        </p:txBody>
+      </p:sp>
+      <p:pic>
+        <p:nvPicPr>
+          <p:cNvPr id="19" name="Imagen 18">
+            <a:extLst>
+              <a:ext uri="{FF2B5EF4-FFF2-40B4-BE49-F238E27FC236}">
+                <a16:creationId xmlns:a16="http://schemas.microsoft.com/office/drawing/2014/main" id="{9A4DA2B7-9B4A-5FD1-E61F-594084326029}"/>
+              </a:ext>
+            </a:extLst>
+          </p:cNvPr>
+          <p:cNvPicPr>
+            <a:picLocks noChangeAspect="1"/>
+          </p:cNvPicPr>
+          <p:nvPr/>
+        </p:nvPicPr>
+        <p:blipFill>
+          <a:blip r:embed="rId3"/>
+          <a:stretch>
+            <a:fillRect/>
+          </a:stretch>
+        </p:blipFill>
+        <p:spPr>
+          <a:xfrm>
+            <a:off x="5734464" y="301672"/>
+            <a:ext cx="6340732" cy="2900430"/>
+          </a:xfrm>
+          <a:prstGeom prst="roundRect">
+            <a:avLst>
+              <a:gd name="adj" fmla="val 8594"/>
+            </a:avLst>
+          </a:prstGeom>
+          <a:solidFill>
+            <a:srgbClr val="FFFFFF">
+              <a:shade val="85000"/>
+            </a:srgbClr>
+          </a:solidFill>
+          <a:ln>
+            <a:noFill/>
+          </a:ln>
+          <a:effectLst/>
+        </p:spPr>
+      </p:pic>
+      <p:sp>
+        <p:nvSpPr>
+          <p:cNvPr id="20" name="Flecha: arriba y abajo 19">
+            <a:extLst>
+              <a:ext uri="{FF2B5EF4-FFF2-40B4-BE49-F238E27FC236}">
+                <a16:creationId xmlns:a16="http://schemas.microsoft.com/office/drawing/2014/main" id="{B0CFC603-9496-72A3-0EA0-40CAF706B026}"/>
+              </a:ext>
+            </a:extLst>
+          </p:cNvPr>
+          <p:cNvSpPr/>
+          <p:nvPr/>
+        </p:nvSpPr>
+        <p:spPr>
+          <a:xfrm>
+            <a:off x="11264649" y="2162229"/>
+            <a:ext cx="177299" cy="436099"/>
+          </a:xfrm>
+          <a:prstGeom prst="upDownArrow">
+            <a:avLst/>
+          </a:prstGeom>
+          <a:solidFill>
+            <a:srgbClr val="00B050"/>
+          </a:solidFill>
+          <a:ln>
+            <a:noFill/>
+          </a:ln>
+        </p:spPr>
+        <p:style>
+          <a:lnRef idx="2">
+            <a:schemeClr val="accent1">
+              <a:shade val="50000"/>
+            </a:schemeClr>
+          </a:lnRef>
+          <a:fillRef idx="1">
+            <a:schemeClr val="accent1"/>
+          </a:fillRef>
+          <a:effectRef idx="0">
+            <a:schemeClr val="accent1"/>
+          </a:effectRef>
+          <a:fontRef idx="minor">
+            <a:schemeClr val="lt1"/>
+          </a:fontRef>
+        </p:style>
+        <p:txBody>
+          <a:bodyPr rtlCol="0" anchor="ctr"/>
+          <a:lstStyle/>
+          <a:p>
+            <a:pPr algn="ctr"/>
+            <a:endParaRPr lang="es-CO"/>
+          </a:p>
+        </p:txBody>
+      </p:sp>
+      <p:sp>
+        <p:nvSpPr>
+          <p:cNvPr id="22" name="Flecha: arriba y abajo 21">
+            <a:extLst>
+              <a:ext uri="{FF2B5EF4-FFF2-40B4-BE49-F238E27FC236}">
+                <a16:creationId xmlns:a16="http://schemas.microsoft.com/office/drawing/2014/main" id="{25A4025E-8E2E-F8EE-A06B-9A4274F7904D}"/>
+              </a:ext>
+            </a:extLst>
+          </p:cNvPr>
+          <p:cNvSpPr/>
+          <p:nvPr/>
+        </p:nvSpPr>
+        <p:spPr>
+          <a:xfrm>
+            <a:off x="11264649" y="1328385"/>
+            <a:ext cx="177299" cy="436099"/>
+          </a:xfrm>
+          <a:prstGeom prst="upDownArrow">
+            <a:avLst/>
+          </a:prstGeom>
+          <a:solidFill>
+            <a:srgbClr val="00B050"/>
+          </a:solidFill>
+          <a:ln>
+            <a:noFill/>
+          </a:ln>
+        </p:spPr>
+        <p:style>
+          <a:lnRef idx="2">
+            <a:schemeClr val="accent1">
+              <a:shade val="50000"/>
+            </a:schemeClr>
+          </a:lnRef>
+          <a:fillRef idx="1">
+            <a:schemeClr val="accent1"/>
+          </a:fillRef>
+          <a:effectRef idx="0">
+            <a:schemeClr val="accent1"/>
+          </a:effectRef>
+          <a:fontRef idx="minor">
+            <a:schemeClr val="lt1"/>
+          </a:fontRef>
+        </p:style>
+        <p:txBody>
+          <a:bodyPr rtlCol="0" anchor="ctr"/>
+          <a:lstStyle/>
+          <a:p>
+            <a:pPr algn="ctr"/>
+            <a:endParaRPr lang="es-CO" dirty="0"/>
+          </a:p>
+        </p:txBody>
+      </p:sp>
+      <p:sp>
+        <p:nvSpPr>
+          <p:cNvPr id="23" name="Rectángulo: esquinas redondeadas 22">
+            <a:extLst>
+              <a:ext uri="{FF2B5EF4-FFF2-40B4-BE49-F238E27FC236}">
+                <a16:creationId xmlns:a16="http://schemas.microsoft.com/office/drawing/2014/main" id="{9C3D4B20-63DD-3680-857C-38710B747EF8}"/>
+              </a:ext>
+            </a:extLst>
+          </p:cNvPr>
+          <p:cNvSpPr/>
+          <p:nvPr/>
+        </p:nvSpPr>
+        <p:spPr>
+          <a:xfrm>
+            <a:off x="5786412" y="907158"/>
+            <a:ext cx="4810109" cy="705974"/>
+          </a:xfrm>
+          <a:prstGeom prst="roundRect">
+            <a:avLst/>
+          </a:prstGeom>
+          <a:solidFill>
+            <a:schemeClr val="bg1"/>
+          </a:solidFill>
+          <a:ln>
+            <a:noFill/>
+          </a:ln>
+        </p:spPr>
+        <p:style>
+          <a:lnRef idx="2">
+            <a:schemeClr val="accent1">
+              <a:shade val="50000"/>
+            </a:schemeClr>
+          </a:lnRef>
+          <a:fillRef idx="1">
+            <a:schemeClr val="accent1"/>
+          </a:fillRef>
+          <a:effectRef idx="0">
+            <a:schemeClr val="accent1"/>
+          </a:effectRef>
+          <a:fontRef idx="minor">
+            <a:schemeClr val="lt1"/>
+          </a:fontRef>
+        </p:style>
+        <p:txBody>
+          <a:bodyPr rtlCol="0" anchor="ctr"/>
+          <a:lstStyle/>
+          <a:p>
+            <a:pPr algn="ctr"/>
+            <a:r>
+              <a:rPr lang="es-CO" dirty="0">
+                <a:solidFill>
+                  <a:schemeClr val="tx1"/>
+                </a:solidFill>
+              </a:rPr>
+              <a:t>ACTUACIÓN 3</a:t>
+            </a:r>
+          </a:p>
+        </p:txBody>
+      </p:sp>
+      <p:sp>
+        <p:nvSpPr>
+          <p:cNvPr id="24" name="Rectángulo: esquinas redondeadas 23">
+            <a:extLst>
+              <a:ext uri="{FF2B5EF4-FFF2-40B4-BE49-F238E27FC236}">
+                <a16:creationId xmlns:a16="http://schemas.microsoft.com/office/drawing/2014/main" id="{31BF783D-3BDF-57A3-102B-B03418B30E08}"/>
+              </a:ext>
+            </a:extLst>
+          </p:cNvPr>
+          <p:cNvSpPr/>
+          <p:nvPr/>
+        </p:nvSpPr>
+        <p:spPr>
+          <a:xfrm>
+            <a:off x="5786412" y="1679484"/>
+            <a:ext cx="4810109" cy="711200"/>
+          </a:xfrm>
+          <a:prstGeom prst="roundRect">
+            <a:avLst/>
+          </a:prstGeom>
+          <a:solidFill>
+            <a:schemeClr val="bg1"/>
+          </a:solidFill>
+          <a:ln>
+            <a:noFill/>
+          </a:ln>
+        </p:spPr>
+        <p:style>
+          <a:lnRef idx="2">
+            <a:schemeClr val="accent1">
+              <a:shade val="50000"/>
+            </a:schemeClr>
+          </a:lnRef>
+          <a:fillRef idx="1">
+            <a:schemeClr val="accent1"/>
+          </a:fillRef>
+          <a:effectRef idx="0">
+            <a:schemeClr val="accent1"/>
+          </a:effectRef>
+          <a:fontRef idx="minor">
+            <a:schemeClr val="lt1"/>
+          </a:fontRef>
+        </p:style>
+        <p:txBody>
+          <a:bodyPr rtlCol="0" anchor="ctr"/>
+          <a:lstStyle/>
+          <a:p>
+            <a:pPr algn="ctr"/>
+            <a:r>
+              <a:rPr lang="es-CO" dirty="0">
+                <a:solidFill>
+                  <a:schemeClr val="tx1"/>
+                </a:solidFill>
+              </a:rPr>
+              <a:t>ACTUACIÓN 2</a:t>
+            </a:r>
+          </a:p>
+        </p:txBody>
+      </p:sp>
+      <p:sp>
+        <p:nvSpPr>
+          <p:cNvPr id="25" name="Rectángulo: esquinas redondeadas 24">
+            <a:extLst>
+              <a:ext uri="{FF2B5EF4-FFF2-40B4-BE49-F238E27FC236}">
+                <a16:creationId xmlns:a16="http://schemas.microsoft.com/office/drawing/2014/main" id="{60382C07-4DC0-C195-ADC4-E8177385D3F6}"/>
+              </a:ext>
+            </a:extLst>
+          </p:cNvPr>
+          <p:cNvSpPr/>
+          <p:nvPr/>
+        </p:nvSpPr>
+        <p:spPr>
+          <a:xfrm>
+            <a:off x="5786412" y="2440103"/>
+            <a:ext cx="4810109" cy="711200"/>
+          </a:xfrm>
+          <a:prstGeom prst="roundRect">
+            <a:avLst/>
+          </a:prstGeom>
+          <a:solidFill>
+            <a:schemeClr val="bg1"/>
+          </a:solidFill>
+          <a:ln>
+            <a:noFill/>
+          </a:ln>
+        </p:spPr>
+        <p:style>
+          <a:lnRef idx="2">
+            <a:schemeClr val="accent1">
+              <a:shade val="50000"/>
+            </a:schemeClr>
+          </a:lnRef>
+          <a:fillRef idx="1">
+            <a:schemeClr val="accent1"/>
+          </a:fillRef>
+          <a:effectRef idx="0">
+            <a:schemeClr val="accent1"/>
+          </a:effectRef>
+          <a:fontRef idx="minor">
+            <a:schemeClr val="lt1"/>
+          </a:fontRef>
+        </p:style>
+        <p:txBody>
+          <a:bodyPr rtlCol="0" anchor="ctr"/>
+          <a:lstStyle/>
+          <a:p>
+            <a:pPr algn="ctr"/>
+            <a:r>
+              <a:rPr lang="es-CO" dirty="0">
+                <a:solidFill>
+                  <a:schemeClr val="tx1"/>
+                </a:solidFill>
+              </a:rPr>
+              <a:t>ACTUACIÓN 1</a:t>
+            </a:r>
+          </a:p>
+        </p:txBody>
+      </p:sp>
+      <p:sp>
+        <p:nvSpPr>
+          <p:cNvPr id="31" name="Rectángulo: esquinas redondeadas 30">
+            <a:extLst>
+              <a:ext uri="{FF2B5EF4-FFF2-40B4-BE49-F238E27FC236}">
+                <a16:creationId xmlns:a16="http://schemas.microsoft.com/office/drawing/2014/main" id="{D65F22FE-C3CC-98BC-033F-7D0B73AC22F0}"/>
+              </a:ext>
+            </a:extLst>
+          </p:cNvPr>
+          <p:cNvSpPr/>
+          <p:nvPr/>
+        </p:nvSpPr>
+        <p:spPr>
+          <a:xfrm>
+            <a:off x="10735059" y="907158"/>
+            <a:ext cx="1201598" cy="291065"/>
+          </a:xfrm>
+          <a:prstGeom prst="roundRect">
+            <a:avLst/>
+          </a:prstGeom>
+          <a:solidFill>
+            <a:schemeClr val="accent3">
+              <a:lumMod val="75000"/>
+            </a:schemeClr>
+          </a:solidFill>
+          <a:ln>
+            <a:noFill/>
+          </a:ln>
+        </p:spPr>
+        <p:style>
+          <a:lnRef idx="2">
+            <a:schemeClr val="accent1">
+              <a:shade val="50000"/>
+            </a:schemeClr>
+          </a:lnRef>
+          <a:fillRef idx="1">
+            <a:schemeClr val="accent1"/>
+          </a:fillRef>
+          <a:effectRef idx="0">
+            <a:schemeClr val="accent1"/>
+          </a:effectRef>
+          <a:fontRef idx="minor">
+            <a:schemeClr val="lt1"/>
+          </a:fontRef>
+        </p:style>
+        <p:txBody>
+          <a:bodyPr rtlCol="0" anchor="ctr"/>
+          <a:lstStyle/>
+          <a:p>
+            <a:pPr algn="ctr"/>
+            <a:r>
+              <a:rPr lang="es-CO" sz="1600" dirty="0"/>
+              <a:t>04-17-2023</a:t>
+            </a:r>
+          </a:p>
+        </p:txBody>
+      </p:sp>
+      <p:sp>
+        <p:nvSpPr>
+          <p:cNvPr id="32" name="Rectángulo: esquinas redondeadas 31">
+            <a:extLst>
+              <a:ext uri="{FF2B5EF4-FFF2-40B4-BE49-F238E27FC236}">
+                <a16:creationId xmlns:a16="http://schemas.microsoft.com/office/drawing/2014/main" id="{2E38185E-328B-9863-B21B-04C76E33B7C5}"/>
+              </a:ext>
+            </a:extLst>
+          </p:cNvPr>
+          <p:cNvSpPr/>
+          <p:nvPr/>
+        </p:nvSpPr>
+        <p:spPr>
+          <a:xfrm>
+            <a:off x="10719802" y="1815283"/>
+            <a:ext cx="1201598" cy="291065"/>
+          </a:xfrm>
+          <a:prstGeom prst="roundRect">
+            <a:avLst/>
+          </a:prstGeom>
+          <a:solidFill>
+            <a:schemeClr val="accent3">
+              <a:lumMod val="75000"/>
+            </a:schemeClr>
+          </a:solidFill>
+          <a:ln>
+            <a:noFill/>
+          </a:ln>
+        </p:spPr>
+        <p:style>
+          <a:lnRef idx="2">
+            <a:schemeClr val="accent1">
+              <a:shade val="50000"/>
+            </a:schemeClr>
+          </a:lnRef>
+          <a:fillRef idx="1">
+            <a:schemeClr val="accent1"/>
+          </a:fillRef>
+          <a:effectRef idx="0">
+            <a:schemeClr val="accent1"/>
+          </a:effectRef>
+          <a:fontRef idx="minor">
+            <a:schemeClr val="lt1"/>
+          </a:fontRef>
+        </p:style>
+        <p:txBody>
+          <a:bodyPr rtlCol="0" anchor="ctr"/>
+          <a:lstStyle/>
+          <a:p>
+            <a:pPr algn="ctr"/>
+            <a:r>
+              <a:rPr lang="es-CO" sz="1600" dirty="0"/>
+              <a:t>03-23-2023</a:t>
+            </a:r>
+          </a:p>
+        </p:txBody>
+      </p:sp>
+      <p:sp>
+        <p:nvSpPr>
+          <p:cNvPr id="33" name="Rectángulo: esquinas redondeadas 32">
+            <a:extLst>
+              <a:ext uri="{FF2B5EF4-FFF2-40B4-BE49-F238E27FC236}">
+                <a16:creationId xmlns:a16="http://schemas.microsoft.com/office/drawing/2014/main" id="{0A3A0831-102F-E364-A31A-5287AA2245D6}"/>
+              </a:ext>
+            </a:extLst>
+          </p:cNvPr>
+          <p:cNvSpPr/>
+          <p:nvPr/>
+        </p:nvSpPr>
+        <p:spPr>
+          <a:xfrm>
+            <a:off x="10719802" y="2623728"/>
+            <a:ext cx="1201598" cy="291065"/>
+          </a:xfrm>
+          <a:prstGeom prst="roundRect">
+            <a:avLst/>
+          </a:prstGeom>
+          <a:solidFill>
+            <a:schemeClr val="accent3">
+              <a:lumMod val="75000"/>
+            </a:schemeClr>
+          </a:solidFill>
+          <a:ln>
+            <a:noFill/>
+          </a:ln>
+        </p:spPr>
+        <p:style>
+          <a:lnRef idx="2">
+            <a:schemeClr val="accent1">
+              <a:shade val="50000"/>
+            </a:schemeClr>
+          </a:lnRef>
+          <a:fillRef idx="1">
+            <a:schemeClr val="accent1"/>
+          </a:fillRef>
+          <a:effectRef idx="0">
+            <a:schemeClr val="accent1"/>
+          </a:effectRef>
+          <a:fontRef idx="minor">
+            <a:schemeClr val="lt1"/>
+          </a:fontRef>
+        </p:style>
+        <p:txBody>
+          <a:bodyPr rtlCol="0" anchor="ctr"/>
+          <a:lstStyle/>
+          <a:p>
+            <a:pPr algn="ctr"/>
+            <a:r>
+              <a:rPr lang="es-CO" sz="1600" dirty="0"/>
+              <a:t>02-10-2023</a:t>
+            </a:r>
+          </a:p>
+        </p:txBody>
+      </p:sp>
+      <p:sp>
+        <p:nvSpPr>
+          <p:cNvPr id="34" name="CuadroTexto 33">
+            <a:extLst>
+              <a:ext uri="{FF2B5EF4-FFF2-40B4-BE49-F238E27FC236}">
+                <a16:creationId xmlns:a16="http://schemas.microsoft.com/office/drawing/2014/main" id="{97B49A1F-CE3C-01F0-779D-C75766075C77}"/>
+              </a:ext>
+            </a:extLst>
+          </p:cNvPr>
+          <p:cNvSpPr txBox="1"/>
+          <p:nvPr/>
+        </p:nvSpPr>
+        <p:spPr>
+          <a:xfrm>
+            <a:off x="269496" y="5699064"/>
+            <a:ext cx="5205500" cy="1021556"/>
+          </a:xfrm>
+          <a:prstGeom prst="roundRect">
+            <a:avLst/>
+          </a:prstGeom>
+          <a:solidFill>
+            <a:schemeClr val="bg1">
+              <a:alpha val="90000"/>
+            </a:schemeClr>
+          </a:solidFill>
+        </p:spPr>
+        <p:txBody>
+          <a:bodyPr wrap="square" rtlCol="0">
+            <a:spAutoFit/>
+          </a:bodyPr>
+          <a:lstStyle>
+            <a:defPPr>
+              <a:defRPr lang="es-CO"/>
+            </a:defPPr>
+            <a:lvl1pPr algn="just"/>
+          </a:lstStyle>
+          <a:p>
+            <a:r>
+              <a:rPr lang="es-CO" dirty="0"/>
+              <a:t>Si después de revisar evidencia que el sistema le puso una nota por fuera de los parámetros establecidos comuníquese al 3106038006</a:t>
+            </a:r>
+          </a:p>
+        </p:txBody>
+      </p:sp>
+      <p:pic>
+        <p:nvPicPr>
+          <p:cNvPr id="36" name="Imagen 35">
+            <a:extLst>
+              <a:ext uri="{FF2B5EF4-FFF2-40B4-BE49-F238E27FC236}">
+                <a16:creationId xmlns:a16="http://schemas.microsoft.com/office/drawing/2014/main" id="{D5853CEA-810C-67E6-860C-D713A3A1C1C3}"/>
+              </a:ext>
+            </a:extLst>
+          </p:cNvPr>
+          <p:cNvPicPr>
+            <a:picLocks noChangeAspect="1"/>
+          </p:cNvPicPr>
+          <p:nvPr/>
+        </p:nvPicPr>
+        <p:blipFill>
+          <a:blip r:embed="rId4"/>
+          <a:stretch>
+            <a:fillRect/>
+          </a:stretch>
+        </p:blipFill>
+        <p:spPr>
+          <a:xfrm>
+            <a:off x="5734464" y="3282517"/>
+            <a:ext cx="6340732" cy="3114675"/>
+          </a:xfrm>
+          <a:prstGeom prst="roundRect">
+            <a:avLst>
+              <a:gd name="adj" fmla="val 8594"/>
+            </a:avLst>
+          </a:prstGeom>
+          <a:solidFill>
+            <a:srgbClr val="FFFFFF">
+              <a:shade val="85000"/>
+            </a:srgbClr>
+          </a:solidFill>
+          <a:ln>
+            <a:noFill/>
+          </a:ln>
+          <a:effectLst/>
+        </p:spPr>
+      </p:pic>
+      <p:sp>
+        <p:nvSpPr>
+          <p:cNvPr id="37" name="Rectángulo: esquinas redondeadas 36">
+            <a:extLst>
+              <a:ext uri="{FF2B5EF4-FFF2-40B4-BE49-F238E27FC236}">
+                <a16:creationId xmlns:a16="http://schemas.microsoft.com/office/drawing/2014/main" id="{0F8C11D3-3C42-C4A7-61A0-5C4948094B3E}"/>
+              </a:ext>
+            </a:extLst>
+          </p:cNvPr>
+          <p:cNvSpPr/>
+          <p:nvPr/>
+        </p:nvSpPr>
+        <p:spPr>
+          <a:xfrm>
+            <a:off x="8364902" y="4293030"/>
+            <a:ext cx="1407114" cy="216977"/>
+          </a:xfrm>
+          <a:prstGeom prst="roundRect">
+            <a:avLst/>
+          </a:prstGeom>
+          <a:solidFill>
+            <a:schemeClr val="bg1"/>
+          </a:solidFill>
+          <a:ln>
+            <a:noFill/>
+          </a:ln>
+        </p:spPr>
+        <p:style>
+          <a:lnRef idx="2">
+            <a:schemeClr val="accent1">
+              <a:shade val="50000"/>
+            </a:schemeClr>
+          </a:lnRef>
+          <a:fillRef idx="1">
+            <a:schemeClr val="accent1"/>
+          </a:fillRef>
+          <a:effectRef idx="0">
+            <a:schemeClr val="accent1"/>
+          </a:effectRef>
+          <a:fontRef idx="minor">
+            <a:schemeClr val="lt1"/>
+          </a:fontRef>
+        </p:style>
+        <p:txBody>
+          <a:bodyPr rtlCol="0" anchor="ctr"/>
+          <a:lstStyle/>
+          <a:p>
+            <a:pPr algn="ctr"/>
+            <a:r>
+              <a:rPr lang="es-CO" sz="1600" dirty="0">
+                <a:solidFill>
+                  <a:schemeClr val="tx1"/>
+                </a:solidFill>
+              </a:rPr>
+              <a:t>Conocimiento</a:t>
+            </a:r>
+          </a:p>
+        </p:txBody>
+      </p:sp>
+      <p:sp>
+        <p:nvSpPr>
+          <p:cNvPr id="39" name="Rectángulo: esquinas redondeadas 38">
+            <a:extLst>
+              <a:ext uri="{FF2B5EF4-FFF2-40B4-BE49-F238E27FC236}">
+                <a16:creationId xmlns:a16="http://schemas.microsoft.com/office/drawing/2014/main" id="{ABCBF60F-DDBE-BF0C-0635-73DD99A347C2}"/>
+              </a:ext>
+            </a:extLst>
+          </p:cNvPr>
+          <p:cNvSpPr/>
+          <p:nvPr/>
+        </p:nvSpPr>
+        <p:spPr>
+          <a:xfrm>
+            <a:off x="8364902" y="4647420"/>
+            <a:ext cx="1407114" cy="216977"/>
+          </a:xfrm>
+          <a:prstGeom prst="roundRect">
+            <a:avLst/>
+          </a:prstGeom>
+          <a:solidFill>
+            <a:schemeClr val="bg1"/>
+          </a:solidFill>
+          <a:ln>
+            <a:noFill/>
+          </a:ln>
+        </p:spPr>
+        <p:style>
+          <a:lnRef idx="2">
+            <a:schemeClr val="accent1">
+              <a:shade val="50000"/>
+            </a:schemeClr>
+          </a:lnRef>
+          <a:fillRef idx="1">
+            <a:schemeClr val="accent1"/>
+          </a:fillRef>
+          <a:effectRef idx="0">
+            <a:schemeClr val="accent1"/>
+          </a:effectRef>
+          <a:fontRef idx="minor">
+            <a:schemeClr val="lt1"/>
+          </a:fontRef>
+        </p:style>
+        <p:txBody>
+          <a:bodyPr rtlCol="0" anchor="ctr"/>
+          <a:lstStyle/>
+          <a:p>
+            <a:pPr algn="ctr"/>
+            <a:r>
+              <a:rPr lang="es-CO" sz="1600" dirty="0">
+                <a:solidFill>
+                  <a:schemeClr val="tx1"/>
+                </a:solidFill>
+              </a:rPr>
+              <a:t>Aplicación</a:t>
+            </a:r>
+          </a:p>
+        </p:txBody>
+      </p:sp>
+      <p:sp>
+        <p:nvSpPr>
+          <p:cNvPr id="40" name="Rectángulo: esquinas redondeadas 39">
+            <a:extLst>
+              <a:ext uri="{FF2B5EF4-FFF2-40B4-BE49-F238E27FC236}">
+                <a16:creationId xmlns:a16="http://schemas.microsoft.com/office/drawing/2014/main" id="{554B48CA-F605-55A2-1EF5-77444550B7F6}"/>
+              </a:ext>
+            </a:extLst>
+          </p:cNvPr>
+          <p:cNvSpPr/>
+          <p:nvPr/>
+        </p:nvSpPr>
+        <p:spPr>
+          <a:xfrm>
+            <a:off x="8364902" y="4997667"/>
+            <a:ext cx="1407114" cy="216977"/>
+          </a:xfrm>
+          <a:prstGeom prst="roundRect">
+            <a:avLst/>
+          </a:prstGeom>
+          <a:solidFill>
+            <a:schemeClr val="bg1"/>
+          </a:solidFill>
+          <a:ln>
+            <a:noFill/>
+          </a:ln>
+        </p:spPr>
+        <p:style>
+          <a:lnRef idx="2">
+            <a:schemeClr val="accent1">
+              <a:shade val="50000"/>
+            </a:schemeClr>
+          </a:lnRef>
+          <a:fillRef idx="1">
+            <a:schemeClr val="accent1"/>
+          </a:fillRef>
+          <a:effectRef idx="0">
+            <a:schemeClr val="accent1"/>
+          </a:effectRef>
+          <a:fontRef idx="minor">
+            <a:schemeClr val="lt1"/>
+          </a:fontRef>
+        </p:style>
+        <p:txBody>
+          <a:bodyPr rtlCol="0" anchor="ctr"/>
+          <a:lstStyle/>
+          <a:p>
+            <a:pPr algn="ctr"/>
+            <a:r>
+              <a:rPr lang="es-CO" sz="1600" dirty="0">
+                <a:solidFill>
+                  <a:schemeClr val="tx1"/>
+                </a:solidFill>
+              </a:rPr>
+              <a:t>Ética</a:t>
+            </a:r>
+          </a:p>
+        </p:txBody>
+      </p:sp>
+      <p:sp>
+        <p:nvSpPr>
+          <p:cNvPr id="41" name="Rectángulo: esquinas redondeadas 40">
+            <a:extLst>
+              <a:ext uri="{FF2B5EF4-FFF2-40B4-BE49-F238E27FC236}">
+                <a16:creationId xmlns:a16="http://schemas.microsoft.com/office/drawing/2014/main" id="{FB23FACC-0927-6527-8210-9E07CFE76CE3}"/>
+              </a:ext>
+            </a:extLst>
+          </p:cNvPr>
+          <p:cNvSpPr/>
+          <p:nvPr/>
+        </p:nvSpPr>
+        <p:spPr>
+          <a:xfrm>
+            <a:off x="8239911" y="5370306"/>
+            <a:ext cx="1407114" cy="216977"/>
+          </a:xfrm>
+          <a:prstGeom prst="roundRect">
+            <a:avLst/>
+          </a:prstGeom>
+          <a:solidFill>
+            <a:schemeClr val="bg1"/>
+          </a:solidFill>
+          <a:ln>
+            <a:noFill/>
+          </a:ln>
+        </p:spPr>
+        <p:style>
+          <a:lnRef idx="2">
+            <a:schemeClr val="accent1">
+              <a:shade val="50000"/>
+            </a:schemeClr>
+          </a:lnRef>
+          <a:fillRef idx="1">
+            <a:schemeClr val="accent1"/>
+          </a:fillRef>
+          <a:effectRef idx="0">
+            <a:schemeClr val="accent1"/>
+          </a:effectRef>
+          <a:fontRef idx="minor">
+            <a:schemeClr val="lt1"/>
+          </a:fontRef>
+        </p:style>
+        <p:txBody>
+          <a:bodyPr rtlCol="0" anchor="ctr"/>
+          <a:lstStyle/>
+          <a:p>
+            <a:pPr algn="ctr"/>
+            <a:r>
+              <a:rPr lang="es-CO" sz="1600" dirty="0">
+                <a:solidFill>
+                  <a:schemeClr val="tx1"/>
+                </a:solidFill>
+              </a:rPr>
+              <a:t>Concepto</a:t>
+            </a:r>
+          </a:p>
+        </p:txBody>
+      </p:sp>
+      <p:pic>
+        <p:nvPicPr>
+          <p:cNvPr id="43" name="Imagen 42">
+            <a:extLst>
+              <a:ext uri="{FF2B5EF4-FFF2-40B4-BE49-F238E27FC236}">
+                <a16:creationId xmlns:a16="http://schemas.microsoft.com/office/drawing/2014/main" id="{CFBF11B3-35EA-96C3-2C34-8CA8D1FE4098}"/>
+              </a:ext>
+            </a:extLst>
+          </p:cNvPr>
+          <p:cNvPicPr>
+            <a:picLocks noChangeAspect="1"/>
+          </p:cNvPicPr>
+          <p:nvPr/>
+        </p:nvPicPr>
+        <p:blipFill>
+          <a:blip r:embed="rId5"/>
+          <a:stretch>
+            <a:fillRect/>
+          </a:stretch>
+        </p:blipFill>
+        <p:spPr>
+          <a:xfrm>
+            <a:off x="9585033" y="4920926"/>
+            <a:ext cx="2250314" cy="1274618"/>
+          </a:xfrm>
+          <a:prstGeom prst="rect">
+            <a:avLst/>
+          </a:prstGeom>
+        </p:spPr>
+      </p:pic>
+      <p:sp>
+        <p:nvSpPr>
+          <p:cNvPr id="46" name="Rectángulo 45">
+            <a:extLst>
+              <a:ext uri="{FF2B5EF4-FFF2-40B4-BE49-F238E27FC236}">
+                <a16:creationId xmlns:a16="http://schemas.microsoft.com/office/drawing/2014/main" id="{E36FE3F4-9027-D2B2-0CA0-775BBDEE594D}"/>
+              </a:ext>
+            </a:extLst>
+          </p:cNvPr>
+          <p:cNvSpPr/>
+          <p:nvPr/>
+        </p:nvSpPr>
+        <p:spPr>
+          <a:xfrm>
+            <a:off x="9170815" y="6195544"/>
+            <a:ext cx="2250314" cy="133270"/>
+          </a:xfrm>
+          <a:prstGeom prst="rect">
+            <a:avLst/>
+          </a:prstGeom>
+          <a:solidFill>
+            <a:schemeClr val="bg1"/>
+          </a:solidFill>
+          <a:ln>
+            <a:noFill/>
+          </a:ln>
+        </p:spPr>
+        <p:style>
+          <a:lnRef idx="2">
+            <a:schemeClr val="accent1">
+              <a:shade val="50000"/>
+            </a:schemeClr>
+          </a:lnRef>
+          <a:fillRef idx="1">
+            <a:schemeClr val="accent1"/>
+          </a:fillRef>
+          <a:effectRef idx="0">
+            <a:schemeClr val="accent1"/>
+          </a:effectRef>
+          <a:fontRef idx="minor">
+            <a:schemeClr val="lt1"/>
+          </a:fontRef>
+        </p:style>
+        <p:txBody>
+          <a:bodyPr rtlCol="0" anchor="ctr"/>
+          <a:lstStyle/>
+          <a:p>
+            <a:pPr algn="ctr"/>
+            <a:endParaRPr lang="es-CO"/>
+          </a:p>
+        </p:txBody>
+      </p:sp>
+      <p:pic>
+        <p:nvPicPr>
+          <p:cNvPr id="45" name="Gráfico 44" descr="Lupa">
+            <a:extLst>
+              <a:ext uri="{FF2B5EF4-FFF2-40B4-BE49-F238E27FC236}">
+                <a16:creationId xmlns:a16="http://schemas.microsoft.com/office/drawing/2014/main" id="{F69B865E-9B16-5794-6A67-0567EA8D5C79}"/>
+              </a:ext>
+            </a:extLst>
+          </p:cNvPr>
+          <p:cNvPicPr>
+            <a:picLocks noChangeAspect="1"/>
+          </p:cNvPicPr>
+          <p:nvPr/>
+        </p:nvPicPr>
+        <p:blipFill>
+          <a:blip r:embed="rId6">
+            <a:extLst>
+              <a:ext uri="{28A0092B-C50C-407E-A947-70E740481C1C}">
+                <a14:useLocalDpi xmlns:a14="http://schemas.microsoft.com/office/drawing/2010/main" val="0"/>
+              </a:ext>
+              <a:ext uri="{96DAC541-7B7A-43D3-8B79-37D633B846F1}">
+                <asvg:svgBlip xmlns:asvg="http://schemas.microsoft.com/office/drawing/2016/SVG/main" r:embed="rId7"/>
+              </a:ext>
+            </a:extLst>
+          </a:blip>
+          <a:stretch>
+            <a:fillRect/>
+          </a:stretch>
+        </p:blipFill>
+        <p:spPr>
+          <a:xfrm rot="10800000">
+            <a:off x="7818335" y="2883760"/>
+            <a:ext cx="4735291" cy="4367636"/>
+          </a:xfrm>
+          <a:prstGeom prst="rect">
+            <a:avLst/>
+          </a:prstGeom>
+        </p:spPr>
+      </p:pic>
+    </p:spTree>
+    <p:extLst>
+      <p:ext uri="{BB962C8B-B14F-4D97-AF65-F5344CB8AC3E}">
+        <p14:creationId xmlns:p14="http://schemas.microsoft.com/office/powerpoint/2010/main" val="2222916504"/>
+      </p:ext>
+    </p:extLst>
+  </p:cSld>
+  <p:clrMapOvr>
+    <a:masterClrMapping/>
+  </p:clrMapOvr>
+</p:sld>
+</file>
+
+<file path=ppt/slides/slide3.xml><?xml version="1.0" encoding="utf-8"?>
+<p:sld xmlns:a="http://schemas.openxmlformats.org/drawingml/2006/main" xmlns:r="http://schemas.openxmlformats.org/officeDocument/2006/relationships" xmlns:p="http://schemas.openxmlformats.org/presentationml/2006/main">
+  <p:cSld>
+    <p:bg>
+      <p:bgPr>
+        <a:solidFill>
+          <a:schemeClr val="tx1">
+            <a:lumMod val="65000"/>
+            <a:lumOff val="35000"/>
+            <a:alpha val="84000"/>
+          </a:schemeClr>
+        </a:solidFill>
+        <a:effectLst/>
+      </p:bgPr>
+    </p:bg>
+    <p:spTree>
+      <p:nvGrpSpPr>
+        <p:cNvPr id="1" name=""/>
+        <p:cNvGrpSpPr/>
+        <p:nvPr/>
+      </p:nvGrpSpPr>
+      <p:grpSpPr>
+        <a:xfrm>
+          <a:off x="0" y="0"/>
+          <a:ext cx="0" cy="0"/>
+          <a:chOff x="0" y="0"/>
+          <a:chExt cx="0" cy="0"/>
+        </a:xfrm>
+      </p:grpSpPr>
+      <p:pic>
+        <p:nvPicPr>
+          <p:cNvPr id="16" name="Imagen 15">
+            <a:extLst>
+              <a:ext uri="{FF2B5EF4-FFF2-40B4-BE49-F238E27FC236}">
+                <a16:creationId xmlns:a16="http://schemas.microsoft.com/office/drawing/2014/main" id="{99184DDC-17B3-336F-0A3C-3250807BB2B1}"/>
+              </a:ext>
+            </a:extLst>
+          </p:cNvPr>
+          <p:cNvPicPr>
+            <a:picLocks noChangeAspect="1"/>
+          </p:cNvPicPr>
+          <p:nvPr/>
+        </p:nvPicPr>
+        <p:blipFill>
+          <a:blip r:embed="rId2">
+            <a:extLst>
+              <a:ext uri="{28A0092B-C50C-407E-A947-70E740481C1C}">
+                <a14:useLocalDpi xmlns:a14="http://schemas.microsoft.com/office/drawing/2010/main" val="0"/>
+              </a:ext>
+            </a:extLst>
+          </a:blip>
+          <a:stretch>
+            <a:fillRect/>
+          </a:stretch>
+        </p:blipFill>
+        <p:spPr>
+          <a:xfrm>
+            <a:off x="1683025" y="250873"/>
+            <a:ext cx="6096000" cy="6180498"/>
+          </a:xfrm>
+          <a:prstGeom prst="rect">
+            <a:avLst/>
+          </a:prstGeom>
+        </p:spPr>
+      </p:pic>
+      <p:sp>
+        <p:nvSpPr>
+          <p:cNvPr id="17" name="Rectángulo 16">
+            <a:extLst>
+              <a:ext uri="{FF2B5EF4-FFF2-40B4-BE49-F238E27FC236}">
+                <a16:creationId xmlns:a16="http://schemas.microsoft.com/office/drawing/2014/main" id="{A8B8087A-F01D-7BF2-7B9B-803D42A31868}"/>
+              </a:ext>
+            </a:extLst>
+          </p:cNvPr>
+          <p:cNvSpPr/>
+          <p:nvPr/>
+        </p:nvSpPr>
+        <p:spPr>
+          <a:xfrm>
+            <a:off x="0" y="0"/>
+            <a:ext cx="12192000" cy="6858000"/>
+          </a:xfrm>
+          <a:prstGeom prst="rect">
+            <a:avLst/>
+          </a:prstGeom>
+          <a:solidFill>
+            <a:schemeClr val="accent4">
+              <a:lumMod val="60000"/>
+              <a:lumOff val="40000"/>
+              <a:alpha val="44000"/>
+            </a:schemeClr>
+          </a:solidFill>
+          <a:ln>
+            <a:noFill/>
+          </a:ln>
+        </p:spPr>
+        <p:style>
+          <a:lnRef idx="2">
+            <a:schemeClr val="accent1">
+              <a:shade val="50000"/>
+            </a:schemeClr>
+          </a:lnRef>
+          <a:fillRef idx="1">
+            <a:schemeClr val="accent1"/>
+          </a:fillRef>
+          <a:effectRef idx="0">
+            <a:schemeClr val="accent1"/>
+          </a:effectRef>
+          <a:fontRef idx="minor">
+            <a:schemeClr val="lt1"/>
+          </a:fontRef>
+        </p:style>
+        <p:txBody>
+          <a:bodyPr rtlCol="0" anchor="ctr"/>
+          <a:lstStyle/>
+          <a:p>
+            <a:pPr algn="ctr"/>
+            <a:endParaRPr lang="es-CO"/>
+          </a:p>
+        </p:txBody>
+      </p:sp>
+      <p:sp>
+        <p:nvSpPr>
           <p:cNvPr id="8" name="CuadroTexto 7">
             <a:extLst>
               <a:ext uri="{FF2B5EF4-FFF2-40B4-BE49-F238E27FC236}">
@@ -4755,7 +5439,7 @@
                   <a:schemeClr val="tx1"/>
                 </a:solidFill>
               </a:rPr>
-              <a:t>Ahora podrá ver los días transcurridos desde la última actuación creada por el estudiante. </a:t>
+              <a:t>Podrá ver los días transcurridos desde la última actuación creada por el estudiante. </a:t>
             </a:r>
           </a:p>
         </p:txBody>

--- a/public/dist/img/update/Presentación1.pptx
+++ b/public/dist/img/update/Presentación1.pptx
@@ -5,9 +5,10 @@
     <p:sldMasterId id="2147483720" r:id="rId1"/>
   </p:sldMasterIdLst>
   <p:sldIdLst>
-    <p:sldId id="259" r:id="rId2"/>
-    <p:sldId id="256" r:id="rId3"/>
-    <p:sldId id="258" r:id="rId4"/>
+    <p:sldId id="260" r:id="rId2"/>
+    <p:sldId id="262" r:id="rId3"/>
+    <p:sldId id="263" r:id="rId4"/>
+    <p:sldId id="264" r:id="rId5"/>
   </p:sldIdLst>
   <p:sldSz cx="12192000" cy="6858000"/>
   <p:notesSz cx="6858000" cy="9144000"/>
@@ -263,7 +264,7 @@
           <a:p>
             <a:fld id="{F7EB7AD6-F7F4-4A3B-9140-B8481AFC5E85}" type="datetimeFigureOut">
               <a:rPr lang="es-CO" smtClean="0"/>
-              <a:t>23/05/2023</a:t>
+              <a:t>6/11/2023</a:t>
             </a:fld>
             <a:endParaRPr lang="es-CO"/>
           </a:p>
@@ -463,7 +464,7 @@
           <a:p>
             <a:fld id="{F7EB7AD6-F7F4-4A3B-9140-B8481AFC5E85}" type="datetimeFigureOut">
               <a:rPr lang="es-CO" smtClean="0"/>
-              <a:t>23/05/2023</a:t>
+              <a:t>6/11/2023</a:t>
             </a:fld>
             <a:endParaRPr lang="es-CO"/>
           </a:p>
@@ -673,7 +674,7 @@
           <a:p>
             <a:fld id="{F7EB7AD6-F7F4-4A3B-9140-B8481AFC5E85}" type="datetimeFigureOut">
               <a:rPr lang="es-CO" smtClean="0"/>
-              <a:t>23/05/2023</a:t>
+              <a:t>6/11/2023</a:t>
             </a:fld>
             <a:endParaRPr lang="es-CO"/>
           </a:p>
@@ -873,7 +874,7 @@
           <a:p>
             <a:fld id="{F7EB7AD6-F7F4-4A3B-9140-B8481AFC5E85}" type="datetimeFigureOut">
               <a:rPr lang="es-CO" smtClean="0"/>
-              <a:t>23/05/2023</a:t>
+              <a:t>6/11/2023</a:t>
             </a:fld>
             <a:endParaRPr lang="es-CO"/>
           </a:p>
@@ -1149,7 +1150,7 @@
           <a:p>
             <a:fld id="{F7EB7AD6-F7F4-4A3B-9140-B8481AFC5E85}" type="datetimeFigureOut">
               <a:rPr lang="es-CO" smtClean="0"/>
-              <a:t>23/05/2023</a:t>
+              <a:t>6/11/2023</a:t>
             </a:fld>
             <a:endParaRPr lang="es-CO"/>
           </a:p>
@@ -1417,7 +1418,7 @@
           <a:p>
             <a:fld id="{F7EB7AD6-F7F4-4A3B-9140-B8481AFC5E85}" type="datetimeFigureOut">
               <a:rPr lang="es-CO" smtClean="0"/>
-              <a:t>23/05/2023</a:t>
+              <a:t>6/11/2023</a:t>
             </a:fld>
             <a:endParaRPr lang="es-CO"/>
           </a:p>
@@ -1832,7 +1833,7 @@
           <a:p>
             <a:fld id="{F7EB7AD6-F7F4-4A3B-9140-B8481AFC5E85}" type="datetimeFigureOut">
               <a:rPr lang="es-CO" smtClean="0"/>
-              <a:t>23/05/2023</a:t>
+              <a:t>6/11/2023</a:t>
             </a:fld>
             <a:endParaRPr lang="es-CO"/>
           </a:p>
@@ -1974,7 +1975,7 @@
           <a:p>
             <a:fld id="{F7EB7AD6-F7F4-4A3B-9140-B8481AFC5E85}" type="datetimeFigureOut">
               <a:rPr lang="es-CO" smtClean="0"/>
-              <a:t>23/05/2023</a:t>
+              <a:t>6/11/2023</a:t>
             </a:fld>
             <a:endParaRPr lang="es-CO"/>
           </a:p>
@@ -2087,7 +2088,7 @@
           <a:p>
             <a:fld id="{F7EB7AD6-F7F4-4A3B-9140-B8481AFC5E85}" type="datetimeFigureOut">
               <a:rPr lang="es-CO" smtClean="0"/>
-              <a:t>23/05/2023</a:t>
+              <a:t>6/11/2023</a:t>
             </a:fld>
             <a:endParaRPr lang="es-CO"/>
           </a:p>
@@ -2400,7 +2401,7 @@
           <a:p>
             <a:fld id="{F7EB7AD6-F7F4-4A3B-9140-B8481AFC5E85}" type="datetimeFigureOut">
               <a:rPr lang="es-CO" smtClean="0"/>
-              <a:t>23/05/2023</a:t>
+              <a:t>6/11/2023</a:t>
             </a:fld>
             <a:endParaRPr lang="es-CO"/>
           </a:p>
@@ -2689,7 +2690,7 @@
           <a:p>
             <a:fld id="{F7EB7AD6-F7F4-4A3B-9140-B8481AFC5E85}" type="datetimeFigureOut">
               <a:rPr lang="es-CO" smtClean="0"/>
-              <a:t>23/05/2023</a:t>
+              <a:t>6/11/2023</a:t>
             </a:fld>
             <a:endParaRPr lang="es-CO"/>
           </a:p>
@@ -2932,7 +2933,7 @@
           <a:p>
             <a:fld id="{F7EB7AD6-F7F4-4A3B-9140-B8481AFC5E85}" type="datetimeFigureOut">
               <a:rPr lang="es-CO" smtClean="0"/>
-              <a:t>23/05/2023</a:t>
+              <a:t>6/11/2023</a:t>
             </a:fld>
             <a:endParaRPr lang="es-CO"/>
           </a:p>
@@ -3335,16 +3336,6 @@
 <file path=ppt/slides/slide1.xml><?xml version="1.0" encoding="utf-8"?>
 <p:sld xmlns:a="http://schemas.openxmlformats.org/drawingml/2006/main" xmlns:r="http://schemas.openxmlformats.org/officeDocument/2006/relationships" xmlns:p="http://schemas.openxmlformats.org/presentationml/2006/main">
   <p:cSld>
-    <p:bg>
-      <p:bgPr>
-        <a:solidFill>
-          <a:schemeClr val="bg1">
-            <a:alpha val="40000"/>
-          </a:schemeClr>
-        </a:solidFill>
-        <a:effectLst/>
-      </p:bgPr>
-    </p:bg>
     <p:spTree>
       <p:nvGrpSpPr>
         <p:cNvPr id="1" name=""/>
@@ -3361,10 +3352,10 @@
       </p:grpSpPr>
       <p:pic>
         <p:nvPicPr>
-          <p:cNvPr id="16" name="Imagen 15">
-            <a:extLst>
-              <a:ext uri="{FF2B5EF4-FFF2-40B4-BE49-F238E27FC236}">
-                <a16:creationId xmlns:a16="http://schemas.microsoft.com/office/drawing/2014/main" id="{99184DDC-17B3-336F-0A3C-3250807BB2B1}"/>
+          <p:cNvPr id="3" name="logo">
+            <a:extLst>
+              <a:ext uri="{FF2B5EF4-FFF2-40B4-BE49-F238E27FC236}">
+                <a16:creationId xmlns:a16="http://schemas.microsoft.com/office/drawing/2014/main" id="{CB7069CB-A915-E9BA-0362-5B269561515F}"/>
               </a:ext>
             </a:extLst>
           </p:cNvPr>
@@ -3387,8 +3378,8 @@
         </p:blipFill>
         <p:spPr>
           <a:xfrm>
-            <a:off x="1683025" y="250873"/>
-            <a:ext cx="6096000" cy="6180498"/>
+            <a:off x="8765519" y="3350269"/>
+            <a:ext cx="3426481" cy="3473976"/>
           </a:xfrm>
           <a:prstGeom prst="rect">
             <a:avLst/>
@@ -3416,1254 +3407,8 @@
             <a:avLst/>
           </a:prstGeom>
           <a:solidFill>
-            <a:srgbClr val="FF0066">
-              <a:alpha val="38000"/>
-            </a:srgbClr>
-          </a:solidFill>
-          <a:ln>
-            <a:noFill/>
-          </a:ln>
-        </p:spPr>
-        <p:style>
-          <a:lnRef idx="2">
-            <a:schemeClr val="accent1">
-              <a:shade val="50000"/>
-            </a:schemeClr>
-          </a:lnRef>
-          <a:fillRef idx="1">
-            <a:schemeClr val="accent1"/>
-          </a:fillRef>
-          <a:effectRef idx="0">
-            <a:schemeClr val="accent1"/>
-          </a:effectRef>
-          <a:fontRef idx="minor">
-            <a:schemeClr val="lt1"/>
-          </a:fontRef>
-        </p:style>
-        <p:txBody>
-          <a:bodyPr rtlCol="0" anchor="ctr"/>
-          <a:lstStyle/>
-          <a:p>
-            <a:pPr algn="ctr"/>
-            <a:endParaRPr lang="es-CO"/>
-          </a:p>
-        </p:txBody>
-      </p:sp>
-      <p:sp>
-        <p:nvSpPr>
-          <p:cNvPr id="4" name="CuadroTexto 3">
-            <a:extLst>
-              <a:ext uri="{FF2B5EF4-FFF2-40B4-BE49-F238E27FC236}">
-                <a16:creationId xmlns:a16="http://schemas.microsoft.com/office/drawing/2014/main" id="{17E1BAEB-D355-DE0F-EF5A-E4CC5574A2A8}"/>
-              </a:ext>
-            </a:extLst>
-          </p:cNvPr>
-          <p:cNvSpPr txBox="1"/>
-          <p:nvPr/>
-        </p:nvSpPr>
-        <p:spPr>
-          <a:xfrm>
-            <a:off x="269496" y="1005125"/>
-            <a:ext cx="5205500" cy="1771293"/>
-          </a:xfrm>
-          <a:prstGeom prst="round2SameRect">
-            <a:avLst>
-              <a:gd name="adj1" fmla="val 3841"/>
-              <a:gd name="adj2" fmla="val 0"/>
-            </a:avLst>
-          </a:prstGeom>
-          <a:solidFill>
-            <a:schemeClr val="bg1">
-              <a:alpha val="90000"/>
-            </a:schemeClr>
-          </a:solidFill>
-        </p:spPr>
-        <p:txBody>
-          <a:bodyPr wrap="square" rtlCol="0">
-            <a:spAutoFit/>
-          </a:bodyPr>
-          <a:lstStyle/>
-          <a:p>
-            <a:pPr algn="just"/>
-            <a:endParaRPr lang="es-CO" dirty="0"/>
-          </a:p>
-          <a:p>
-            <a:pPr marL="285750" indent="-285750" algn="just">
-              <a:buFont typeface="Wingdings" panose="05000000000000000000" pitchFamily="2" charset="2"/>
-              <a:buChar char="Ø"/>
-            </a:pPr>
-            <a:r>
-              <a:rPr lang="es-CO" b="1" dirty="0"/>
-              <a:t>Al cerrar el corte se aplicaran notas a aquellos casos que después de asignado tenga mas de 5 días en redactar los datos del caso o respuesta del estudiante. </a:t>
-            </a:r>
-          </a:p>
-          <a:p>
-            <a:pPr marL="285750" indent="-285750" algn="just">
-              <a:buFont typeface="Wingdings" panose="05000000000000000000" pitchFamily="2" charset="2"/>
-              <a:buChar char="Ø"/>
-            </a:pPr>
-            <a:endParaRPr lang="es-CO" b="1" dirty="0"/>
-          </a:p>
-        </p:txBody>
-      </p:sp>
-      <p:sp>
-        <p:nvSpPr>
-          <p:cNvPr id="8" name="CuadroTexto 7">
-            <a:extLst>
-              <a:ext uri="{FF2B5EF4-FFF2-40B4-BE49-F238E27FC236}">
-                <a16:creationId xmlns:a16="http://schemas.microsoft.com/office/drawing/2014/main" id="{30609EE1-495E-A80D-AD8C-B0A890710151}"/>
-              </a:ext>
-            </a:extLst>
-          </p:cNvPr>
-          <p:cNvSpPr txBox="1"/>
-          <p:nvPr/>
-        </p:nvSpPr>
-        <p:spPr>
-          <a:xfrm>
-            <a:off x="71191" y="507048"/>
-            <a:ext cx="5546469" cy="408623"/>
-          </a:xfrm>
-          <a:prstGeom prst="roundRect">
-            <a:avLst/>
-          </a:prstGeom>
-          <a:solidFill>
-            <a:schemeClr val="bg1">
-              <a:alpha val="90000"/>
-            </a:schemeClr>
-          </a:solidFill>
-        </p:spPr>
-        <p:txBody>
-          <a:bodyPr wrap="square" rtlCol="0">
-            <a:spAutoFit/>
-          </a:bodyPr>
-          <a:lstStyle>
-            <a:defPPr>
-              <a:defRPr lang="es-CO"/>
-            </a:defPPr>
-            <a:lvl1pPr algn="just">
-              <a:defRPr>
-                <a:solidFill>
-                  <a:schemeClr val="tx1"/>
-                </a:solidFill>
-              </a:defRPr>
-            </a:lvl1pPr>
-            <a:lvl2pPr>
-              <a:defRPr>
-                <a:solidFill>
-                  <a:schemeClr val="tx1"/>
-                </a:solidFill>
-              </a:defRPr>
-            </a:lvl2pPr>
-            <a:lvl3pPr>
-              <a:defRPr>
-                <a:solidFill>
-                  <a:schemeClr val="tx1"/>
-                </a:solidFill>
-              </a:defRPr>
-            </a:lvl3pPr>
-            <a:lvl4pPr>
-              <a:defRPr>
-                <a:solidFill>
-                  <a:schemeClr val="tx1"/>
-                </a:solidFill>
-              </a:defRPr>
-            </a:lvl4pPr>
-            <a:lvl5pPr>
-              <a:defRPr>
-                <a:solidFill>
-                  <a:schemeClr val="tx1"/>
-                </a:solidFill>
-              </a:defRPr>
-            </a:lvl5pPr>
-            <a:lvl6pPr>
-              <a:defRPr>
-                <a:solidFill>
-                  <a:schemeClr val="tx1"/>
-                </a:solidFill>
-              </a:defRPr>
-            </a:lvl6pPr>
-            <a:lvl7pPr>
-              <a:defRPr>
-                <a:solidFill>
-                  <a:schemeClr val="tx1"/>
-                </a:solidFill>
-              </a:defRPr>
-            </a:lvl7pPr>
-            <a:lvl8pPr>
-              <a:defRPr>
-                <a:solidFill>
-                  <a:schemeClr val="tx1"/>
-                </a:solidFill>
-              </a:defRPr>
-            </a:lvl8pPr>
-            <a:lvl9pPr>
-              <a:defRPr>
-                <a:solidFill>
-                  <a:schemeClr val="tx1"/>
-                </a:solidFill>
-              </a:defRPr>
-            </a:lvl9pPr>
-          </a:lstStyle>
-          <a:p>
-            <a:r>
-              <a:rPr lang="es-CO" dirty="0"/>
-              <a:t>Estimado estudiante tenga en cuenta lo siguiente:</a:t>
-            </a:r>
-          </a:p>
-        </p:txBody>
-      </p:sp>
-      <p:sp>
-        <p:nvSpPr>
-          <p:cNvPr id="37" name="Rectángulo: esquinas redondeadas 36">
-            <a:extLst>
-              <a:ext uri="{FF2B5EF4-FFF2-40B4-BE49-F238E27FC236}">
-                <a16:creationId xmlns:a16="http://schemas.microsoft.com/office/drawing/2014/main" id="{0F8C11D3-3C42-C4A7-61A0-5C4948094B3E}"/>
-              </a:ext>
-            </a:extLst>
-          </p:cNvPr>
-          <p:cNvSpPr/>
-          <p:nvPr/>
-        </p:nvSpPr>
-        <p:spPr>
-          <a:xfrm>
-            <a:off x="8374930" y="2742526"/>
-            <a:ext cx="1407114" cy="216977"/>
-          </a:xfrm>
-          <a:prstGeom prst="roundRect">
-            <a:avLst/>
-          </a:prstGeom>
-          <a:solidFill>
-            <a:schemeClr val="bg1"/>
-          </a:solidFill>
-          <a:ln>
-            <a:noFill/>
-          </a:ln>
-        </p:spPr>
-        <p:style>
-          <a:lnRef idx="2">
-            <a:schemeClr val="accent1">
-              <a:shade val="50000"/>
-            </a:schemeClr>
-          </a:lnRef>
-          <a:fillRef idx="1">
-            <a:schemeClr val="accent1"/>
-          </a:fillRef>
-          <a:effectRef idx="0">
-            <a:schemeClr val="accent1"/>
-          </a:effectRef>
-          <a:fontRef idx="minor">
-            <a:schemeClr val="lt1"/>
-          </a:fontRef>
-        </p:style>
-        <p:txBody>
-          <a:bodyPr rtlCol="0" anchor="ctr"/>
-          <a:lstStyle/>
-          <a:p>
-            <a:pPr algn="ctr"/>
-            <a:r>
-              <a:rPr lang="es-CO" sz="1600" dirty="0">
-                <a:solidFill>
-                  <a:schemeClr val="tx1"/>
-                </a:solidFill>
-              </a:rPr>
-              <a:t>Conocimiento</a:t>
-            </a:r>
-          </a:p>
-        </p:txBody>
-      </p:sp>
-      <p:sp>
-        <p:nvSpPr>
-          <p:cNvPr id="39" name="Rectángulo: esquinas redondeadas 38">
-            <a:extLst>
-              <a:ext uri="{FF2B5EF4-FFF2-40B4-BE49-F238E27FC236}">
-                <a16:creationId xmlns:a16="http://schemas.microsoft.com/office/drawing/2014/main" id="{ABCBF60F-DDBE-BF0C-0635-73DD99A347C2}"/>
-              </a:ext>
-            </a:extLst>
-          </p:cNvPr>
-          <p:cNvSpPr/>
-          <p:nvPr/>
-        </p:nvSpPr>
-        <p:spPr>
-          <a:xfrm>
-            <a:off x="8374930" y="3096916"/>
-            <a:ext cx="1407114" cy="216977"/>
-          </a:xfrm>
-          <a:prstGeom prst="roundRect">
-            <a:avLst/>
-          </a:prstGeom>
-          <a:solidFill>
-            <a:schemeClr val="bg1"/>
-          </a:solidFill>
-          <a:ln>
-            <a:noFill/>
-          </a:ln>
-        </p:spPr>
-        <p:style>
-          <a:lnRef idx="2">
-            <a:schemeClr val="accent1">
-              <a:shade val="50000"/>
-            </a:schemeClr>
-          </a:lnRef>
-          <a:fillRef idx="1">
-            <a:schemeClr val="accent1"/>
-          </a:fillRef>
-          <a:effectRef idx="0">
-            <a:schemeClr val="accent1"/>
-          </a:effectRef>
-          <a:fontRef idx="minor">
-            <a:schemeClr val="lt1"/>
-          </a:fontRef>
-        </p:style>
-        <p:txBody>
-          <a:bodyPr rtlCol="0" anchor="ctr"/>
-          <a:lstStyle/>
-          <a:p>
-            <a:pPr algn="ctr"/>
-            <a:r>
-              <a:rPr lang="es-CO" sz="1600" dirty="0">
-                <a:solidFill>
-                  <a:schemeClr val="tx1"/>
-                </a:solidFill>
-              </a:rPr>
-              <a:t>Aplicación</a:t>
-            </a:r>
-          </a:p>
-        </p:txBody>
-      </p:sp>
-      <p:sp>
-        <p:nvSpPr>
-          <p:cNvPr id="40" name="Rectángulo: esquinas redondeadas 39">
-            <a:extLst>
-              <a:ext uri="{FF2B5EF4-FFF2-40B4-BE49-F238E27FC236}">
-                <a16:creationId xmlns:a16="http://schemas.microsoft.com/office/drawing/2014/main" id="{554B48CA-F605-55A2-1EF5-77444550B7F6}"/>
-              </a:ext>
-            </a:extLst>
-          </p:cNvPr>
-          <p:cNvSpPr/>
-          <p:nvPr/>
-        </p:nvSpPr>
-        <p:spPr>
-          <a:xfrm>
-            <a:off x="8374930" y="3447163"/>
-            <a:ext cx="1407114" cy="216977"/>
-          </a:xfrm>
-          <a:prstGeom prst="roundRect">
-            <a:avLst/>
-          </a:prstGeom>
-          <a:solidFill>
-            <a:schemeClr val="bg1"/>
-          </a:solidFill>
-          <a:ln>
-            <a:noFill/>
-          </a:ln>
-        </p:spPr>
-        <p:style>
-          <a:lnRef idx="2">
-            <a:schemeClr val="accent1">
-              <a:shade val="50000"/>
-            </a:schemeClr>
-          </a:lnRef>
-          <a:fillRef idx="1">
-            <a:schemeClr val="accent1"/>
-          </a:fillRef>
-          <a:effectRef idx="0">
-            <a:schemeClr val="accent1"/>
-          </a:effectRef>
-          <a:fontRef idx="minor">
-            <a:schemeClr val="lt1"/>
-          </a:fontRef>
-        </p:style>
-        <p:txBody>
-          <a:bodyPr rtlCol="0" anchor="ctr"/>
-          <a:lstStyle/>
-          <a:p>
-            <a:pPr algn="ctr"/>
-            <a:r>
-              <a:rPr lang="es-CO" sz="1600" dirty="0">
-                <a:solidFill>
-                  <a:schemeClr val="tx1"/>
-                </a:solidFill>
-              </a:rPr>
-              <a:t>Ética</a:t>
-            </a:r>
-          </a:p>
-        </p:txBody>
-      </p:sp>
-      <p:sp>
-        <p:nvSpPr>
-          <p:cNvPr id="41" name="Rectángulo: esquinas redondeadas 40">
-            <a:extLst>
-              <a:ext uri="{FF2B5EF4-FFF2-40B4-BE49-F238E27FC236}">
-                <a16:creationId xmlns:a16="http://schemas.microsoft.com/office/drawing/2014/main" id="{FB23FACC-0927-6527-8210-9E07CFE76CE3}"/>
-              </a:ext>
-            </a:extLst>
-          </p:cNvPr>
-          <p:cNvSpPr/>
-          <p:nvPr/>
-        </p:nvSpPr>
-        <p:spPr>
-          <a:xfrm>
-            <a:off x="8249939" y="3819802"/>
-            <a:ext cx="1407114" cy="216977"/>
-          </a:xfrm>
-          <a:prstGeom prst="roundRect">
-            <a:avLst/>
-          </a:prstGeom>
-          <a:solidFill>
-            <a:schemeClr val="bg1"/>
-          </a:solidFill>
-          <a:ln>
-            <a:noFill/>
-          </a:ln>
-        </p:spPr>
-        <p:style>
-          <a:lnRef idx="2">
-            <a:schemeClr val="accent1">
-              <a:shade val="50000"/>
-            </a:schemeClr>
-          </a:lnRef>
-          <a:fillRef idx="1">
-            <a:schemeClr val="accent1"/>
-          </a:fillRef>
-          <a:effectRef idx="0">
-            <a:schemeClr val="accent1"/>
-          </a:effectRef>
-          <a:fontRef idx="minor">
-            <a:schemeClr val="lt1"/>
-          </a:fontRef>
-        </p:style>
-        <p:txBody>
-          <a:bodyPr rtlCol="0" anchor="ctr"/>
-          <a:lstStyle/>
-          <a:p>
-            <a:pPr algn="ctr"/>
-            <a:r>
-              <a:rPr lang="es-CO" sz="1600" dirty="0">
-                <a:solidFill>
-                  <a:schemeClr val="tx1"/>
-                </a:solidFill>
-              </a:rPr>
-              <a:t>Concepto</a:t>
-            </a:r>
-          </a:p>
-        </p:txBody>
-      </p:sp>
-      <p:pic>
-        <p:nvPicPr>
-          <p:cNvPr id="3" name="Imagen 2">
-            <a:extLst>
-              <a:ext uri="{FF2B5EF4-FFF2-40B4-BE49-F238E27FC236}">
-                <a16:creationId xmlns:a16="http://schemas.microsoft.com/office/drawing/2014/main" id="{995671C8-3B28-B2CD-FF83-79ACF9D3783E}"/>
-              </a:ext>
-            </a:extLst>
-          </p:cNvPr>
-          <p:cNvPicPr>
-            <a:picLocks noChangeAspect="1"/>
-          </p:cNvPicPr>
-          <p:nvPr/>
-        </p:nvPicPr>
-        <p:blipFill rotWithShape="1">
-          <a:blip r:embed="rId3"/>
-          <a:srcRect r="36561"/>
-          <a:stretch/>
-        </p:blipFill>
-        <p:spPr>
-          <a:xfrm>
-            <a:off x="5617660" y="1265356"/>
-            <a:ext cx="6574340" cy="4645114"/>
-          </a:xfrm>
-          <a:prstGeom prst="rect">
-            <a:avLst/>
-          </a:prstGeom>
-        </p:spPr>
-      </p:pic>
-      <p:pic>
-        <p:nvPicPr>
-          <p:cNvPr id="6" name="Imagen 5">
-            <a:extLst>
-              <a:ext uri="{FF2B5EF4-FFF2-40B4-BE49-F238E27FC236}">
-                <a16:creationId xmlns:a16="http://schemas.microsoft.com/office/drawing/2014/main" id="{1C154C18-F086-4C83-BB0B-1F851677755A}"/>
-              </a:ext>
-            </a:extLst>
-          </p:cNvPr>
-          <p:cNvPicPr>
-            <a:picLocks noChangeAspect="1"/>
-          </p:cNvPicPr>
-          <p:nvPr/>
-        </p:nvPicPr>
-        <p:blipFill>
-          <a:blip r:embed="rId4"/>
-          <a:stretch>
-            <a:fillRect/>
-          </a:stretch>
-        </p:blipFill>
-        <p:spPr>
-          <a:xfrm>
-            <a:off x="6471138" y="1426853"/>
-            <a:ext cx="5206655" cy="930849"/>
-          </a:xfrm>
-          <a:prstGeom prst="rect">
-            <a:avLst/>
-          </a:prstGeom>
-        </p:spPr>
-      </p:pic>
-      <p:pic>
-        <p:nvPicPr>
-          <p:cNvPr id="45" name="Gráfico 44" descr="Lupa">
-            <a:extLst>
-              <a:ext uri="{FF2B5EF4-FFF2-40B4-BE49-F238E27FC236}">
-                <a16:creationId xmlns:a16="http://schemas.microsoft.com/office/drawing/2014/main" id="{F69B865E-9B16-5794-6A67-0567EA8D5C79}"/>
-              </a:ext>
-            </a:extLst>
-          </p:cNvPr>
-          <p:cNvPicPr>
-            <a:picLocks noChangeAspect="1"/>
-          </p:cNvPicPr>
-          <p:nvPr/>
-        </p:nvPicPr>
-        <p:blipFill rotWithShape="1">
-          <a:blip r:embed="rId5">
-            <a:extLst>
-              <a:ext uri="{28A0092B-C50C-407E-A947-70E740481C1C}">
-                <a14:useLocalDpi xmlns:a14="http://schemas.microsoft.com/office/drawing/2010/main" val="0"/>
-              </a:ext>
-              <a:ext uri="{96DAC541-7B7A-43D3-8B79-37D633B846F1}">
-                <asvg:svgBlip xmlns:asvg="http://schemas.microsoft.com/office/drawing/2016/SVG/main" r:embed="rId6"/>
-              </a:ext>
-            </a:extLst>
-          </a:blip>
-          <a:srcRect l="7681" t="8073" b="8034"/>
-          <a:stretch/>
-        </p:blipFill>
-        <p:spPr>
-          <a:xfrm rot="6564120">
-            <a:off x="7828760" y="404965"/>
-            <a:ext cx="4447765" cy="4066781"/>
-          </a:xfrm>
-          <a:prstGeom prst="rect">
-            <a:avLst/>
-          </a:prstGeom>
-        </p:spPr>
-      </p:pic>
-      <p:sp>
-        <p:nvSpPr>
-          <p:cNvPr id="34" name="CuadroTexto 33">
-            <a:extLst>
-              <a:ext uri="{FF2B5EF4-FFF2-40B4-BE49-F238E27FC236}">
-                <a16:creationId xmlns:a16="http://schemas.microsoft.com/office/drawing/2014/main" id="{97B49A1F-CE3C-01F0-779D-C75766075C77}"/>
-              </a:ext>
-            </a:extLst>
-          </p:cNvPr>
-          <p:cNvSpPr txBox="1"/>
-          <p:nvPr/>
-        </p:nvSpPr>
-        <p:spPr>
-          <a:xfrm>
-            <a:off x="196753" y="3096916"/>
-            <a:ext cx="5295344" cy="1328023"/>
-          </a:xfrm>
-          <a:prstGeom prst="roundRect">
-            <a:avLst/>
-          </a:prstGeom>
-          <a:solidFill>
-            <a:schemeClr val="bg1">
-              <a:alpha val="90000"/>
-            </a:schemeClr>
-          </a:solidFill>
-        </p:spPr>
-        <p:txBody>
-          <a:bodyPr wrap="square" rtlCol="0">
-            <a:spAutoFit/>
-          </a:bodyPr>
-          <a:lstStyle>
-            <a:defPPr>
-              <a:defRPr lang="es-CO"/>
-            </a:defPPr>
-            <a:lvl1pPr algn="just"/>
-          </a:lstStyle>
-          <a:p>
-            <a:r>
-              <a:rPr lang="es-CO" b="1" dirty="0"/>
-              <a:t>Nota</a:t>
-            </a:r>
-            <a:r>
-              <a:rPr lang="es-CO" dirty="0"/>
-              <a:t>: Si el caso es reasignado no lo exime del ítem anterior, ya que es deber del estudiante comunicarse con la usuaria o usuario y redactar nuevamente según su entendimiento.</a:t>
-            </a:r>
-          </a:p>
-        </p:txBody>
-      </p:sp>
-    </p:spTree>
-    <p:extLst>
-      <p:ext uri="{BB962C8B-B14F-4D97-AF65-F5344CB8AC3E}">
-        <p14:creationId xmlns:p14="http://schemas.microsoft.com/office/powerpoint/2010/main" val="1776731106"/>
-      </p:ext>
-    </p:extLst>
-  </p:cSld>
-  <p:clrMapOvr>
-    <a:masterClrMapping/>
-  </p:clrMapOvr>
-</p:sld>
-</file>
-
-<file path=ppt/slides/slide2.xml><?xml version="1.0" encoding="utf-8"?>
-<p:sld xmlns:a="http://schemas.openxmlformats.org/drawingml/2006/main" xmlns:r="http://schemas.openxmlformats.org/officeDocument/2006/relationships" xmlns:p="http://schemas.openxmlformats.org/presentationml/2006/main">
-  <p:cSld>
-    <p:bg>
-      <p:bgPr>
-        <a:solidFill>
-          <a:schemeClr val="tx1">
-            <a:lumMod val="65000"/>
-            <a:lumOff val="35000"/>
-            <a:alpha val="72000"/>
-          </a:schemeClr>
-        </a:solidFill>
-        <a:effectLst/>
-      </p:bgPr>
-    </p:bg>
-    <p:spTree>
-      <p:nvGrpSpPr>
-        <p:cNvPr id="1" name=""/>
-        <p:cNvGrpSpPr/>
-        <p:nvPr/>
-      </p:nvGrpSpPr>
-      <p:grpSpPr>
-        <a:xfrm>
-          <a:off x="0" y="0"/>
-          <a:ext cx="0" cy="0"/>
-          <a:chOff x="0" y="0"/>
-          <a:chExt cx="0" cy="0"/>
-        </a:xfrm>
-      </p:grpSpPr>
-      <p:pic>
-        <p:nvPicPr>
-          <p:cNvPr id="16" name="Imagen 15">
-            <a:extLst>
-              <a:ext uri="{FF2B5EF4-FFF2-40B4-BE49-F238E27FC236}">
-                <a16:creationId xmlns:a16="http://schemas.microsoft.com/office/drawing/2014/main" id="{99184DDC-17B3-336F-0A3C-3250807BB2B1}"/>
-              </a:ext>
-            </a:extLst>
-          </p:cNvPr>
-          <p:cNvPicPr>
-            <a:picLocks noChangeAspect="1"/>
-          </p:cNvPicPr>
-          <p:nvPr/>
-        </p:nvPicPr>
-        <p:blipFill>
-          <a:blip r:embed="rId2">
-            <a:extLst>
-              <a:ext uri="{28A0092B-C50C-407E-A947-70E740481C1C}">
-                <a14:useLocalDpi xmlns:a14="http://schemas.microsoft.com/office/drawing/2010/main" val="0"/>
-              </a:ext>
-            </a:extLst>
-          </a:blip>
-          <a:stretch>
-            <a:fillRect/>
-          </a:stretch>
-        </p:blipFill>
-        <p:spPr>
-          <a:xfrm>
-            <a:off x="1683025" y="250873"/>
-            <a:ext cx="6096000" cy="6180498"/>
-          </a:xfrm>
-          <a:prstGeom prst="rect">
-            <a:avLst/>
-          </a:prstGeom>
-        </p:spPr>
-      </p:pic>
-      <p:sp>
-        <p:nvSpPr>
-          <p:cNvPr id="17" name="Rectángulo 16">
-            <a:extLst>
-              <a:ext uri="{FF2B5EF4-FFF2-40B4-BE49-F238E27FC236}">
-                <a16:creationId xmlns:a16="http://schemas.microsoft.com/office/drawing/2014/main" id="{A8B8087A-F01D-7BF2-7B9B-803D42A31868}"/>
-              </a:ext>
-            </a:extLst>
-          </p:cNvPr>
-          <p:cNvSpPr/>
-          <p:nvPr/>
-        </p:nvSpPr>
-        <p:spPr>
-          <a:xfrm>
-            <a:off x="0" y="0"/>
-            <a:ext cx="12192000" cy="6858000"/>
-          </a:xfrm>
-          <a:prstGeom prst="rect">
-            <a:avLst/>
-          </a:prstGeom>
-          <a:solidFill>
-            <a:srgbClr val="1AA513">
-              <a:alpha val="31765"/>
-            </a:srgbClr>
-          </a:solidFill>
-          <a:ln>
-            <a:noFill/>
-          </a:ln>
-        </p:spPr>
-        <p:style>
-          <a:lnRef idx="2">
-            <a:schemeClr val="accent1">
-              <a:shade val="50000"/>
-            </a:schemeClr>
-          </a:lnRef>
-          <a:fillRef idx="1">
-            <a:schemeClr val="accent1"/>
-          </a:fillRef>
-          <a:effectRef idx="0">
-            <a:schemeClr val="accent1"/>
-          </a:effectRef>
-          <a:fontRef idx="minor">
-            <a:schemeClr val="lt1"/>
-          </a:fontRef>
-        </p:style>
-        <p:txBody>
-          <a:bodyPr rtlCol="0" anchor="ctr"/>
-          <a:lstStyle/>
-          <a:p>
-            <a:pPr algn="ctr"/>
-            <a:endParaRPr lang="es-CO"/>
-          </a:p>
-        </p:txBody>
-      </p:sp>
-      <p:sp>
-        <p:nvSpPr>
-          <p:cNvPr id="4" name="CuadroTexto 3">
-            <a:extLst>
-              <a:ext uri="{FF2B5EF4-FFF2-40B4-BE49-F238E27FC236}">
-                <a16:creationId xmlns:a16="http://schemas.microsoft.com/office/drawing/2014/main" id="{17E1BAEB-D355-DE0F-EF5A-E4CC5574A2A8}"/>
-              </a:ext>
-            </a:extLst>
-          </p:cNvPr>
-          <p:cNvSpPr txBox="1"/>
-          <p:nvPr/>
-        </p:nvSpPr>
-        <p:spPr>
-          <a:xfrm>
-            <a:off x="269496" y="1005125"/>
-            <a:ext cx="5205500" cy="4847749"/>
-          </a:xfrm>
-          <a:prstGeom prst="round2SameRect">
-            <a:avLst>
-              <a:gd name="adj1" fmla="val 3841"/>
-              <a:gd name="adj2" fmla="val 0"/>
-            </a:avLst>
-          </a:prstGeom>
-          <a:solidFill>
-            <a:schemeClr val="bg1">
-              <a:alpha val="90000"/>
-            </a:schemeClr>
-          </a:solidFill>
-        </p:spPr>
-        <p:txBody>
-          <a:bodyPr wrap="square" rtlCol="0">
-            <a:spAutoFit/>
-          </a:bodyPr>
-          <a:lstStyle/>
-          <a:p>
-            <a:pPr algn="just"/>
-            <a:endParaRPr lang="es-CO" dirty="0"/>
-          </a:p>
-          <a:p>
-            <a:pPr marL="285750" indent="-285750" algn="just">
-              <a:buFont typeface="Wingdings" panose="05000000000000000000" pitchFamily="2" charset="2"/>
-              <a:buChar char="Ø"/>
-            </a:pPr>
-            <a:r>
-              <a:rPr lang="es-CO" b="1" dirty="0"/>
-              <a:t>Al cerrar el corte se aplicaran notas a aquellos casos de seguimiento que después de 30 días de asignado NO tienen actuaciones (o anexos). También a aquellos que tienen entre una actuación y otra mas de 30 días. </a:t>
-            </a:r>
-          </a:p>
-          <a:p>
-            <a:pPr marL="285750" indent="-285750" algn="just">
-              <a:buFont typeface="Wingdings" panose="05000000000000000000" pitchFamily="2" charset="2"/>
-              <a:buChar char="Ø"/>
-            </a:pPr>
-            <a:r>
-              <a:rPr lang="es-CO" b="1" dirty="0"/>
-              <a:t>En el reporte de notas usted podrá ver de manera detallada el motivo de la nota. Si la nota se aplicó por lo expresado en el </a:t>
-            </a:r>
-            <a:r>
-              <a:rPr lang="es-CO" b="1" dirty="0" err="1"/>
-              <a:t>item</a:t>
-            </a:r>
-            <a:r>
-              <a:rPr lang="es-CO" b="1" dirty="0"/>
-              <a:t> anterior el sistema le indica el periodo evaluado.</a:t>
-            </a:r>
-          </a:p>
-          <a:p>
-            <a:pPr marL="285750" indent="-285750" algn="just">
-              <a:buFont typeface="Wingdings" panose="05000000000000000000" pitchFamily="2" charset="2"/>
-              <a:buChar char="Ø"/>
-            </a:pPr>
-            <a:r>
-              <a:rPr lang="es-CO" b="1" dirty="0"/>
-              <a:t>Para verificar el periodo ingrese al caso y en la pestaña de actuaciones, en el listado puede ver la fecha de creación. </a:t>
-            </a:r>
-          </a:p>
-          <a:p>
-            <a:pPr marL="285750" indent="-285750" algn="just">
-              <a:buFont typeface="Wingdings" panose="05000000000000000000" pitchFamily="2" charset="2"/>
-              <a:buChar char="Ø"/>
-            </a:pPr>
-            <a:r>
-              <a:rPr lang="es-CO" b="1" dirty="0"/>
-              <a:t>Recuerde que solo se tendrán en cuenta aquellas actuaciones creadas por el estudiante, mas no las creadas por el docente asesor y aquellos anexos que no estén anulados.</a:t>
-            </a:r>
-          </a:p>
-        </p:txBody>
-      </p:sp>
-      <p:sp>
-        <p:nvSpPr>
-          <p:cNvPr id="8" name="CuadroTexto 7">
-            <a:extLst>
-              <a:ext uri="{FF2B5EF4-FFF2-40B4-BE49-F238E27FC236}">
-                <a16:creationId xmlns:a16="http://schemas.microsoft.com/office/drawing/2014/main" id="{30609EE1-495E-A80D-AD8C-B0A890710151}"/>
-              </a:ext>
-            </a:extLst>
-          </p:cNvPr>
-          <p:cNvSpPr txBox="1"/>
-          <p:nvPr/>
-        </p:nvSpPr>
-        <p:spPr>
-          <a:xfrm>
-            <a:off x="71191" y="507048"/>
-            <a:ext cx="5546469" cy="408623"/>
-          </a:xfrm>
-          <a:prstGeom prst="roundRect">
-            <a:avLst/>
-          </a:prstGeom>
-          <a:solidFill>
-            <a:schemeClr val="bg1">
-              <a:alpha val="90000"/>
-            </a:schemeClr>
-          </a:solidFill>
-        </p:spPr>
-        <p:txBody>
-          <a:bodyPr wrap="square" rtlCol="0">
-            <a:spAutoFit/>
-          </a:bodyPr>
-          <a:lstStyle>
-            <a:defPPr>
-              <a:defRPr lang="es-CO"/>
-            </a:defPPr>
-            <a:lvl1pPr algn="just">
-              <a:defRPr>
-                <a:solidFill>
-                  <a:schemeClr val="tx1"/>
-                </a:solidFill>
-              </a:defRPr>
-            </a:lvl1pPr>
-            <a:lvl2pPr>
-              <a:defRPr>
-                <a:solidFill>
-                  <a:schemeClr val="tx1"/>
-                </a:solidFill>
-              </a:defRPr>
-            </a:lvl2pPr>
-            <a:lvl3pPr>
-              <a:defRPr>
-                <a:solidFill>
-                  <a:schemeClr val="tx1"/>
-                </a:solidFill>
-              </a:defRPr>
-            </a:lvl3pPr>
-            <a:lvl4pPr>
-              <a:defRPr>
-                <a:solidFill>
-                  <a:schemeClr val="tx1"/>
-                </a:solidFill>
-              </a:defRPr>
-            </a:lvl4pPr>
-            <a:lvl5pPr>
-              <a:defRPr>
-                <a:solidFill>
-                  <a:schemeClr val="tx1"/>
-                </a:solidFill>
-              </a:defRPr>
-            </a:lvl5pPr>
-            <a:lvl6pPr>
-              <a:defRPr>
-                <a:solidFill>
-                  <a:schemeClr val="tx1"/>
-                </a:solidFill>
-              </a:defRPr>
-            </a:lvl6pPr>
-            <a:lvl7pPr>
-              <a:defRPr>
-                <a:solidFill>
-                  <a:schemeClr val="tx1"/>
-                </a:solidFill>
-              </a:defRPr>
-            </a:lvl7pPr>
-            <a:lvl8pPr>
-              <a:defRPr>
-                <a:solidFill>
-                  <a:schemeClr val="tx1"/>
-                </a:solidFill>
-              </a:defRPr>
-            </a:lvl8pPr>
-            <a:lvl9pPr>
-              <a:defRPr>
-                <a:solidFill>
-                  <a:schemeClr val="tx1"/>
-                </a:solidFill>
-              </a:defRPr>
-            </a:lvl9pPr>
-          </a:lstStyle>
-          <a:p>
-            <a:r>
-              <a:rPr lang="es-CO" dirty="0"/>
-              <a:t>Estimado estudiante tenga en cuenta lo siguiente:</a:t>
-            </a:r>
-          </a:p>
-        </p:txBody>
-      </p:sp>
-      <p:pic>
-        <p:nvPicPr>
-          <p:cNvPr id="19" name="Imagen 18">
-            <a:extLst>
-              <a:ext uri="{FF2B5EF4-FFF2-40B4-BE49-F238E27FC236}">
-                <a16:creationId xmlns:a16="http://schemas.microsoft.com/office/drawing/2014/main" id="{9A4DA2B7-9B4A-5FD1-E61F-594084326029}"/>
-              </a:ext>
-            </a:extLst>
-          </p:cNvPr>
-          <p:cNvPicPr>
-            <a:picLocks noChangeAspect="1"/>
-          </p:cNvPicPr>
-          <p:nvPr/>
-        </p:nvPicPr>
-        <p:blipFill>
-          <a:blip r:embed="rId3"/>
-          <a:stretch>
-            <a:fillRect/>
-          </a:stretch>
-        </p:blipFill>
-        <p:spPr>
-          <a:xfrm>
-            <a:off x="5734464" y="301672"/>
-            <a:ext cx="6340732" cy="2900430"/>
-          </a:xfrm>
-          <a:prstGeom prst="roundRect">
-            <a:avLst>
-              <a:gd name="adj" fmla="val 8594"/>
-            </a:avLst>
-          </a:prstGeom>
-          <a:solidFill>
-            <a:srgbClr val="FFFFFF">
-              <a:shade val="85000"/>
-            </a:srgbClr>
-          </a:solidFill>
-          <a:ln>
-            <a:noFill/>
-          </a:ln>
-          <a:effectLst/>
-        </p:spPr>
-      </p:pic>
-      <p:sp>
-        <p:nvSpPr>
-          <p:cNvPr id="20" name="Flecha: arriba y abajo 19">
-            <a:extLst>
-              <a:ext uri="{FF2B5EF4-FFF2-40B4-BE49-F238E27FC236}">
-                <a16:creationId xmlns:a16="http://schemas.microsoft.com/office/drawing/2014/main" id="{B0CFC603-9496-72A3-0EA0-40CAF706B026}"/>
-              </a:ext>
-            </a:extLst>
-          </p:cNvPr>
-          <p:cNvSpPr/>
-          <p:nvPr/>
-        </p:nvSpPr>
-        <p:spPr>
-          <a:xfrm>
-            <a:off x="11264649" y="2162229"/>
-            <a:ext cx="177299" cy="436099"/>
-          </a:xfrm>
-          <a:prstGeom prst="upDownArrow">
-            <a:avLst/>
-          </a:prstGeom>
-          <a:solidFill>
-            <a:srgbClr val="00B050"/>
-          </a:solidFill>
-          <a:ln>
-            <a:noFill/>
-          </a:ln>
-        </p:spPr>
-        <p:style>
-          <a:lnRef idx="2">
-            <a:schemeClr val="accent1">
-              <a:shade val="50000"/>
-            </a:schemeClr>
-          </a:lnRef>
-          <a:fillRef idx="1">
-            <a:schemeClr val="accent1"/>
-          </a:fillRef>
-          <a:effectRef idx="0">
-            <a:schemeClr val="accent1"/>
-          </a:effectRef>
-          <a:fontRef idx="minor">
-            <a:schemeClr val="lt1"/>
-          </a:fontRef>
-        </p:style>
-        <p:txBody>
-          <a:bodyPr rtlCol="0" anchor="ctr"/>
-          <a:lstStyle/>
-          <a:p>
-            <a:pPr algn="ctr"/>
-            <a:endParaRPr lang="es-CO"/>
-          </a:p>
-        </p:txBody>
-      </p:sp>
-      <p:sp>
-        <p:nvSpPr>
-          <p:cNvPr id="22" name="Flecha: arriba y abajo 21">
-            <a:extLst>
-              <a:ext uri="{FF2B5EF4-FFF2-40B4-BE49-F238E27FC236}">
-                <a16:creationId xmlns:a16="http://schemas.microsoft.com/office/drawing/2014/main" id="{25A4025E-8E2E-F8EE-A06B-9A4274F7904D}"/>
-              </a:ext>
-            </a:extLst>
-          </p:cNvPr>
-          <p:cNvSpPr/>
-          <p:nvPr/>
-        </p:nvSpPr>
-        <p:spPr>
-          <a:xfrm>
-            <a:off x="11264649" y="1328385"/>
-            <a:ext cx="177299" cy="436099"/>
-          </a:xfrm>
-          <a:prstGeom prst="upDownArrow">
-            <a:avLst/>
-          </a:prstGeom>
-          <a:solidFill>
-            <a:srgbClr val="00B050"/>
-          </a:solidFill>
-          <a:ln>
-            <a:noFill/>
-          </a:ln>
-        </p:spPr>
-        <p:style>
-          <a:lnRef idx="2">
-            <a:schemeClr val="accent1">
-              <a:shade val="50000"/>
-            </a:schemeClr>
-          </a:lnRef>
-          <a:fillRef idx="1">
-            <a:schemeClr val="accent1"/>
-          </a:fillRef>
-          <a:effectRef idx="0">
-            <a:schemeClr val="accent1"/>
-          </a:effectRef>
-          <a:fontRef idx="minor">
-            <a:schemeClr val="lt1"/>
-          </a:fontRef>
-        </p:style>
-        <p:txBody>
-          <a:bodyPr rtlCol="0" anchor="ctr"/>
-          <a:lstStyle/>
-          <a:p>
-            <a:pPr algn="ctr"/>
-            <a:endParaRPr lang="es-CO" dirty="0"/>
-          </a:p>
-        </p:txBody>
-      </p:sp>
-      <p:sp>
-        <p:nvSpPr>
-          <p:cNvPr id="23" name="Rectángulo: esquinas redondeadas 22">
-            <a:extLst>
-              <a:ext uri="{FF2B5EF4-FFF2-40B4-BE49-F238E27FC236}">
-                <a16:creationId xmlns:a16="http://schemas.microsoft.com/office/drawing/2014/main" id="{9C3D4B20-63DD-3680-857C-38710B747EF8}"/>
-              </a:ext>
-            </a:extLst>
-          </p:cNvPr>
-          <p:cNvSpPr/>
-          <p:nvPr/>
-        </p:nvSpPr>
-        <p:spPr>
-          <a:xfrm>
-            <a:off x="5786412" y="907158"/>
-            <a:ext cx="4810109" cy="705974"/>
-          </a:xfrm>
-          <a:prstGeom prst="roundRect">
-            <a:avLst/>
-          </a:prstGeom>
-          <a:solidFill>
-            <a:schemeClr val="bg1"/>
-          </a:solidFill>
-          <a:ln>
-            <a:noFill/>
-          </a:ln>
-        </p:spPr>
-        <p:style>
-          <a:lnRef idx="2">
-            <a:schemeClr val="accent1">
-              <a:shade val="50000"/>
-            </a:schemeClr>
-          </a:lnRef>
-          <a:fillRef idx="1">
-            <a:schemeClr val="accent1"/>
-          </a:fillRef>
-          <a:effectRef idx="0">
-            <a:schemeClr val="accent1"/>
-          </a:effectRef>
-          <a:fontRef idx="minor">
-            <a:schemeClr val="lt1"/>
-          </a:fontRef>
-        </p:style>
-        <p:txBody>
-          <a:bodyPr rtlCol="0" anchor="ctr"/>
-          <a:lstStyle/>
-          <a:p>
-            <a:pPr algn="ctr"/>
-            <a:r>
-              <a:rPr lang="es-CO" dirty="0">
-                <a:solidFill>
-                  <a:schemeClr val="tx1"/>
-                </a:solidFill>
-              </a:rPr>
-              <a:t>ACTUACIÓN 3</a:t>
-            </a:r>
-          </a:p>
-        </p:txBody>
-      </p:sp>
-      <p:sp>
-        <p:nvSpPr>
-          <p:cNvPr id="24" name="Rectángulo: esquinas redondeadas 23">
-            <a:extLst>
-              <a:ext uri="{FF2B5EF4-FFF2-40B4-BE49-F238E27FC236}">
-                <a16:creationId xmlns:a16="http://schemas.microsoft.com/office/drawing/2014/main" id="{31BF783D-3BDF-57A3-102B-B03418B30E08}"/>
-              </a:ext>
-            </a:extLst>
-          </p:cNvPr>
-          <p:cNvSpPr/>
-          <p:nvPr/>
-        </p:nvSpPr>
-        <p:spPr>
-          <a:xfrm>
-            <a:off x="5786412" y="1679484"/>
-            <a:ext cx="4810109" cy="711200"/>
-          </a:xfrm>
-          <a:prstGeom prst="roundRect">
-            <a:avLst/>
-          </a:prstGeom>
-          <a:solidFill>
-            <a:schemeClr val="bg1"/>
-          </a:solidFill>
-          <a:ln>
-            <a:noFill/>
-          </a:ln>
-        </p:spPr>
-        <p:style>
-          <a:lnRef idx="2">
-            <a:schemeClr val="accent1">
-              <a:shade val="50000"/>
-            </a:schemeClr>
-          </a:lnRef>
-          <a:fillRef idx="1">
-            <a:schemeClr val="accent1"/>
-          </a:fillRef>
-          <a:effectRef idx="0">
-            <a:schemeClr val="accent1"/>
-          </a:effectRef>
-          <a:fontRef idx="minor">
-            <a:schemeClr val="lt1"/>
-          </a:fontRef>
-        </p:style>
-        <p:txBody>
-          <a:bodyPr rtlCol="0" anchor="ctr"/>
-          <a:lstStyle/>
-          <a:p>
-            <a:pPr algn="ctr"/>
-            <a:r>
-              <a:rPr lang="es-CO" dirty="0">
-                <a:solidFill>
-                  <a:schemeClr val="tx1"/>
-                </a:solidFill>
-              </a:rPr>
-              <a:t>ACTUACIÓN 2</a:t>
-            </a:r>
-          </a:p>
-        </p:txBody>
-      </p:sp>
-      <p:sp>
-        <p:nvSpPr>
-          <p:cNvPr id="25" name="Rectángulo: esquinas redondeadas 24">
-            <a:extLst>
-              <a:ext uri="{FF2B5EF4-FFF2-40B4-BE49-F238E27FC236}">
-                <a16:creationId xmlns:a16="http://schemas.microsoft.com/office/drawing/2014/main" id="{60382C07-4DC0-C195-ADC4-E8177385D3F6}"/>
-              </a:ext>
-            </a:extLst>
-          </p:cNvPr>
-          <p:cNvSpPr/>
-          <p:nvPr/>
-        </p:nvSpPr>
-        <p:spPr>
-          <a:xfrm>
-            <a:off x="5786412" y="2440103"/>
-            <a:ext cx="4810109" cy="711200"/>
-          </a:xfrm>
-          <a:prstGeom prst="roundRect">
-            <a:avLst/>
-          </a:prstGeom>
-          <a:solidFill>
-            <a:schemeClr val="bg1"/>
-          </a:solidFill>
-          <a:ln>
-            <a:noFill/>
-          </a:ln>
-        </p:spPr>
-        <p:style>
-          <a:lnRef idx="2">
-            <a:schemeClr val="accent1">
-              <a:shade val="50000"/>
-            </a:schemeClr>
-          </a:lnRef>
-          <a:fillRef idx="1">
-            <a:schemeClr val="accent1"/>
-          </a:fillRef>
-          <a:effectRef idx="0">
-            <a:schemeClr val="accent1"/>
-          </a:effectRef>
-          <a:fontRef idx="minor">
-            <a:schemeClr val="lt1"/>
-          </a:fontRef>
-        </p:style>
-        <p:txBody>
-          <a:bodyPr rtlCol="0" anchor="ctr"/>
-          <a:lstStyle/>
-          <a:p>
-            <a:pPr algn="ctr"/>
-            <a:r>
-              <a:rPr lang="es-CO" dirty="0">
-                <a:solidFill>
-                  <a:schemeClr val="tx1"/>
-                </a:solidFill>
-              </a:rPr>
-              <a:t>ACTUACIÓN 1</a:t>
-            </a:r>
-          </a:p>
-        </p:txBody>
-      </p:sp>
-      <p:sp>
-        <p:nvSpPr>
-          <p:cNvPr id="31" name="Rectángulo: esquinas redondeadas 30">
-            <a:extLst>
-              <a:ext uri="{FF2B5EF4-FFF2-40B4-BE49-F238E27FC236}">
-                <a16:creationId xmlns:a16="http://schemas.microsoft.com/office/drawing/2014/main" id="{D65F22FE-C3CC-98BC-033F-7D0B73AC22F0}"/>
-              </a:ext>
-            </a:extLst>
-          </p:cNvPr>
-          <p:cNvSpPr/>
-          <p:nvPr/>
-        </p:nvSpPr>
-        <p:spPr>
-          <a:xfrm>
-            <a:off x="10735059" y="907158"/>
-            <a:ext cx="1201598" cy="291065"/>
-          </a:xfrm>
-          <a:prstGeom prst="roundRect">
-            <a:avLst/>
-          </a:prstGeom>
-          <a:solidFill>
-            <a:schemeClr val="accent3">
-              <a:lumMod val="75000"/>
+            <a:schemeClr val="tx1">
+              <a:alpha val="70000"/>
             </a:schemeClr>
           </a:solidFill>
           <a:ln>
@@ -4691,19 +3436,182 @@
           <a:lstStyle/>
           <a:p>
             <a:pPr algn="ctr"/>
-            <a:r>
-              <a:rPr lang="es-CO" sz="1600" dirty="0"/>
-              <a:t>04-17-2023</a:t>
-            </a:r>
-          </a:p>
-        </p:txBody>
-      </p:sp>
-      <p:sp>
-        <p:nvSpPr>
-          <p:cNvPr id="32" name="Rectángulo: esquinas redondeadas 31">
-            <a:extLst>
-              <a:ext uri="{FF2B5EF4-FFF2-40B4-BE49-F238E27FC236}">
-                <a16:creationId xmlns:a16="http://schemas.microsoft.com/office/drawing/2014/main" id="{2E38185E-328B-9863-B21B-04C76E33B7C5}"/>
+            <a:endParaRPr lang="es-CO">
+              <a:ln>
+                <a:solidFill>
+                  <a:schemeClr val="accent1"/>
+                </a:solidFill>
+              </a:ln>
+            </a:endParaRPr>
+          </a:p>
+        </p:txBody>
+      </p:sp>
+      <p:sp>
+        <p:nvSpPr>
+          <p:cNvPr id="2" name="CuadroTexto 1">
+            <a:extLst>
+              <a:ext uri="{FF2B5EF4-FFF2-40B4-BE49-F238E27FC236}">
+                <a16:creationId xmlns:a16="http://schemas.microsoft.com/office/drawing/2014/main" id="{4BE15536-8584-618A-A38B-56A2C9028692}"/>
+              </a:ext>
+            </a:extLst>
+          </p:cNvPr>
+          <p:cNvSpPr txBox="1"/>
+          <p:nvPr/>
+        </p:nvSpPr>
+        <p:spPr>
+          <a:xfrm>
+            <a:off x="318426" y="445008"/>
+            <a:ext cx="11268635" cy="6494085"/>
+          </a:xfrm>
+          <a:prstGeom prst="rect">
+            <a:avLst/>
+          </a:prstGeom>
+          <a:noFill/>
+        </p:spPr>
+        <p:txBody>
+          <a:bodyPr wrap="square" rtlCol="0">
+            <a:spAutoFit/>
+          </a:bodyPr>
+          <a:lstStyle/>
+          <a:p>
+            <a:pPr algn="ctr"/>
+            <a:r>
+              <a:rPr lang="es-MX" sz="3600" dirty="0">
+                <a:solidFill>
+                  <a:schemeClr val="bg1"/>
+                </a:solidFill>
+              </a:rPr>
+              <a:t>Ahora IURIS le permite pausar los expedientes!</a:t>
+            </a:r>
+          </a:p>
+          <a:p>
+            <a:endParaRPr lang="es-MX" sz="3600" dirty="0">
+              <a:solidFill>
+                <a:schemeClr val="bg1"/>
+              </a:solidFill>
+            </a:endParaRPr>
+          </a:p>
+          <a:p>
+            <a:pPr algn="just"/>
+            <a:r>
+              <a:rPr lang="es-MX" sz="3600" dirty="0">
+                <a:solidFill>
+                  <a:schemeClr val="bg1"/>
+                </a:solidFill>
+              </a:rPr>
+              <a:t>Esta funcionalidad pone en pausa el tiempo de evaluación de actuaciones en aquellos expedientes abiertos que no tendrán actuaciones en un lapso determinado de tiempo.</a:t>
+            </a:r>
+          </a:p>
+          <a:p>
+            <a:endParaRPr lang="es-MX" sz="3600" dirty="0"/>
+          </a:p>
+          <a:p>
+            <a:endParaRPr lang="es-MX" sz="3600" dirty="0"/>
+          </a:p>
+          <a:p>
+            <a:endParaRPr lang="es-MX" sz="3600" dirty="0"/>
+          </a:p>
+          <a:p>
+            <a:endParaRPr lang="es-MX" sz="3600" dirty="0"/>
+          </a:p>
+          <a:p>
+            <a:endParaRPr lang="es-MX" sz="3600" dirty="0"/>
+          </a:p>
+          <a:p>
+            <a:endParaRPr lang="es-MX" sz="3600" dirty="0"/>
+          </a:p>
+          <a:p>
+            <a:r>
+              <a:rPr lang="es-CO" sz="2000" dirty="0" err="1">
+                <a:solidFill>
+                  <a:schemeClr val="bg1"/>
+                </a:solidFill>
+              </a:rPr>
+              <a:t>Amatai</a:t>
+            </a:r>
+            <a:r>
+              <a:rPr lang="es-CO" sz="2000" dirty="0">
+                <a:solidFill>
+                  <a:schemeClr val="bg1"/>
+                </a:solidFill>
+              </a:rPr>
+              <a:t> SAS</a:t>
+            </a:r>
+          </a:p>
+        </p:txBody>
+      </p:sp>
+    </p:spTree>
+    <p:extLst>
+      <p:ext uri="{BB962C8B-B14F-4D97-AF65-F5344CB8AC3E}">
+        <p14:creationId xmlns:p14="http://schemas.microsoft.com/office/powerpoint/2010/main" val="1262244119"/>
+      </p:ext>
+    </p:extLst>
+  </p:cSld>
+  <p:clrMapOvr>
+    <a:masterClrMapping/>
+  </p:clrMapOvr>
+</p:sld>
+</file>
+
+<file path=ppt/slides/slide2.xml><?xml version="1.0" encoding="utf-8"?>
+<p:sld xmlns:a="http://schemas.openxmlformats.org/drawingml/2006/main" xmlns:r="http://schemas.openxmlformats.org/officeDocument/2006/relationships" xmlns:p="http://schemas.openxmlformats.org/presentationml/2006/main">
+  <p:cSld>
+    <p:spTree>
+      <p:nvGrpSpPr>
+        <p:cNvPr id="1" name=""/>
+        <p:cNvGrpSpPr/>
+        <p:nvPr/>
+      </p:nvGrpSpPr>
+      <p:grpSpPr>
+        <a:xfrm>
+          <a:off x="0" y="0"/>
+          <a:ext cx="0" cy="0"/>
+          <a:chOff x="0" y="0"/>
+          <a:chExt cx="0" cy="0"/>
+        </a:xfrm>
+      </p:grpSpPr>
+      <p:pic>
+        <p:nvPicPr>
+          <p:cNvPr id="3" name="logo">
+            <a:extLst>
+              <a:ext uri="{FF2B5EF4-FFF2-40B4-BE49-F238E27FC236}">
+                <a16:creationId xmlns:a16="http://schemas.microsoft.com/office/drawing/2014/main" id="{CB7069CB-A915-E9BA-0362-5B269561515F}"/>
+              </a:ext>
+            </a:extLst>
+          </p:cNvPr>
+          <p:cNvPicPr>
+            <a:picLocks noChangeAspect="1"/>
+          </p:cNvPicPr>
+          <p:nvPr/>
+        </p:nvPicPr>
+        <p:blipFill>
+          <a:blip r:embed="rId2">
+            <a:extLst>
+              <a:ext uri="{28A0092B-C50C-407E-A947-70E740481C1C}">
+                <a14:useLocalDpi xmlns:a14="http://schemas.microsoft.com/office/drawing/2010/main" val="0"/>
+              </a:ext>
+            </a:extLst>
+          </a:blip>
+          <a:stretch>
+            <a:fillRect/>
+          </a:stretch>
+        </p:blipFill>
+        <p:spPr>
+          <a:xfrm>
+            <a:off x="8765519" y="3350269"/>
+            <a:ext cx="3426481" cy="3473976"/>
+          </a:xfrm>
+          <a:prstGeom prst="rect">
+            <a:avLst/>
+          </a:prstGeom>
+        </p:spPr>
+      </p:pic>
+      <p:sp>
+        <p:nvSpPr>
+          <p:cNvPr id="17" name="Rectángulo 16">
+            <a:extLst>
+              <a:ext uri="{FF2B5EF4-FFF2-40B4-BE49-F238E27FC236}">
+                <a16:creationId xmlns:a16="http://schemas.microsoft.com/office/drawing/2014/main" id="{A8B8087A-F01D-7BF2-7B9B-803D42A31868}"/>
               </a:ext>
             </a:extLst>
           </p:cNvPr>
@@ -4712,15 +3620,15 @@
         </p:nvSpPr>
         <p:spPr>
           <a:xfrm>
-            <a:off x="10719802" y="1815283"/>
-            <a:ext cx="1201598" cy="291065"/>
+            <a:off x="0" y="0"/>
+            <a:ext cx="12192000" cy="6858000"/>
           </a:xfrm>
-          <a:prstGeom prst="roundRect">
+          <a:prstGeom prst="rect">
             <a:avLst/>
           </a:prstGeom>
           <a:solidFill>
-            <a:schemeClr val="accent3">
-              <a:lumMod val="75000"/>
+            <a:schemeClr val="tx1">
+              <a:alpha val="70000"/>
             </a:schemeClr>
           </a:solidFill>
           <a:ln>
@@ -4748,19 +3656,265 @@
           <a:lstStyle/>
           <a:p>
             <a:pPr algn="ctr"/>
-            <a:r>
-              <a:rPr lang="es-CO" sz="1600" dirty="0"/>
-              <a:t>03-23-2023</a:t>
-            </a:r>
-          </a:p>
-        </p:txBody>
-      </p:sp>
-      <p:sp>
-        <p:nvSpPr>
-          <p:cNvPr id="33" name="Rectángulo: esquinas redondeadas 32">
-            <a:extLst>
-              <a:ext uri="{FF2B5EF4-FFF2-40B4-BE49-F238E27FC236}">
-                <a16:creationId xmlns:a16="http://schemas.microsoft.com/office/drawing/2014/main" id="{0A3A0831-102F-E364-A31A-5287AA2245D6}"/>
+            <a:endParaRPr lang="es-CO">
+              <a:ln>
+                <a:solidFill>
+                  <a:schemeClr val="accent1"/>
+                </a:solidFill>
+              </a:ln>
+            </a:endParaRPr>
+          </a:p>
+        </p:txBody>
+      </p:sp>
+      <p:sp>
+        <p:nvSpPr>
+          <p:cNvPr id="2" name="CuadroTexto 1">
+            <a:extLst>
+              <a:ext uri="{FF2B5EF4-FFF2-40B4-BE49-F238E27FC236}">
+                <a16:creationId xmlns:a16="http://schemas.microsoft.com/office/drawing/2014/main" id="{4BE15536-8584-618A-A38B-56A2C9028692}"/>
+              </a:ext>
+            </a:extLst>
+          </p:cNvPr>
+          <p:cNvSpPr txBox="1"/>
+          <p:nvPr/>
+        </p:nvSpPr>
+        <p:spPr>
+          <a:xfrm>
+            <a:off x="318426" y="445008"/>
+            <a:ext cx="11268635" cy="6494085"/>
+          </a:xfrm>
+          <a:prstGeom prst="rect">
+            <a:avLst/>
+          </a:prstGeom>
+          <a:noFill/>
+        </p:spPr>
+        <p:txBody>
+          <a:bodyPr wrap="square" rtlCol="0">
+            <a:spAutoFit/>
+          </a:bodyPr>
+          <a:lstStyle/>
+          <a:p>
+            <a:pPr algn="ctr"/>
+            <a:endParaRPr lang="es-MX" sz="3600" dirty="0">
+              <a:solidFill>
+                <a:schemeClr val="bg1"/>
+              </a:solidFill>
+            </a:endParaRPr>
+          </a:p>
+          <a:p>
+            <a:pPr algn="ctr"/>
+            <a:r>
+              <a:rPr lang="es-MX" sz="3600" dirty="0">
+                <a:solidFill>
+                  <a:schemeClr val="bg1"/>
+                </a:solidFill>
+              </a:rPr>
+              <a:t>En datos del caso de clic en el botón </a:t>
+            </a:r>
+            <a:r>
+              <a:rPr lang="es-MX" sz="3600" b="1" i="1" dirty="0">
+                <a:solidFill>
+                  <a:schemeClr val="bg1"/>
+                </a:solidFill>
+              </a:rPr>
+              <a:t>Activar pausa</a:t>
+            </a:r>
+          </a:p>
+          <a:p>
+            <a:pPr algn="ctr"/>
+            <a:endParaRPr lang="es-MX" sz="3600" dirty="0">
+              <a:solidFill>
+                <a:schemeClr val="bg1"/>
+              </a:solidFill>
+            </a:endParaRPr>
+          </a:p>
+          <a:p>
+            <a:pPr algn="ctr"/>
+            <a:endParaRPr lang="es-MX" sz="3600" dirty="0">
+              <a:solidFill>
+                <a:schemeClr val="bg1"/>
+              </a:solidFill>
+            </a:endParaRPr>
+          </a:p>
+          <a:p>
+            <a:pPr algn="ctr"/>
+            <a:endParaRPr lang="es-MX" sz="3600" dirty="0">
+              <a:solidFill>
+                <a:schemeClr val="bg1"/>
+              </a:solidFill>
+            </a:endParaRPr>
+          </a:p>
+          <a:p>
+            <a:pPr algn="ctr"/>
+            <a:endParaRPr lang="es-MX" sz="3600" dirty="0">
+              <a:solidFill>
+                <a:schemeClr val="bg1"/>
+              </a:solidFill>
+            </a:endParaRPr>
+          </a:p>
+          <a:p>
+            <a:pPr algn="ctr"/>
+            <a:endParaRPr lang="es-MX" sz="3600" dirty="0">
+              <a:solidFill>
+                <a:schemeClr val="bg1"/>
+              </a:solidFill>
+            </a:endParaRPr>
+          </a:p>
+          <a:p>
+            <a:pPr algn="ctr"/>
+            <a:endParaRPr lang="es-MX" sz="3600" dirty="0">
+              <a:solidFill>
+                <a:schemeClr val="bg1"/>
+              </a:solidFill>
+            </a:endParaRPr>
+          </a:p>
+          <a:p>
+            <a:pPr algn="ctr"/>
+            <a:endParaRPr lang="es-MX" sz="3600" dirty="0">
+              <a:solidFill>
+                <a:schemeClr val="bg1"/>
+              </a:solidFill>
+            </a:endParaRPr>
+          </a:p>
+          <a:p>
+            <a:pPr algn="ctr"/>
+            <a:endParaRPr lang="es-MX" sz="3600" dirty="0">
+              <a:solidFill>
+                <a:schemeClr val="bg1"/>
+              </a:solidFill>
+            </a:endParaRPr>
+          </a:p>
+          <a:p>
+            <a:pPr algn="ctr"/>
+            <a:endParaRPr lang="es-MX" sz="3600" dirty="0">
+              <a:solidFill>
+                <a:schemeClr val="bg1"/>
+              </a:solidFill>
+            </a:endParaRPr>
+          </a:p>
+          <a:p>
+            <a:r>
+              <a:rPr lang="es-CO" sz="2000" dirty="0" err="1">
+                <a:solidFill>
+                  <a:schemeClr val="bg1"/>
+                </a:solidFill>
+              </a:rPr>
+              <a:t>Amatai</a:t>
+            </a:r>
+            <a:r>
+              <a:rPr lang="es-CO" sz="2000" dirty="0">
+                <a:solidFill>
+                  <a:schemeClr val="bg1"/>
+                </a:solidFill>
+              </a:rPr>
+              <a:t> SAS</a:t>
+            </a:r>
+          </a:p>
+        </p:txBody>
+      </p:sp>
+      <p:pic>
+        <p:nvPicPr>
+          <p:cNvPr id="7" name="Imagen 6">
+            <a:extLst>
+              <a:ext uri="{FF2B5EF4-FFF2-40B4-BE49-F238E27FC236}">
+                <a16:creationId xmlns:a16="http://schemas.microsoft.com/office/drawing/2014/main" id="{E9C08275-B4A9-94FA-F586-5B0152AAB435}"/>
+              </a:ext>
+            </a:extLst>
+          </p:cNvPr>
+          <p:cNvPicPr>
+            <a:picLocks noChangeAspect="1"/>
+          </p:cNvPicPr>
+          <p:nvPr/>
+        </p:nvPicPr>
+        <p:blipFill rotWithShape="1">
+          <a:blip r:embed="rId3"/>
+          <a:srcRect l="10381" r="1483" b="49549"/>
+          <a:stretch/>
+        </p:blipFill>
+        <p:spPr>
+          <a:xfrm>
+            <a:off x="63060" y="2711668"/>
+            <a:ext cx="11587062" cy="1849821"/>
+          </a:xfrm>
+          <a:prstGeom prst="rect">
+            <a:avLst/>
+          </a:prstGeom>
+        </p:spPr>
+      </p:pic>
+      <p:pic>
+        <p:nvPicPr>
+          <p:cNvPr id="5" name="Imagen 4">
+            <a:extLst>
+              <a:ext uri="{FF2B5EF4-FFF2-40B4-BE49-F238E27FC236}">
+                <a16:creationId xmlns:a16="http://schemas.microsoft.com/office/drawing/2014/main" id="{793CB3B7-61F0-D521-1BAA-43ADC1F8662B}"/>
+              </a:ext>
+            </a:extLst>
+          </p:cNvPr>
+          <p:cNvPicPr>
+            <a:picLocks noChangeAspect="1"/>
+          </p:cNvPicPr>
+          <p:nvPr/>
+        </p:nvPicPr>
+        <p:blipFill rotWithShape="1">
+          <a:blip r:embed="rId4"/>
+          <a:srcRect l="2045" t="16984" r="38527" b="39150"/>
+          <a:stretch/>
+        </p:blipFill>
+        <p:spPr>
+          <a:xfrm>
+            <a:off x="8673366" y="3658816"/>
+            <a:ext cx="2123090" cy="606027"/>
+          </a:xfrm>
+          <a:prstGeom prst="rect">
+            <a:avLst/>
+          </a:prstGeom>
+        </p:spPr>
+      </p:pic>
+      <p:pic>
+        <p:nvPicPr>
+          <p:cNvPr id="8" name="Gráfico 7" descr="Lupa">
+            <a:extLst>
+              <a:ext uri="{FF2B5EF4-FFF2-40B4-BE49-F238E27FC236}">
+                <a16:creationId xmlns:a16="http://schemas.microsoft.com/office/drawing/2014/main" id="{70287BDA-E56B-9DF6-26A8-A0F53C4766DE}"/>
+              </a:ext>
+            </a:extLst>
+          </p:cNvPr>
+          <p:cNvPicPr>
+            <a:picLocks noChangeAspect="1"/>
+          </p:cNvPicPr>
+          <p:nvPr/>
+        </p:nvPicPr>
+        <p:blipFill>
+          <a:blip r:embed="rId5">
+            <a:extLst>
+              <a:ext uri="{28A0092B-C50C-407E-A947-70E740481C1C}">
+                <a14:useLocalDpi xmlns:a14="http://schemas.microsoft.com/office/drawing/2010/main" val="0"/>
+              </a:ext>
+              <a:ext uri="{96DAC541-7B7A-43D3-8B79-37D633B846F1}">
+                <asvg:svgBlip xmlns:asvg="http://schemas.microsoft.com/office/drawing/2016/SVG/main" r:embed="rId6"/>
+              </a:ext>
+            </a:extLst>
+          </a:blip>
+          <a:stretch>
+            <a:fillRect/>
+          </a:stretch>
+        </p:blipFill>
+        <p:spPr>
+          <a:xfrm rot="5181362">
+            <a:off x="7301528" y="2313798"/>
+            <a:ext cx="4092798" cy="4018677"/>
+          </a:xfrm>
+          <a:prstGeom prst="rect">
+            <a:avLst/>
+          </a:prstGeom>
+        </p:spPr>
+      </p:pic>
+      <p:sp>
+        <p:nvSpPr>
+          <p:cNvPr id="9" name="Rectángulo 8">
+            <a:extLst>
+              <a:ext uri="{FF2B5EF4-FFF2-40B4-BE49-F238E27FC236}">
+                <a16:creationId xmlns:a16="http://schemas.microsoft.com/office/drawing/2014/main" id="{19CE3575-09A8-0984-60D0-CDEE01EEEB27}"/>
               </a:ext>
             </a:extLst>
           </p:cNvPr>
@@ -4769,15 +3923,128 @@
         </p:nvSpPr>
         <p:spPr>
           <a:xfrm>
-            <a:off x="10719802" y="2623728"/>
-            <a:ext cx="1201598" cy="291065"/>
+            <a:off x="63060" y="3741683"/>
+            <a:ext cx="8271643" cy="819806"/>
           </a:xfrm>
-          <a:prstGeom prst="roundRect">
+          <a:prstGeom prst="rect">
+            <a:avLst/>
+          </a:prstGeom>
+          <a:ln>
+            <a:noFill/>
+          </a:ln>
+        </p:spPr>
+        <p:style>
+          <a:lnRef idx="2">
+            <a:schemeClr val="accent6"/>
+          </a:lnRef>
+          <a:fillRef idx="1">
+            <a:schemeClr val="lt1"/>
+          </a:fillRef>
+          <a:effectRef idx="0">
+            <a:schemeClr val="accent6"/>
+          </a:effectRef>
+          <a:fontRef idx="minor">
+            <a:schemeClr val="dk1"/>
+          </a:fontRef>
+        </p:style>
+        <p:txBody>
+          <a:bodyPr rtlCol="0" anchor="ctr"/>
+          <a:lstStyle/>
+          <a:p>
+            <a:pPr algn="ctr"/>
+            <a:endParaRPr lang="es-CO"/>
+          </a:p>
+        </p:txBody>
+      </p:sp>
+    </p:spTree>
+    <p:extLst>
+      <p:ext uri="{BB962C8B-B14F-4D97-AF65-F5344CB8AC3E}">
+        <p14:creationId xmlns:p14="http://schemas.microsoft.com/office/powerpoint/2010/main" val="5733342"/>
+      </p:ext>
+    </p:extLst>
+  </p:cSld>
+  <p:clrMapOvr>
+    <a:masterClrMapping/>
+  </p:clrMapOvr>
+</p:sld>
+</file>
+
+<file path=ppt/slides/slide3.xml><?xml version="1.0" encoding="utf-8"?>
+<p:sld xmlns:a="http://schemas.openxmlformats.org/drawingml/2006/main" xmlns:r="http://schemas.openxmlformats.org/officeDocument/2006/relationships" xmlns:p="http://schemas.openxmlformats.org/presentationml/2006/main">
+  <p:cSld>
+    <p:spTree>
+      <p:nvGrpSpPr>
+        <p:cNvPr id="1" name=""/>
+        <p:cNvGrpSpPr/>
+        <p:nvPr/>
+      </p:nvGrpSpPr>
+      <p:grpSpPr>
+        <a:xfrm>
+          <a:off x="0" y="0"/>
+          <a:ext cx="0" cy="0"/>
+          <a:chOff x="0" y="0"/>
+          <a:chExt cx="0" cy="0"/>
+        </a:xfrm>
+      </p:grpSpPr>
+      <p:pic>
+        <p:nvPicPr>
+          <p:cNvPr id="3" name="logo">
+            <a:extLst>
+              <a:ext uri="{FF2B5EF4-FFF2-40B4-BE49-F238E27FC236}">
+                <a16:creationId xmlns:a16="http://schemas.microsoft.com/office/drawing/2014/main" id="{CB7069CB-A915-E9BA-0362-5B269561515F}"/>
+              </a:ext>
+            </a:extLst>
+          </p:cNvPr>
+          <p:cNvPicPr>
+            <a:picLocks noChangeAspect="1"/>
+          </p:cNvPicPr>
+          <p:nvPr/>
+        </p:nvPicPr>
+        <p:blipFill>
+          <a:blip r:embed="rId2">
+            <a:extLst>
+              <a:ext uri="{28A0092B-C50C-407E-A947-70E740481C1C}">
+                <a14:useLocalDpi xmlns:a14="http://schemas.microsoft.com/office/drawing/2010/main" val="0"/>
+              </a:ext>
+            </a:extLst>
+          </a:blip>
+          <a:stretch>
+            <a:fillRect/>
+          </a:stretch>
+        </p:blipFill>
+        <p:spPr>
+          <a:xfrm>
+            <a:off x="8765519" y="3350269"/>
+            <a:ext cx="3426481" cy="3473976"/>
+          </a:xfrm>
+          <a:prstGeom prst="rect">
+            <a:avLst/>
+          </a:prstGeom>
+        </p:spPr>
+      </p:pic>
+      <p:sp>
+        <p:nvSpPr>
+          <p:cNvPr id="17" name="Rectángulo 16">
+            <a:extLst>
+              <a:ext uri="{FF2B5EF4-FFF2-40B4-BE49-F238E27FC236}">
+                <a16:creationId xmlns:a16="http://schemas.microsoft.com/office/drawing/2014/main" id="{A8B8087A-F01D-7BF2-7B9B-803D42A31868}"/>
+              </a:ext>
+            </a:extLst>
+          </p:cNvPr>
+          <p:cNvSpPr/>
+          <p:nvPr/>
+        </p:nvSpPr>
+        <p:spPr>
+          <a:xfrm>
+            <a:off x="0" y="0"/>
+            <a:ext cx="12192000" cy="6858000"/>
+          </a:xfrm>
+          <a:prstGeom prst="rect">
             <a:avLst/>
           </a:prstGeom>
           <a:solidFill>
-            <a:schemeClr val="accent3">
-              <a:lumMod val="75000"/>
+            <a:schemeClr val="tx1">
+              <a:alpha val="70000"/>
             </a:schemeClr>
           </a:solidFill>
           <a:ln>
@@ -4805,19 +4072,22 @@
           <a:lstStyle/>
           <a:p>
             <a:pPr algn="ctr"/>
-            <a:r>
-              <a:rPr lang="es-CO" sz="1600" dirty="0"/>
-              <a:t>02-10-2023</a:t>
-            </a:r>
-          </a:p>
-        </p:txBody>
-      </p:sp>
-      <p:sp>
-        <p:nvSpPr>
-          <p:cNvPr id="34" name="CuadroTexto 33">
-            <a:extLst>
-              <a:ext uri="{FF2B5EF4-FFF2-40B4-BE49-F238E27FC236}">
-                <a16:creationId xmlns:a16="http://schemas.microsoft.com/office/drawing/2014/main" id="{97B49A1F-CE3C-01F0-779D-C75766075C77}"/>
+            <a:endParaRPr lang="es-CO">
+              <a:ln>
+                <a:solidFill>
+                  <a:schemeClr val="accent1"/>
+                </a:solidFill>
+              </a:ln>
+            </a:endParaRPr>
+          </a:p>
+        </p:txBody>
+      </p:sp>
+      <p:sp>
+        <p:nvSpPr>
+          <p:cNvPr id="2" name="CuadroTexto 1">
+            <a:extLst>
+              <a:ext uri="{FF2B5EF4-FFF2-40B4-BE49-F238E27FC236}">
+                <a16:creationId xmlns:a16="http://schemas.microsoft.com/office/drawing/2014/main" id="{4BE15536-8584-618A-A38B-56A2C9028692}"/>
               </a:ext>
             </a:extLst>
           </p:cNvPr>
@@ -4826,42 +4096,128 @@
         </p:nvSpPr>
         <p:spPr>
           <a:xfrm>
-            <a:off x="269496" y="5699064"/>
-            <a:ext cx="5205500" cy="1021556"/>
+            <a:off x="318426" y="445008"/>
+            <a:ext cx="11268635" cy="6494085"/>
           </a:xfrm>
-          <a:prstGeom prst="roundRect">
+          <a:prstGeom prst="rect">
             <a:avLst/>
           </a:prstGeom>
-          <a:solidFill>
-            <a:schemeClr val="bg1">
-              <a:alpha val="90000"/>
-            </a:schemeClr>
-          </a:solidFill>
+          <a:noFill/>
         </p:spPr>
         <p:txBody>
           <a:bodyPr wrap="square" rtlCol="0">
             <a:spAutoFit/>
           </a:bodyPr>
-          <a:lstStyle>
-            <a:defPPr>
-              <a:defRPr lang="es-CO"/>
-            </a:defPPr>
-            <a:lvl1pPr algn="just"/>
-          </a:lstStyle>
-          <a:p>
-            <a:r>
-              <a:rPr lang="es-CO" dirty="0"/>
-              <a:t>Si después de revisar evidencia que el sistema le puso una nota por fuera de los parámetros establecidos comuníquese al 3106038006</a:t>
+          <a:lstStyle/>
+          <a:p>
+            <a:pPr algn="ctr"/>
+            <a:endParaRPr lang="es-MX" sz="3600" dirty="0">
+              <a:solidFill>
+                <a:schemeClr val="bg1"/>
+              </a:solidFill>
+            </a:endParaRPr>
+          </a:p>
+          <a:p>
+            <a:pPr algn="ctr"/>
+            <a:r>
+              <a:rPr lang="es-MX" sz="3600" dirty="0">
+                <a:solidFill>
+                  <a:schemeClr val="bg1"/>
+                </a:solidFill>
+              </a:rPr>
+              <a:t>Seleccione la fecha hasta cuando el expediente estará en pausa y de clic en </a:t>
+            </a:r>
+            <a:r>
+              <a:rPr lang="es-MX" sz="3600" b="1" i="1" dirty="0">
+                <a:solidFill>
+                  <a:schemeClr val="bg1"/>
+                </a:solidFill>
+              </a:rPr>
+              <a:t>Crear</a:t>
+            </a:r>
+          </a:p>
+          <a:p>
+            <a:endParaRPr lang="es-MX" sz="3600" dirty="0">
+              <a:solidFill>
+                <a:schemeClr val="bg1"/>
+              </a:solidFill>
+            </a:endParaRPr>
+          </a:p>
+          <a:p>
+            <a:endParaRPr lang="es-MX" sz="3600" dirty="0">
+              <a:solidFill>
+                <a:schemeClr val="bg1"/>
+              </a:solidFill>
+            </a:endParaRPr>
+          </a:p>
+          <a:p>
+            <a:endParaRPr lang="es-MX" sz="3600" dirty="0">
+              <a:solidFill>
+                <a:schemeClr val="bg1"/>
+              </a:solidFill>
+            </a:endParaRPr>
+          </a:p>
+          <a:p>
+            <a:endParaRPr lang="es-MX" sz="3600" dirty="0">
+              <a:solidFill>
+                <a:schemeClr val="bg1"/>
+              </a:solidFill>
+            </a:endParaRPr>
+          </a:p>
+          <a:p>
+            <a:endParaRPr lang="es-MX" sz="3600" dirty="0">
+              <a:solidFill>
+                <a:schemeClr val="bg1"/>
+              </a:solidFill>
+            </a:endParaRPr>
+          </a:p>
+          <a:p>
+            <a:endParaRPr lang="es-MX" sz="3600" dirty="0">
+              <a:solidFill>
+                <a:schemeClr val="bg1"/>
+              </a:solidFill>
+            </a:endParaRPr>
+          </a:p>
+          <a:p>
+            <a:endParaRPr lang="es-MX" sz="3600" dirty="0">
+              <a:solidFill>
+                <a:schemeClr val="bg1"/>
+              </a:solidFill>
+            </a:endParaRPr>
+          </a:p>
+          <a:p>
+            <a:endParaRPr lang="es-MX" sz="3600" dirty="0">
+              <a:solidFill>
+                <a:schemeClr val="bg1"/>
+              </a:solidFill>
+            </a:endParaRPr>
+          </a:p>
+          <a:p>
+            <a:r>
+              <a:rPr lang="es-CO" sz="2000" dirty="0" err="1">
+                <a:solidFill>
+                  <a:schemeClr val="bg1"/>
+                </a:solidFill>
+              </a:rPr>
+              <a:t>Amatai</a:t>
+            </a:r>
+            <a:r>
+              <a:rPr lang="es-CO" sz="2000" dirty="0">
+                <a:solidFill>
+                  <a:schemeClr val="bg1"/>
+                </a:solidFill>
+              </a:rPr>
+              <a:t> SAS</a:t>
             </a:r>
           </a:p>
         </p:txBody>
       </p:sp>
       <p:pic>
         <p:nvPicPr>
-          <p:cNvPr id="36" name="Imagen 35">
-            <a:extLst>
-              <a:ext uri="{FF2B5EF4-FFF2-40B4-BE49-F238E27FC236}">
-                <a16:creationId xmlns:a16="http://schemas.microsoft.com/office/drawing/2014/main" id="{D5853CEA-810C-67E6-860C-D713A3A1C1C3}"/>
+          <p:cNvPr id="6" name="Imagen 5">
+            <a:extLst>
+              <a:ext uri="{FF2B5EF4-FFF2-40B4-BE49-F238E27FC236}">
+                <a16:creationId xmlns:a16="http://schemas.microsoft.com/office/drawing/2014/main" id="{4A506FE3-EF75-7A87-F456-86B7BDDDE4CF}"/>
               </a:ext>
             </a:extLst>
           </p:cNvPr>
@@ -4870,384 +4226,15 @@
           </p:cNvPicPr>
           <p:nvPr/>
         </p:nvPicPr>
-        <p:blipFill>
-          <a:blip r:embed="rId4"/>
-          <a:stretch>
-            <a:fillRect/>
-          </a:stretch>
+        <p:blipFill rotWithShape="1">
+          <a:blip r:embed="rId3"/>
+          <a:srcRect l="16086"/>
+          <a:stretch/>
         </p:blipFill>
         <p:spPr>
           <a:xfrm>
-            <a:off x="5734464" y="3282517"/>
-            <a:ext cx="6340732" cy="3114675"/>
-          </a:xfrm>
-          <a:prstGeom prst="roundRect">
-            <a:avLst>
-              <a:gd name="adj" fmla="val 8594"/>
-            </a:avLst>
-          </a:prstGeom>
-          <a:solidFill>
-            <a:srgbClr val="FFFFFF">
-              <a:shade val="85000"/>
-            </a:srgbClr>
-          </a:solidFill>
-          <a:ln>
-            <a:noFill/>
-          </a:ln>
-          <a:effectLst/>
-        </p:spPr>
-      </p:pic>
-      <p:sp>
-        <p:nvSpPr>
-          <p:cNvPr id="37" name="Rectángulo: esquinas redondeadas 36">
-            <a:extLst>
-              <a:ext uri="{FF2B5EF4-FFF2-40B4-BE49-F238E27FC236}">
-                <a16:creationId xmlns:a16="http://schemas.microsoft.com/office/drawing/2014/main" id="{0F8C11D3-3C42-C4A7-61A0-5C4948094B3E}"/>
-              </a:ext>
-            </a:extLst>
-          </p:cNvPr>
-          <p:cNvSpPr/>
-          <p:nvPr/>
-        </p:nvSpPr>
-        <p:spPr>
-          <a:xfrm>
-            <a:off x="8364902" y="4293030"/>
-            <a:ext cx="1407114" cy="216977"/>
-          </a:xfrm>
-          <a:prstGeom prst="roundRect">
-            <a:avLst/>
-          </a:prstGeom>
-          <a:solidFill>
-            <a:schemeClr val="bg1"/>
-          </a:solidFill>
-          <a:ln>
-            <a:noFill/>
-          </a:ln>
-        </p:spPr>
-        <p:style>
-          <a:lnRef idx="2">
-            <a:schemeClr val="accent1">
-              <a:shade val="50000"/>
-            </a:schemeClr>
-          </a:lnRef>
-          <a:fillRef idx="1">
-            <a:schemeClr val="accent1"/>
-          </a:fillRef>
-          <a:effectRef idx="0">
-            <a:schemeClr val="accent1"/>
-          </a:effectRef>
-          <a:fontRef idx="minor">
-            <a:schemeClr val="lt1"/>
-          </a:fontRef>
-        </p:style>
-        <p:txBody>
-          <a:bodyPr rtlCol="0" anchor="ctr"/>
-          <a:lstStyle/>
-          <a:p>
-            <a:pPr algn="ctr"/>
-            <a:r>
-              <a:rPr lang="es-CO" sz="1600" dirty="0">
-                <a:solidFill>
-                  <a:schemeClr val="tx1"/>
-                </a:solidFill>
-              </a:rPr>
-              <a:t>Conocimiento</a:t>
-            </a:r>
-          </a:p>
-        </p:txBody>
-      </p:sp>
-      <p:sp>
-        <p:nvSpPr>
-          <p:cNvPr id="39" name="Rectángulo: esquinas redondeadas 38">
-            <a:extLst>
-              <a:ext uri="{FF2B5EF4-FFF2-40B4-BE49-F238E27FC236}">
-                <a16:creationId xmlns:a16="http://schemas.microsoft.com/office/drawing/2014/main" id="{ABCBF60F-DDBE-BF0C-0635-73DD99A347C2}"/>
-              </a:ext>
-            </a:extLst>
-          </p:cNvPr>
-          <p:cNvSpPr/>
-          <p:nvPr/>
-        </p:nvSpPr>
-        <p:spPr>
-          <a:xfrm>
-            <a:off x="8364902" y="4647420"/>
-            <a:ext cx="1407114" cy="216977"/>
-          </a:xfrm>
-          <a:prstGeom prst="roundRect">
-            <a:avLst/>
-          </a:prstGeom>
-          <a:solidFill>
-            <a:schemeClr val="bg1"/>
-          </a:solidFill>
-          <a:ln>
-            <a:noFill/>
-          </a:ln>
-        </p:spPr>
-        <p:style>
-          <a:lnRef idx="2">
-            <a:schemeClr val="accent1">
-              <a:shade val="50000"/>
-            </a:schemeClr>
-          </a:lnRef>
-          <a:fillRef idx="1">
-            <a:schemeClr val="accent1"/>
-          </a:fillRef>
-          <a:effectRef idx="0">
-            <a:schemeClr val="accent1"/>
-          </a:effectRef>
-          <a:fontRef idx="minor">
-            <a:schemeClr val="lt1"/>
-          </a:fontRef>
-        </p:style>
-        <p:txBody>
-          <a:bodyPr rtlCol="0" anchor="ctr"/>
-          <a:lstStyle/>
-          <a:p>
-            <a:pPr algn="ctr"/>
-            <a:r>
-              <a:rPr lang="es-CO" sz="1600" dirty="0">
-                <a:solidFill>
-                  <a:schemeClr val="tx1"/>
-                </a:solidFill>
-              </a:rPr>
-              <a:t>Aplicación</a:t>
-            </a:r>
-          </a:p>
-        </p:txBody>
-      </p:sp>
-      <p:sp>
-        <p:nvSpPr>
-          <p:cNvPr id="40" name="Rectángulo: esquinas redondeadas 39">
-            <a:extLst>
-              <a:ext uri="{FF2B5EF4-FFF2-40B4-BE49-F238E27FC236}">
-                <a16:creationId xmlns:a16="http://schemas.microsoft.com/office/drawing/2014/main" id="{554B48CA-F605-55A2-1EF5-77444550B7F6}"/>
-              </a:ext>
-            </a:extLst>
-          </p:cNvPr>
-          <p:cNvSpPr/>
-          <p:nvPr/>
-        </p:nvSpPr>
-        <p:spPr>
-          <a:xfrm>
-            <a:off x="8364902" y="4997667"/>
-            <a:ext cx="1407114" cy="216977"/>
-          </a:xfrm>
-          <a:prstGeom prst="roundRect">
-            <a:avLst/>
-          </a:prstGeom>
-          <a:solidFill>
-            <a:schemeClr val="bg1"/>
-          </a:solidFill>
-          <a:ln>
-            <a:noFill/>
-          </a:ln>
-        </p:spPr>
-        <p:style>
-          <a:lnRef idx="2">
-            <a:schemeClr val="accent1">
-              <a:shade val="50000"/>
-            </a:schemeClr>
-          </a:lnRef>
-          <a:fillRef idx="1">
-            <a:schemeClr val="accent1"/>
-          </a:fillRef>
-          <a:effectRef idx="0">
-            <a:schemeClr val="accent1"/>
-          </a:effectRef>
-          <a:fontRef idx="minor">
-            <a:schemeClr val="lt1"/>
-          </a:fontRef>
-        </p:style>
-        <p:txBody>
-          <a:bodyPr rtlCol="0" anchor="ctr"/>
-          <a:lstStyle/>
-          <a:p>
-            <a:pPr algn="ctr"/>
-            <a:r>
-              <a:rPr lang="es-CO" sz="1600" dirty="0">
-                <a:solidFill>
-                  <a:schemeClr val="tx1"/>
-                </a:solidFill>
-              </a:rPr>
-              <a:t>Ética</a:t>
-            </a:r>
-          </a:p>
-        </p:txBody>
-      </p:sp>
-      <p:sp>
-        <p:nvSpPr>
-          <p:cNvPr id="41" name="Rectángulo: esquinas redondeadas 40">
-            <a:extLst>
-              <a:ext uri="{FF2B5EF4-FFF2-40B4-BE49-F238E27FC236}">
-                <a16:creationId xmlns:a16="http://schemas.microsoft.com/office/drawing/2014/main" id="{FB23FACC-0927-6527-8210-9E07CFE76CE3}"/>
-              </a:ext>
-            </a:extLst>
-          </p:cNvPr>
-          <p:cNvSpPr/>
-          <p:nvPr/>
-        </p:nvSpPr>
-        <p:spPr>
-          <a:xfrm>
-            <a:off x="8239911" y="5370306"/>
-            <a:ext cx="1407114" cy="216977"/>
-          </a:xfrm>
-          <a:prstGeom prst="roundRect">
-            <a:avLst/>
-          </a:prstGeom>
-          <a:solidFill>
-            <a:schemeClr val="bg1"/>
-          </a:solidFill>
-          <a:ln>
-            <a:noFill/>
-          </a:ln>
-        </p:spPr>
-        <p:style>
-          <a:lnRef idx="2">
-            <a:schemeClr val="accent1">
-              <a:shade val="50000"/>
-            </a:schemeClr>
-          </a:lnRef>
-          <a:fillRef idx="1">
-            <a:schemeClr val="accent1"/>
-          </a:fillRef>
-          <a:effectRef idx="0">
-            <a:schemeClr val="accent1"/>
-          </a:effectRef>
-          <a:fontRef idx="minor">
-            <a:schemeClr val="lt1"/>
-          </a:fontRef>
-        </p:style>
-        <p:txBody>
-          <a:bodyPr rtlCol="0" anchor="ctr"/>
-          <a:lstStyle/>
-          <a:p>
-            <a:pPr algn="ctr"/>
-            <a:r>
-              <a:rPr lang="es-CO" sz="1600" dirty="0">
-                <a:solidFill>
-                  <a:schemeClr val="tx1"/>
-                </a:solidFill>
-              </a:rPr>
-              <a:t>Concepto</a:t>
-            </a:r>
-          </a:p>
-        </p:txBody>
-      </p:sp>
-      <p:pic>
-        <p:nvPicPr>
-          <p:cNvPr id="43" name="Imagen 42">
-            <a:extLst>
-              <a:ext uri="{FF2B5EF4-FFF2-40B4-BE49-F238E27FC236}">
-                <a16:creationId xmlns:a16="http://schemas.microsoft.com/office/drawing/2014/main" id="{CFBF11B3-35EA-96C3-2C34-8CA8D1FE4098}"/>
-              </a:ext>
-            </a:extLst>
-          </p:cNvPr>
-          <p:cNvPicPr>
-            <a:picLocks noChangeAspect="1"/>
-          </p:cNvPicPr>
-          <p:nvPr/>
-        </p:nvPicPr>
-        <p:blipFill>
-          <a:blip r:embed="rId5"/>
-          <a:stretch>
-            <a:fillRect/>
-          </a:stretch>
-        </p:blipFill>
-        <p:spPr>
-          <a:xfrm>
-            <a:off x="9585033" y="4920926"/>
-            <a:ext cx="2250314" cy="1274618"/>
-          </a:xfrm>
-          <a:prstGeom prst="rect">
-            <a:avLst/>
-          </a:prstGeom>
-        </p:spPr>
-      </p:pic>
-      <p:sp>
-        <p:nvSpPr>
-          <p:cNvPr id="46" name="Rectángulo 45">
-            <a:extLst>
-              <a:ext uri="{FF2B5EF4-FFF2-40B4-BE49-F238E27FC236}">
-                <a16:creationId xmlns:a16="http://schemas.microsoft.com/office/drawing/2014/main" id="{E36FE3F4-9027-D2B2-0CA0-775BBDEE594D}"/>
-              </a:ext>
-            </a:extLst>
-          </p:cNvPr>
-          <p:cNvSpPr/>
-          <p:nvPr/>
-        </p:nvSpPr>
-        <p:spPr>
-          <a:xfrm>
-            <a:off x="9170815" y="6195544"/>
-            <a:ext cx="2250314" cy="133270"/>
-          </a:xfrm>
-          <a:prstGeom prst="rect">
-            <a:avLst/>
-          </a:prstGeom>
-          <a:solidFill>
-            <a:schemeClr val="bg1"/>
-          </a:solidFill>
-          <a:ln>
-            <a:noFill/>
-          </a:ln>
-        </p:spPr>
-        <p:style>
-          <a:lnRef idx="2">
-            <a:schemeClr val="accent1">
-              <a:shade val="50000"/>
-            </a:schemeClr>
-          </a:lnRef>
-          <a:fillRef idx="1">
-            <a:schemeClr val="accent1"/>
-          </a:fillRef>
-          <a:effectRef idx="0">
-            <a:schemeClr val="accent1"/>
-          </a:effectRef>
-          <a:fontRef idx="minor">
-            <a:schemeClr val="lt1"/>
-          </a:fontRef>
-        </p:style>
-        <p:txBody>
-          <a:bodyPr rtlCol="0" anchor="ctr"/>
-          <a:lstStyle/>
-          <a:p>
-            <a:pPr algn="ctr"/>
-            <a:endParaRPr lang="es-CO"/>
-          </a:p>
-        </p:txBody>
-      </p:sp>
-      <p:pic>
-        <p:nvPicPr>
-          <p:cNvPr id="45" name="Gráfico 44" descr="Lupa">
-            <a:extLst>
-              <a:ext uri="{FF2B5EF4-FFF2-40B4-BE49-F238E27FC236}">
-                <a16:creationId xmlns:a16="http://schemas.microsoft.com/office/drawing/2014/main" id="{F69B865E-9B16-5794-6A67-0567EA8D5C79}"/>
-              </a:ext>
-            </a:extLst>
-          </p:cNvPr>
-          <p:cNvPicPr>
-            <a:picLocks noChangeAspect="1"/>
-          </p:cNvPicPr>
-          <p:nvPr/>
-        </p:nvPicPr>
-        <p:blipFill>
-          <a:blip r:embed="rId6">
-            <a:extLst>
-              <a:ext uri="{28A0092B-C50C-407E-A947-70E740481C1C}">
-                <a14:useLocalDpi xmlns:a14="http://schemas.microsoft.com/office/drawing/2010/main" val="0"/>
-              </a:ext>
-              <a:ext uri="{96DAC541-7B7A-43D3-8B79-37D633B846F1}">
-                <asvg:svgBlip xmlns:asvg="http://schemas.microsoft.com/office/drawing/2016/SVG/main" r:embed="rId7"/>
-              </a:ext>
-            </a:extLst>
-          </a:blip>
-          <a:stretch>
-            <a:fillRect/>
-          </a:stretch>
-        </p:blipFill>
-        <p:spPr>
-          <a:xfrm rot="10800000">
-            <a:off x="7818335" y="2883760"/>
-            <a:ext cx="4735291" cy="4367636"/>
+            <a:off x="2606565" y="2842922"/>
+            <a:ext cx="5869339" cy="3416320"/>
           </a:xfrm>
           <a:prstGeom prst="rect">
             <a:avLst/>
@@ -5257,7 +4244,7 @@
     </p:spTree>
     <p:extLst>
       <p:ext uri="{BB962C8B-B14F-4D97-AF65-F5344CB8AC3E}">
-        <p14:creationId xmlns:p14="http://schemas.microsoft.com/office/powerpoint/2010/main" val="2222916504"/>
+        <p14:creationId xmlns:p14="http://schemas.microsoft.com/office/powerpoint/2010/main" val="2179421119"/>
       </p:ext>
     </p:extLst>
   </p:cSld>
@@ -5267,21 +4254,9 @@
 </p:sld>
 </file>
 
-<file path=ppt/slides/slide3.xml><?xml version="1.0" encoding="utf-8"?>
+<file path=ppt/slides/slide4.xml><?xml version="1.0" encoding="utf-8"?>
 <p:sld xmlns:a="http://schemas.openxmlformats.org/drawingml/2006/main" xmlns:r="http://schemas.openxmlformats.org/officeDocument/2006/relationships" xmlns:p="http://schemas.openxmlformats.org/presentationml/2006/main">
   <p:cSld>
-    <p:bg>
-      <p:bgPr>
-        <a:solidFill>
-          <a:schemeClr val="tx1">
-            <a:lumMod val="65000"/>
-            <a:lumOff val="35000"/>
-            <a:alpha val="84000"/>
-          </a:schemeClr>
-        </a:solidFill>
-        <a:effectLst/>
-      </p:bgPr>
-    </p:bg>
     <p:spTree>
       <p:nvGrpSpPr>
         <p:cNvPr id="1" name=""/>
@@ -5298,10 +4273,10 @@
       </p:grpSpPr>
       <p:pic>
         <p:nvPicPr>
-          <p:cNvPr id="16" name="Imagen 15">
-            <a:extLst>
-              <a:ext uri="{FF2B5EF4-FFF2-40B4-BE49-F238E27FC236}">
-                <a16:creationId xmlns:a16="http://schemas.microsoft.com/office/drawing/2014/main" id="{99184DDC-17B3-336F-0A3C-3250807BB2B1}"/>
+          <p:cNvPr id="3" name="logo">
+            <a:extLst>
+              <a:ext uri="{FF2B5EF4-FFF2-40B4-BE49-F238E27FC236}">
+                <a16:creationId xmlns:a16="http://schemas.microsoft.com/office/drawing/2014/main" id="{CB7069CB-A915-E9BA-0362-5B269561515F}"/>
               </a:ext>
             </a:extLst>
           </p:cNvPr>
@@ -5324,8 +4299,8 @@
         </p:blipFill>
         <p:spPr>
           <a:xfrm>
-            <a:off x="1683025" y="250873"/>
-            <a:ext cx="6096000" cy="6180498"/>
+            <a:off x="8765519" y="3350269"/>
+            <a:ext cx="3426481" cy="3473976"/>
           </a:xfrm>
           <a:prstGeom prst="rect">
             <a:avLst/>
@@ -5353,10 +4328,8 @@
             <a:avLst/>
           </a:prstGeom>
           <a:solidFill>
-            <a:schemeClr val="accent4">
-              <a:lumMod val="60000"/>
-              <a:lumOff val="40000"/>
-              <a:alpha val="44000"/>
+            <a:schemeClr val="tx1">
+              <a:alpha val="70000"/>
             </a:schemeClr>
           </a:solidFill>
           <a:ln>
@@ -5384,16 +4357,22 @@
           <a:lstStyle/>
           <a:p>
             <a:pPr algn="ctr"/>
-            <a:endParaRPr lang="es-CO"/>
-          </a:p>
-        </p:txBody>
-      </p:sp>
-      <p:sp>
-        <p:nvSpPr>
-          <p:cNvPr id="8" name="CuadroTexto 7">
-            <a:extLst>
-              <a:ext uri="{FF2B5EF4-FFF2-40B4-BE49-F238E27FC236}">
-                <a16:creationId xmlns:a16="http://schemas.microsoft.com/office/drawing/2014/main" id="{30609EE1-495E-A80D-AD8C-B0A890710151}"/>
+            <a:endParaRPr lang="es-CO">
+              <a:ln>
+                <a:solidFill>
+                  <a:schemeClr val="accent1"/>
+                </a:solidFill>
+              </a:ln>
+            </a:endParaRPr>
+          </a:p>
+        </p:txBody>
+      </p:sp>
+      <p:sp>
+        <p:nvSpPr>
+          <p:cNvPr id="2" name="CuadroTexto 1">
+            <a:extLst>
+              <a:ext uri="{FF2B5EF4-FFF2-40B4-BE49-F238E27FC236}">
+                <a16:creationId xmlns:a16="http://schemas.microsoft.com/office/drawing/2014/main" id="{4BE15536-8584-618A-A38B-56A2C9028692}"/>
               </a:ext>
             </a:extLst>
           </p:cNvPr>
@@ -5402,849 +4381,119 @@
         </p:nvSpPr>
         <p:spPr>
           <a:xfrm>
-            <a:off x="6096000" y="1169838"/>
-            <a:ext cx="5546469" cy="783193"/>
-          </a:xfrm>
-          <a:prstGeom prst="roundRect">
-            <a:avLst/>
-          </a:prstGeom>
-          <a:solidFill>
-            <a:schemeClr val="bg1"/>
-          </a:solidFill>
-        </p:spPr>
-        <p:style>
-          <a:lnRef idx="0">
-            <a:schemeClr val="accent3"/>
-          </a:lnRef>
-          <a:fillRef idx="3">
-            <a:schemeClr val="accent3"/>
-          </a:fillRef>
-          <a:effectRef idx="3">
-            <a:schemeClr val="accent3"/>
-          </a:effectRef>
-          <a:fontRef idx="minor">
-            <a:schemeClr val="lt1"/>
-          </a:fontRef>
-        </p:style>
-        <p:txBody>
-          <a:bodyPr wrap="square">
-            <a:spAutoFit/>
-          </a:bodyPr>
-          <a:lstStyle/>
-          <a:p>
-            <a:pPr algn="ctr"/>
-            <a:r>
-              <a:rPr lang="es-CO" sz="2000" b="1" dirty="0">
-                <a:solidFill>
-                  <a:schemeClr val="tx1"/>
-                </a:solidFill>
-              </a:rPr>
-              <a:t>Podrá ver los días transcurridos desde la última actuación creada por el estudiante. </a:t>
-            </a:r>
-          </a:p>
-        </p:txBody>
-      </p:sp>
-      <p:pic>
-        <p:nvPicPr>
-          <p:cNvPr id="3" name="Imagen 2">
-            <a:extLst>
-              <a:ext uri="{FF2B5EF4-FFF2-40B4-BE49-F238E27FC236}">
-                <a16:creationId xmlns:a16="http://schemas.microsoft.com/office/drawing/2014/main" id="{83840909-DCDF-03B8-9C35-02386765820C}"/>
-              </a:ext>
-            </a:extLst>
-          </p:cNvPr>
-          <p:cNvPicPr>
-            <a:picLocks noChangeAspect="1"/>
-          </p:cNvPicPr>
-          <p:nvPr/>
-        </p:nvPicPr>
-        <p:blipFill>
-          <a:blip r:embed="rId3"/>
-          <a:stretch>
-            <a:fillRect/>
-          </a:stretch>
-        </p:blipFill>
-        <p:spPr>
-          <a:xfrm>
-            <a:off x="1022979" y="2147959"/>
-            <a:ext cx="9485995" cy="798840"/>
+            <a:off x="318426" y="445008"/>
+            <a:ext cx="11268635" cy="6494085"/>
           </a:xfrm>
           <a:prstGeom prst="rect">
             <a:avLst/>
           </a:prstGeom>
+          <a:noFill/>
         </p:spPr>
-      </p:pic>
-      <p:pic>
-        <p:nvPicPr>
-          <p:cNvPr id="5" name="Imagen 4">
-            <a:extLst>
-              <a:ext uri="{FF2B5EF4-FFF2-40B4-BE49-F238E27FC236}">
-                <a16:creationId xmlns:a16="http://schemas.microsoft.com/office/drawing/2014/main" id="{4E1752E8-4D6C-4F5B-12EF-C298828F141A}"/>
-              </a:ext>
-            </a:extLst>
-          </p:cNvPr>
-          <p:cNvPicPr>
-            <a:picLocks noChangeAspect="1"/>
-          </p:cNvPicPr>
-          <p:nvPr/>
-        </p:nvPicPr>
-        <p:blipFill>
-          <a:blip r:embed="rId4"/>
-          <a:stretch>
-            <a:fillRect/>
-          </a:stretch>
-        </p:blipFill>
-        <p:spPr>
-          <a:xfrm>
-            <a:off x="1022979" y="2926487"/>
-            <a:ext cx="9485995" cy="2787357"/>
-          </a:xfrm>
-          <a:prstGeom prst="rect">
-            <a:avLst/>
-          </a:prstGeom>
-          <a:ln>
-            <a:noFill/>
-          </a:ln>
-          <a:effectLst>
-            <a:outerShdw blurRad="292100" dist="139700" dir="2700000" algn="tl" rotWithShape="0">
-              <a:srgbClr val="333333">
-                <a:alpha val="65000"/>
-              </a:srgbClr>
-            </a:outerShdw>
-          </a:effectLst>
-        </p:spPr>
-      </p:pic>
-      <p:sp>
-        <p:nvSpPr>
-          <p:cNvPr id="10" name="Rectángulo: esquinas redondeadas 9">
-            <a:extLst>
-              <a:ext uri="{FF2B5EF4-FFF2-40B4-BE49-F238E27FC236}">
-                <a16:creationId xmlns:a16="http://schemas.microsoft.com/office/drawing/2014/main" id="{AC16F70E-2437-B3CA-8043-2E596EF5E886}"/>
-              </a:ext>
-            </a:extLst>
-          </p:cNvPr>
-          <p:cNvSpPr/>
-          <p:nvPr/>
-        </p:nvSpPr>
-        <p:spPr>
-          <a:xfrm>
-            <a:off x="1074928" y="3531973"/>
-            <a:ext cx="7196120" cy="652280"/>
-          </a:xfrm>
-          <a:prstGeom prst="roundRect">
-            <a:avLst/>
-          </a:prstGeom>
-          <a:solidFill>
-            <a:schemeClr val="accent3">
-              <a:lumMod val="75000"/>
-            </a:schemeClr>
-          </a:solidFill>
-          <a:ln>
-            <a:noFill/>
-          </a:ln>
-        </p:spPr>
-        <p:style>
-          <a:lnRef idx="2">
-            <a:schemeClr val="accent1">
-              <a:shade val="50000"/>
-            </a:schemeClr>
-          </a:lnRef>
-          <a:fillRef idx="1">
-            <a:schemeClr val="accent1"/>
-          </a:fillRef>
-          <a:effectRef idx="0">
-            <a:schemeClr val="accent1"/>
-          </a:effectRef>
-          <a:fontRef idx="minor">
-            <a:schemeClr val="lt1"/>
-          </a:fontRef>
-        </p:style>
-        <p:txBody>
-          <a:bodyPr rtlCol="0" anchor="ctr"/>
-          <a:lstStyle/>
-          <a:p>
-            <a:pPr algn="ctr"/>
-            <a:endParaRPr lang="es-CO"/>
-          </a:p>
-        </p:txBody>
-      </p:sp>
-      <p:sp>
-        <p:nvSpPr>
-          <p:cNvPr id="11" name="Rectángulo: esquinas redondeadas 10">
-            <a:extLst>
-              <a:ext uri="{FF2B5EF4-FFF2-40B4-BE49-F238E27FC236}">
-                <a16:creationId xmlns:a16="http://schemas.microsoft.com/office/drawing/2014/main" id="{B5AB78E7-5551-B361-66CD-9721AC6FAF10}"/>
-              </a:ext>
-            </a:extLst>
-          </p:cNvPr>
-          <p:cNvSpPr/>
-          <p:nvPr/>
-        </p:nvSpPr>
-        <p:spPr>
-          <a:xfrm>
-            <a:off x="1074928" y="4304299"/>
-            <a:ext cx="7196120" cy="657108"/>
-          </a:xfrm>
-          <a:prstGeom prst="roundRect">
-            <a:avLst/>
-          </a:prstGeom>
-          <a:solidFill>
-            <a:schemeClr val="accent3">
-              <a:lumMod val="75000"/>
-            </a:schemeClr>
-          </a:solidFill>
-          <a:ln>
-            <a:noFill/>
-          </a:ln>
-        </p:spPr>
-        <p:style>
-          <a:lnRef idx="2">
-            <a:schemeClr val="accent1">
-              <a:shade val="50000"/>
-            </a:schemeClr>
-          </a:lnRef>
-          <a:fillRef idx="1">
-            <a:schemeClr val="accent1"/>
-          </a:fillRef>
-          <a:effectRef idx="0">
-            <a:schemeClr val="accent1"/>
-          </a:effectRef>
-          <a:fontRef idx="minor">
-            <a:schemeClr val="lt1"/>
-          </a:fontRef>
-        </p:style>
-        <p:txBody>
-          <a:bodyPr rtlCol="0" anchor="ctr"/>
-          <a:lstStyle/>
-          <a:p>
-            <a:pPr algn="ctr"/>
-            <a:endParaRPr lang="es-CO"/>
-          </a:p>
-        </p:txBody>
-      </p:sp>
-      <p:sp>
-        <p:nvSpPr>
-          <p:cNvPr id="12" name="Rectángulo: esquinas redondeadas 11">
-            <a:extLst>
-              <a:ext uri="{FF2B5EF4-FFF2-40B4-BE49-F238E27FC236}">
-                <a16:creationId xmlns:a16="http://schemas.microsoft.com/office/drawing/2014/main" id="{3C972495-2D07-12B4-0094-D390A65D78A9}"/>
-              </a:ext>
-            </a:extLst>
-          </p:cNvPr>
-          <p:cNvSpPr/>
-          <p:nvPr/>
-        </p:nvSpPr>
-        <p:spPr>
-          <a:xfrm>
-            <a:off x="1074928" y="5033922"/>
-            <a:ext cx="7196120" cy="657108"/>
-          </a:xfrm>
-          <a:prstGeom prst="roundRect">
-            <a:avLst/>
-          </a:prstGeom>
-          <a:solidFill>
-            <a:schemeClr val="accent3">
-              <a:lumMod val="75000"/>
-            </a:schemeClr>
-          </a:solidFill>
-          <a:ln>
-            <a:noFill/>
-          </a:ln>
-        </p:spPr>
-        <p:style>
-          <a:lnRef idx="2">
-            <a:schemeClr val="accent1">
-              <a:shade val="50000"/>
-            </a:schemeClr>
-          </a:lnRef>
-          <a:fillRef idx="1">
-            <a:schemeClr val="accent1"/>
-          </a:fillRef>
-          <a:effectRef idx="0">
-            <a:schemeClr val="accent1"/>
-          </a:effectRef>
-          <a:fontRef idx="minor">
-            <a:schemeClr val="lt1"/>
-          </a:fontRef>
-        </p:style>
-        <p:txBody>
-          <a:bodyPr rtlCol="0" anchor="ctr"/>
-          <a:lstStyle/>
-          <a:p>
-            <a:pPr algn="ctr"/>
-            <a:endParaRPr lang="es-CO"/>
-          </a:p>
-        </p:txBody>
-      </p:sp>
-      <p:sp>
-        <p:nvSpPr>
-          <p:cNvPr id="15" name="Rectángulo: esquinas redondeadas 14">
-            <a:extLst>
-              <a:ext uri="{FF2B5EF4-FFF2-40B4-BE49-F238E27FC236}">
-                <a16:creationId xmlns:a16="http://schemas.microsoft.com/office/drawing/2014/main" id="{2F24D87C-6A26-FBEF-E147-15FE22047AB3}"/>
-              </a:ext>
-            </a:extLst>
-          </p:cNvPr>
-          <p:cNvSpPr/>
-          <p:nvPr/>
-        </p:nvSpPr>
-        <p:spPr>
-          <a:xfrm>
-            <a:off x="9205734" y="3441806"/>
-            <a:ext cx="1201598" cy="383811"/>
-          </a:xfrm>
-          <a:prstGeom prst="roundRect">
-            <a:avLst/>
-          </a:prstGeom>
-          <a:solidFill>
-            <a:srgbClr val="EBEDEF"/>
-          </a:solidFill>
-          <a:ln>
-            <a:noFill/>
-          </a:ln>
-        </p:spPr>
-        <p:style>
-          <a:lnRef idx="2">
-            <a:schemeClr val="accent1">
-              <a:shade val="50000"/>
-            </a:schemeClr>
-          </a:lnRef>
-          <a:fillRef idx="1">
-            <a:schemeClr val="accent1"/>
-          </a:fillRef>
-          <a:effectRef idx="0">
-            <a:schemeClr val="accent1"/>
-          </a:effectRef>
-          <a:fontRef idx="minor">
-            <a:schemeClr val="lt1"/>
-          </a:fontRef>
-        </p:style>
-        <p:txBody>
-          <a:bodyPr rtlCol="0" anchor="ctr"/>
-          <a:lstStyle/>
-          <a:p>
-            <a:pPr algn="ctr"/>
-            <a:endParaRPr lang="es-CO" sz="1600" dirty="0"/>
-          </a:p>
-        </p:txBody>
-      </p:sp>
-      <p:sp>
-        <p:nvSpPr>
-          <p:cNvPr id="18" name="Rectángulo: esquinas redondeadas 17">
-            <a:extLst>
-              <a:ext uri="{FF2B5EF4-FFF2-40B4-BE49-F238E27FC236}">
-                <a16:creationId xmlns:a16="http://schemas.microsoft.com/office/drawing/2014/main" id="{9487ED99-1B46-CA27-09AF-BF8E2533B3E7}"/>
-              </a:ext>
-            </a:extLst>
-          </p:cNvPr>
-          <p:cNvSpPr/>
-          <p:nvPr/>
-        </p:nvSpPr>
-        <p:spPr>
-          <a:xfrm>
-            <a:off x="9193421" y="4466156"/>
-            <a:ext cx="1201598" cy="291065"/>
-          </a:xfrm>
-          <a:prstGeom prst="roundRect">
-            <a:avLst/>
-          </a:prstGeom>
-          <a:solidFill>
-            <a:schemeClr val="accent3">
-              <a:lumMod val="75000"/>
-            </a:schemeClr>
-          </a:solidFill>
-          <a:ln>
-            <a:noFill/>
-          </a:ln>
-        </p:spPr>
-        <p:style>
-          <a:lnRef idx="2">
-            <a:schemeClr val="accent1">
-              <a:shade val="50000"/>
-            </a:schemeClr>
-          </a:lnRef>
-          <a:fillRef idx="1">
-            <a:schemeClr val="accent1"/>
-          </a:fillRef>
-          <a:effectRef idx="0">
-            <a:schemeClr val="accent1"/>
-          </a:effectRef>
-          <a:fontRef idx="minor">
-            <a:schemeClr val="lt1"/>
-          </a:fontRef>
-        </p:style>
-        <p:txBody>
-          <a:bodyPr rtlCol="0" anchor="ctr"/>
-          <a:lstStyle/>
-          <a:p>
-            <a:pPr algn="ctr"/>
-            <a:r>
-              <a:rPr lang="es-CO" sz="1600" dirty="0"/>
-              <a:t>03-23-2023</a:t>
-            </a:r>
-          </a:p>
-        </p:txBody>
-      </p:sp>
-      <p:sp>
-        <p:nvSpPr>
-          <p:cNvPr id="26" name="Rectángulo: esquinas redondeadas 25">
-            <a:extLst>
-              <a:ext uri="{FF2B5EF4-FFF2-40B4-BE49-F238E27FC236}">
-                <a16:creationId xmlns:a16="http://schemas.microsoft.com/office/drawing/2014/main" id="{8252CFC8-2220-A7D2-CEAC-0AAFAC53BCB0}"/>
-              </a:ext>
-            </a:extLst>
-          </p:cNvPr>
-          <p:cNvSpPr/>
-          <p:nvPr/>
-        </p:nvSpPr>
-        <p:spPr>
-          <a:xfrm>
-            <a:off x="9205734" y="3680084"/>
-            <a:ext cx="1201598" cy="291065"/>
-          </a:xfrm>
-          <a:prstGeom prst="roundRect">
-            <a:avLst/>
-          </a:prstGeom>
-          <a:solidFill>
-            <a:schemeClr val="accent3">
-              <a:lumMod val="75000"/>
-            </a:schemeClr>
-          </a:solidFill>
-          <a:ln>
-            <a:noFill/>
-          </a:ln>
-        </p:spPr>
-        <p:style>
-          <a:lnRef idx="2">
-            <a:schemeClr val="accent1">
-              <a:shade val="50000"/>
-            </a:schemeClr>
-          </a:lnRef>
-          <a:fillRef idx="1">
-            <a:schemeClr val="accent1"/>
-          </a:fillRef>
-          <a:effectRef idx="0">
-            <a:schemeClr val="accent1"/>
-          </a:effectRef>
-          <a:fontRef idx="minor">
-            <a:schemeClr val="lt1"/>
-          </a:fontRef>
-        </p:style>
-        <p:txBody>
-          <a:bodyPr rtlCol="0" anchor="ctr"/>
-          <a:lstStyle/>
-          <a:p>
-            <a:pPr algn="ctr"/>
-            <a:r>
-              <a:rPr lang="es-CO" sz="1600" dirty="0"/>
-              <a:t>04-17-2023</a:t>
-            </a:r>
-          </a:p>
-        </p:txBody>
-      </p:sp>
-      <p:sp>
-        <p:nvSpPr>
-          <p:cNvPr id="27" name="Rectángulo: esquinas redondeadas 26">
-            <a:extLst>
-              <a:ext uri="{FF2B5EF4-FFF2-40B4-BE49-F238E27FC236}">
-                <a16:creationId xmlns:a16="http://schemas.microsoft.com/office/drawing/2014/main" id="{C1FED2DA-A074-28E7-DAE1-7F0D409464A9}"/>
-              </a:ext>
-            </a:extLst>
-          </p:cNvPr>
-          <p:cNvSpPr/>
-          <p:nvPr/>
-        </p:nvSpPr>
-        <p:spPr>
-          <a:xfrm>
-            <a:off x="9193421" y="5023058"/>
-            <a:ext cx="1201598" cy="383811"/>
-          </a:xfrm>
-          <a:prstGeom prst="roundRect">
-            <a:avLst/>
-          </a:prstGeom>
-          <a:solidFill>
-            <a:srgbClr val="EBEDEF"/>
-          </a:solidFill>
-          <a:ln>
-            <a:noFill/>
-          </a:ln>
-        </p:spPr>
-        <p:style>
-          <a:lnRef idx="2">
-            <a:schemeClr val="accent1">
-              <a:shade val="50000"/>
-            </a:schemeClr>
-          </a:lnRef>
-          <a:fillRef idx="1">
-            <a:schemeClr val="accent1"/>
-          </a:fillRef>
-          <a:effectRef idx="0">
-            <a:schemeClr val="accent1"/>
-          </a:effectRef>
-          <a:fontRef idx="minor">
-            <a:schemeClr val="lt1"/>
-          </a:fontRef>
-        </p:style>
-        <p:txBody>
-          <a:bodyPr rtlCol="0" anchor="ctr"/>
-          <a:lstStyle/>
-          <a:p>
-            <a:pPr algn="ctr"/>
-            <a:endParaRPr lang="es-CO" sz="1600" dirty="0"/>
-          </a:p>
-        </p:txBody>
-      </p:sp>
-      <p:sp>
-        <p:nvSpPr>
-          <p:cNvPr id="21" name="Rectángulo: esquinas redondeadas 20">
-            <a:extLst>
-              <a:ext uri="{FF2B5EF4-FFF2-40B4-BE49-F238E27FC236}">
-                <a16:creationId xmlns:a16="http://schemas.microsoft.com/office/drawing/2014/main" id="{285201FC-305B-4087-CCDC-F580729868EC}"/>
-              </a:ext>
-            </a:extLst>
-          </p:cNvPr>
-          <p:cNvSpPr/>
-          <p:nvPr/>
-        </p:nvSpPr>
-        <p:spPr>
-          <a:xfrm>
-            <a:off x="9193421" y="5156942"/>
-            <a:ext cx="1201598" cy="291065"/>
-          </a:xfrm>
-          <a:prstGeom prst="roundRect">
-            <a:avLst/>
-          </a:prstGeom>
-          <a:solidFill>
-            <a:schemeClr val="accent3">
-              <a:lumMod val="75000"/>
-            </a:schemeClr>
-          </a:solidFill>
-          <a:ln>
-            <a:noFill/>
-          </a:ln>
-        </p:spPr>
-        <p:style>
-          <a:lnRef idx="2">
-            <a:schemeClr val="accent1">
-              <a:shade val="50000"/>
-            </a:schemeClr>
-          </a:lnRef>
-          <a:fillRef idx="1">
-            <a:schemeClr val="accent1"/>
-          </a:fillRef>
-          <a:effectRef idx="0">
-            <a:schemeClr val="accent1"/>
-          </a:effectRef>
-          <a:fontRef idx="minor">
-            <a:schemeClr val="lt1"/>
-          </a:fontRef>
-        </p:style>
-        <p:txBody>
-          <a:bodyPr rtlCol="0" anchor="ctr"/>
-          <a:lstStyle/>
-          <a:p>
-            <a:pPr algn="ctr"/>
-            <a:r>
-              <a:rPr lang="es-CO" sz="1600" dirty="0"/>
-              <a:t>02-10-2023</a:t>
-            </a:r>
-          </a:p>
-        </p:txBody>
-      </p:sp>
-      <p:sp>
-        <p:nvSpPr>
-          <p:cNvPr id="29" name="CuadroTexto 28">
-            <a:extLst>
-              <a:ext uri="{FF2B5EF4-FFF2-40B4-BE49-F238E27FC236}">
-                <a16:creationId xmlns:a16="http://schemas.microsoft.com/office/drawing/2014/main" id="{8B5581A8-D719-F51F-DD77-C5700C670B11}"/>
-              </a:ext>
-            </a:extLst>
-          </p:cNvPr>
-          <p:cNvSpPr txBox="1"/>
-          <p:nvPr/>
-        </p:nvSpPr>
-        <p:spPr>
-          <a:xfrm>
-            <a:off x="4846220" y="2274584"/>
-            <a:ext cx="5010703" cy="369332"/>
-          </a:xfrm>
-          <a:prstGeom prst="rect">
-            <a:avLst/>
-          </a:prstGeom>
-          <a:ln>
-            <a:noFill/>
-          </a:ln>
-        </p:spPr>
-        <p:style>
-          <a:lnRef idx="2">
-            <a:schemeClr val="accent1"/>
-          </a:lnRef>
-          <a:fillRef idx="1">
-            <a:schemeClr val="lt1"/>
-          </a:fillRef>
-          <a:effectRef idx="0">
-            <a:schemeClr val="accent1"/>
-          </a:effectRef>
-          <a:fontRef idx="minor">
-            <a:schemeClr val="dk1"/>
-          </a:fontRef>
-        </p:style>
-        <p:txBody>
-          <a:bodyPr wrap="square">
+        <p:txBody>
+          <a:bodyPr wrap="square" rtlCol="0">
             <a:spAutoFit/>
           </a:bodyPr>
           <a:lstStyle/>
           <a:p>
-            <a:r>
-              <a:rPr lang="es-MX" b="1" i="0" dirty="0">
+            <a:pPr algn="just"/>
+            <a:endParaRPr lang="es-MX" sz="3600" dirty="0">
+              <a:solidFill>
+                <a:schemeClr val="bg1"/>
+              </a:solidFill>
+            </a:endParaRPr>
+          </a:p>
+          <a:p>
+            <a:pPr algn="just"/>
+            <a:endParaRPr lang="es-MX" sz="3600" dirty="0">
+              <a:solidFill>
+                <a:schemeClr val="bg1"/>
+              </a:solidFill>
+            </a:endParaRPr>
+          </a:p>
+          <a:p>
+            <a:pPr algn="just"/>
+            <a:r>
+              <a:rPr lang="es-MX" sz="3600" dirty="0">
                 <a:solidFill>
-                  <a:srgbClr val="333333"/>
-                </a:solidFill>
-                <a:effectLst/>
-                <a:latin typeface="Source Sans Pro" panose="020B0503030403020204" pitchFamily="34" charset="0"/>
-              </a:rPr>
-              <a:t>Días transcurridos desde última actuación:</a:t>
-            </a:r>
-            <a:endParaRPr lang="es-CO" dirty="0"/>
-          </a:p>
-        </p:txBody>
-      </p:sp>
-      <p:sp>
-        <p:nvSpPr>
-          <p:cNvPr id="30" name="Elipse 29">
-            <a:extLst>
-              <a:ext uri="{FF2B5EF4-FFF2-40B4-BE49-F238E27FC236}">
-                <a16:creationId xmlns:a16="http://schemas.microsoft.com/office/drawing/2014/main" id="{D2A5A662-C261-2511-8656-3FB082E7E961}"/>
-              </a:ext>
-            </a:extLst>
-          </p:cNvPr>
-          <p:cNvSpPr/>
-          <p:nvPr/>
-        </p:nvSpPr>
-        <p:spPr>
-          <a:xfrm>
-            <a:off x="9670442" y="2189795"/>
-            <a:ext cx="606672" cy="538846"/>
-          </a:xfrm>
-          <a:prstGeom prst="ellipse">
-            <a:avLst/>
-          </a:prstGeom>
-          <a:solidFill>
-            <a:srgbClr val="00B050"/>
-          </a:solidFill>
-          <a:ln>
-            <a:noFill/>
-          </a:ln>
-        </p:spPr>
-        <p:style>
-          <a:lnRef idx="2">
-            <a:schemeClr val="accent1">
-              <a:shade val="50000"/>
-            </a:schemeClr>
-          </a:lnRef>
-          <a:fillRef idx="1">
-            <a:schemeClr val="accent1"/>
-          </a:fillRef>
-          <a:effectRef idx="0">
-            <a:schemeClr val="accent1"/>
-          </a:effectRef>
-          <a:fontRef idx="minor">
-            <a:schemeClr val="lt1"/>
-          </a:fontRef>
-        </p:style>
-        <p:txBody>
-          <a:bodyPr rtlCol="0" anchor="ctr"/>
-          <a:lstStyle/>
-          <a:p>
-            <a:pPr algn="ctr"/>
-            <a:r>
-              <a:rPr lang="es-CO" dirty="0"/>
-              <a:t>10</a:t>
-            </a:r>
-          </a:p>
-        </p:txBody>
-      </p:sp>
-      <p:sp>
-        <p:nvSpPr>
-          <p:cNvPr id="32" name="Rectángulo: esquinas redondeadas 31">
-            <a:extLst>
-              <a:ext uri="{FF2B5EF4-FFF2-40B4-BE49-F238E27FC236}">
-                <a16:creationId xmlns:a16="http://schemas.microsoft.com/office/drawing/2014/main" id="{513749D9-0B4B-B894-3707-4AC058864561}"/>
-              </a:ext>
-            </a:extLst>
-          </p:cNvPr>
-          <p:cNvSpPr/>
-          <p:nvPr/>
-        </p:nvSpPr>
-        <p:spPr>
-          <a:xfrm>
-            <a:off x="1025048" y="3490930"/>
-            <a:ext cx="7246000" cy="705974"/>
-          </a:xfrm>
-          <a:prstGeom prst="roundRect">
-            <a:avLst/>
-          </a:prstGeom>
-          <a:solidFill>
-            <a:schemeClr val="bg1"/>
-          </a:solidFill>
-          <a:ln>
-            <a:noFill/>
-          </a:ln>
-        </p:spPr>
-        <p:style>
-          <a:lnRef idx="2">
-            <a:schemeClr val="accent1">
-              <a:shade val="50000"/>
-            </a:schemeClr>
-          </a:lnRef>
-          <a:fillRef idx="1">
-            <a:schemeClr val="accent1"/>
-          </a:fillRef>
-          <a:effectRef idx="0">
-            <a:schemeClr val="accent1"/>
-          </a:effectRef>
-          <a:fontRef idx="minor">
-            <a:schemeClr val="lt1"/>
-          </a:fontRef>
-        </p:style>
-        <p:txBody>
-          <a:bodyPr rtlCol="0" anchor="ctr"/>
-          <a:lstStyle/>
-          <a:p>
-            <a:pPr algn="ctr"/>
-            <a:r>
-              <a:rPr lang="es-CO" dirty="0">
-                <a:solidFill>
-                  <a:schemeClr val="tx1"/>
+                  <a:schemeClr val="bg1"/>
                 </a:solidFill>
               </a:rPr>
-              <a:t>ACTUACIÓN 3</a:t>
-            </a:r>
-          </a:p>
-        </p:txBody>
-      </p:sp>
-      <p:sp>
-        <p:nvSpPr>
-          <p:cNvPr id="33" name="Rectángulo: esquinas redondeadas 32">
-            <a:extLst>
-              <a:ext uri="{FF2B5EF4-FFF2-40B4-BE49-F238E27FC236}">
-                <a16:creationId xmlns:a16="http://schemas.microsoft.com/office/drawing/2014/main" id="{389482CE-73CB-8013-C11F-5F003538D1C2}"/>
-              </a:ext>
-            </a:extLst>
-          </p:cNvPr>
-          <p:cNvSpPr/>
-          <p:nvPr/>
-        </p:nvSpPr>
-        <p:spPr>
-          <a:xfrm>
-            <a:off x="1025048" y="4263256"/>
-            <a:ext cx="7246000" cy="711200"/>
-          </a:xfrm>
-          <a:prstGeom prst="roundRect">
-            <a:avLst/>
-          </a:prstGeom>
-          <a:solidFill>
-            <a:schemeClr val="bg1"/>
-          </a:solidFill>
-          <a:ln>
-            <a:noFill/>
-          </a:ln>
-        </p:spPr>
-        <p:style>
-          <a:lnRef idx="2">
-            <a:schemeClr val="accent1">
-              <a:shade val="50000"/>
-            </a:schemeClr>
-          </a:lnRef>
-          <a:fillRef idx="1">
-            <a:schemeClr val="accent1"/>
-          </a:fillRef>
-          <a:effectRef idx="0">
-            <a:schemeClr val="accent1"/>
-          </a:effectRef>
-          <a:fontRef idx="minor">
-            <a:schemeClr val="lt1"/>
-          </a:fontRef>
-        </p:style>
-        <p:txBody>
-          <a:bodyPr rtlCol="0" anchor="ctr"/>
-          <a:lstStyle/>
-          <a:p>
-            <a:pPr algn="ctr"/>
-            <a:r>
-              <a:rPr lang="es-CO" dirty="0">
+              <a:t>El expediente cambiará su estado a Pausado hasta el día de la fecha seleccionada en el paso anterior. Tenga en cuenta que esta funcionalidad solo pausará el tiempo de validación de los treinta días, que se aplica en las actuaciones,</a:t>
+            </a:r>
+          </a:p>
+          <a:p>
+            <a:pPr algn="just"/>
+            <a:r>
+              <a:rPr lang="es-MX" sz="3600" dirty="0">
                 <a:solidFill>
-                  <a:schemeClr val="tx1"/>
+                  <a:schemeClr val="bg1"/>
                 </a:solidFill>
               </a:rPr>
-              <a:t>ACTUACIÓN 2</a:t>
-            </a:r>
-          </a:p>
-        </p:txBody>
-      </p:sp>
-      <p:sp>
-        <p:nvSpPr>
-          <p:cNvPr id="34" name="Rectángulo: esquinas redondeadas 33">
-            <a:extLst>
-              <a:ext uri="{FF2B5EF4-FFF2-40B4-BE49-F238E27FC236}">
-                <a16:creationId xmlns:a16="http://schemas.microsoft.com/office/drawing/2014/main" id="{79D3B8AD-AD15-8F00-2CB3-90680F291803}"/>
-              </a:ext>
-            </a:extLst>
-          </p:cNvPr>
-          <p:cNvSpPr/>
-          <p:nvPr/>
-        </p:nvSpPr>
-        <p:spPr>
-          <a:xfrm>
-            <a:off x="1025048" y="5023875"/>
-            <a:ext cx="7246000" cy="711200"/>
-          </a:xfrm>
-          <a:prstGeom prst="roundRect">
-            <a:avLst/>
-          </a:prstGeom>
-          <a:solidFill>
-            <a:schemeClr val="bg1"/>
-          </a:solidFill>
-          <a:ln>
-            <a:noFill/>
-          </a:ln>
-        </p:spPr>
-        <p:style>
-          <a:lnRef idx="2">
-            <a:schemeClr val="accent1">
-              <a:shade val="50000"/>
-            </a:schemeClr>
-          </a:lnRef>
-          <a:fillRef idx="1">
-            <a:schemeClr val="accent1"/>
-          </a:fillRef>
-          <a:effectRef idx="0">
-            <a:schemeClr val="accent1"/>
-          </a:effectRef>
-          <a:fontRef idx="minor">
-            <a:schemeClr val="lt1"/>
-          </a:fontRef>
-        </p:style>
-        <p:txBody>
-          <a:bodyPr rtlCol="0" anchor="ctr"/>
-          <a:lstStyle/>
-          <a:p>
-            <a:pPr algn="ctr"/>
-            <a:r>
-              <a:rPr lang="es-CO" dirty="0">
+              <a:t>a partir de la fecha de activación.</a:t>
+            </a:r>
+          </a:p>
+          <a:p>
+            <a:pPr algn="just"/>
+            <a:endParaRPr lang="es-MX" sz="3600" dirty="0">
+              <a:solidFill>
+                <a:schemeClr val="bg1"/>
+              </a:solidFill>
+            </a:endParaRPr>
+          </a:p>
+          <a:p>
+            <a:pPr algn="just"/>
+            <a:endParaRPr lang="es-MX" sz="3600" dirty="0">
+              <a:solidFill>
+                <a:schemeClr val="bg1"/>
+              </a:solidFill>
+            </a:endParaRPr>
+          </a:p>
+          <a:p>
+            <a:pPr algn="just"/>
+            <a:endParaRPr lang="es-MX" sz="3600" dirty="0">
+              <a:solidFill>
+                <a:schemeClr val="bg1"/>
+              </a:solidFill>
+            </a:endParaRPr>
+          </a:p>
+          <a:p>
+            <a:pPr algn="just"/>
+            <a:endParaRPr lang="es-MX" sz="3600" dirty="0">
+              <a:solidFill>
+                <a:schemeClr val="bg1"/>
+              </a:solidFill>
+            </a:endParaRPr>
+          </a:p>
+          <a:p>
+            <a:pPr algn="just"/>
+            <a:r>
+              <a:rPr lang="es-MX" sz="2000" dirty="0" err="1">
                 <a:solidFill>
-                  <a:schemeClr val="tx1"/>
+                  <a:schemeClr val="bg1"/>
                 </a:solidFill>
               </a:rPr>
-              <a:t>ACTUACIÓN 1</a:t>
-            </a:r>
+              <a:t>Amatai</a:t>
+            </a:r>
+            <a:r>
+              <a:rPr lang="es-MX" sz="2000" dirty="0">
+                <a:solidFill>
+                  <a:schemeClr val="bg1"/>
+                </a:solidFill>
+              </a:rPr>
+              <a:t> SAS</a:t>
+            </a:r>
+            <a:endParaRPr lang="es-CO" sz="3600" dirty="0">
+              <a:solidFill>
+                <a:schemeClr val="bg1"/>
+              </a:solidFill>
+            </a:endParaRPr>
           </a:p>
         </p:txBody>
       </p:sp>
     </p:spTree>
     <p:extLst>
       <p:ext uri="{BB962C8B-B14F-4D97-AF65-F5344CB8AC3E}">
-        <p14:creationId xmlns:p14="http://schemas.microsoft.com/office/powerpoint/2010/main" val="2000749095"/>
+        <p14:creationId xmlns:p14="http://schemas.microsoft.com/office/powerpoint/2010/main" val="2854815078"/>
       </p:ext>
     </p:extLst>
   </p:cSld>

--- a/public/dist/img/update/Presentación1.pptx
+++ b/public/dist/img/update/Presentación1.pptx
@@ -6,16 +6,19 @@
   </p:sldMasterIdLst>
   <p:sldIdLst>
     <p:sldId id="260" r:id="rId2"/>
-    <p:sldId id="269" r:id="rId3"/>
-    <p:sldId id="266" r:id="rId4"/>
-    <p:sldId id="271" r:id="rId5"/>
-    <p:sldId id="270" r:id="rId6"/>
-    <p:sldId id="267" r:id="rId7"/>
-    <p:sldId id="262" r:id="rId8"/>
-    <p:sldId id="268" r:id="rId9"/>
-    <p:sldId id="265" r:id="rId10"/>
-    <p:sldId id="263" r:id="rId11"/>
-    <p:sldId id="264" r:id="rId12"/>
+    <p:sldId id="273" r:id="rId3"/>
+    <p:sldId id="272" r:id="rId4"/>
+    <p:sldId id="269" r:id="rId5"/>
+    <p:sldId id="266" r:id="rId6"/>
+    <p:sldId id="271" r:id="rId7"/>
+    <p:sldId id="275" r:id="rId8"/>
+    <p:sldId id="270" r:id="rId9"/>
+    <p:sldId id="267" r:id="rId10"/>
+    <p:sldId id="262" r:id="rId11"/>
+    <p:sldId id="268" r:id="rId12"/>
+    <p:sldId id="265" r:id="rId13"/>
+    <p:sldId id="263" r:id="rId14"/>
+    <p:sldId id="264" r:id="rId15"/>
   </p:sldIdLst>
   <p:sldSz cx="12192000" cy="6858000"/>
   <p:notesSz cx="6858000" cy="9144000"/>
@@ -271,7 +274,7 @@
           <a:p>
             <a:fld id="{F7EB7AD6-F7F4-4A3B-9140-B8481AFC5E85}" type="datetimeFigureOut">
               <a:rPr lang="es-CO" smtClean="0"/>
-              <a:t>26/01/2024</a:t>
+              <a:t>28/04/2024</a:t>
             </a:fld>
             <a:endParaRPr lang="es-CO"/>
           </a:p>
@@ -471,7 +474,7 @@
           <a:p>
             <a:fld id="{F7EB7AD6-F7F4-4A3B-9140-B8481AFC5E85}" type="datetimeFigureOut">
               <a:rPr lang="es-CO" smtClean="0"/>
-              <a:t>26/01/2024</a:t>
+              <a:t>28/04/2024</a:t>
             </a:fld>
             <a:endParaRPr lang="es-CO"/>
           </a:p>
@@ -681,7 +684,7 @@
           <a:p>
             <a:fld id="{F7EB7AD6-F7F4-4A3B-9140-B8481AFC5E85}" type="datetimeFigureOut">
               <a:rPr lang="es-CO" smtClean="0"/>
-              <a:t>26/01/2024</a:t>
+              <a:t>28/04/2024</a:t>
             </a:fld>
             <a:endParaRPr lang="es-CO"/>
           </a:p>
@@ -881,7 +884,7 @@
           <a:p>
             <a:fld id="{F7EB7AD6-F7F4-4A3B-9140-B8481AFC5E85}" type="datetimeFigureOut">
               <a:rPr lang="es-CO" smtClean="0"/>
-              <a:t>26/01/2024</a:t>
+              <a:t>28/04/2024</a:t>
             </a:fld>
             <a:endParaRPr lang="es-CO"/>
           </a:p>
@@ -1157,7 +1160,7 @@
           <a:p>
             <a:fld id="{F7EB7AD6-F7F4-4A3B-9140-B8481AFC5E85}" type="datetimeFigureOut">
               <a:rPr lang="es-CO" smtClean="0"/>
-              <a:t>26/01/2024</a:t>
+              <a:t>28/04/2024</a:t>
             </a:fld>
             <a:endParaRPr lang="es-CO"/>
           </a:p>
@@ -1425,7 +1428,7 @@
           <a:p>
             <a:fld id="{F7EB7AD6-F7F4-4A3B-9140-B8481AFC5E85}" type="datetimeFigureOut">
               <a:rPr lang="es-CO" smtClean="0"/>
-              <a:t>26/01/2024</a:t>
+              <a:t>28/04/2024</a:t>
             </a:fld>
             <a:endParaRPr lang="es-CO"/>
           </a:p>
@@ -1840,7 +1843,7 @@
           <a:p>
             <a:fld id="{F7EB7AD6-F7F4-4A3B-9140-B8481AFC5E85}" type="datetimeFigureOut">
               <a:rPr lang="es-CO" smtClean="0"/>
-              <a:t>26/01/2024</a:t>
+              <a:t>28/04/2024</a:t>
             </a:fld>
             <a:endParaRPr lang="es-CO"/>
           </a:p>
@@ -1982,7 +1985,7 @@
           <a:p>
             <a:fld id="{F7EB7AD6-F7F4-4A3B-9140-B8481AFC5E85}" type="datetimeFigureOut">
               <a:rPr lang="es-CO" smtClean="0"/>
-              <a:t>26/01/2024</a:t>
+              <a:t>28/04/2024</a:t>
             </a:fld>
             <a:endParaRPr lang="es-CO"/>
           </a:p>
@@ -2095,7 +2098,7 @@
           <a:p>
             <a:fld id="{F7EB7AD6-F7F4-4A3B-9140-B8481AFC5E85}" type="datetimeFigureOut">
               <a:rPr lang="es-CO" smtClean="0"/>
-              <a:t>26/01/2024</a:t>
+              <a:t>28/04/2024</a:t>
             </a:fld>
             <a:endParaRPr lang="es-CO"/>
           </a:p>
@@ -2408,7 +2411,7 @@
           <a:p>
             <a:fld id="{F7EB7AD6-F7F4-4A3B-9140-B8481AFC5E85}" type="datetimeFigureOut">
               <a:rPr lang="es-CO" smtClean="0"/>
-              <a:t>26/01/2024</a:t>
+              <a:t>28/04/2024</a:t>
             </a:fld>
             <a:endParaRPr lang="es-CO"/>
           </a:p>
@@ -2697,7 +2700,7 @@
           <a:p>
             <a:fld id="{F7EB7AD6-F7F4-4A3B-9140-B8481AFC5E85}" type="datetimeFigureOut">
               <a:rPr lang="es-CO" smtClean="0"/>
-              <a:t>26/01/2024</a:t>
+              <a:t>28/04/2024</a:t>
             </a:fld>
             <a:endParaRPr lang="es-CO"/>
           </a:p>
@@ -2940,7 +2943,7 @@
           <a:p>
             <a:fld id="{F7EB7AD6-F7F4-4A3B-9140-B8481AFC5E85}" type="datetimeFigureOut">
               <a:rPr lang="es-CO" smtClean="0"/>
-              <a:t>26/01/2024</a:t>
+              <a:t>28/04/2024</a:t>
             </a:fld>
             <a:endParaRPr lang="es-CO"/>
           </a:p>
@@ -3036,6 +3039,78 @@
           </a:p>
         </p:txBody>
       </p:sp>
+      <p:pic>
+        <p:nvPicPr>
+          <p:cNvPr id="8" name="Imagen 7">
+            <a:extLst>
+              <a:ext uri="{FF2B5EF4-FFF2-40B4-BE49-F238E27FC236}">
+                <a16:creationId xmlns:a16="http://schemas.microsoft.com/office/drawing/2014/main" id="{A3AB5A69-08DC-0FCD-3B67-4B908C1EEBAB}"/>
+              </a:ext>
+            </a:extLst>
+          </p:cNvPr>
+          <p:cNvPicPr>
+            <a:picLocks noChangeAspect="1"/>
+          </p:cNvPicPr>
+          <p:nvPr userDrawn="1"/>
+        </p:nvPicPr>
+        <p:blipFill>
+          <a:blip r:embed="rId13">
+            <a:extLst>
+              <a:ext uri="{28A0092B-C50C-407E-A947-70E740481C1C}">
+                <a14:useLocalDpi xmlns:a14="http://schemas.microsoft.com/office/drawing/2010/main" val="0"/>
+              </a:ext>
+            </a:extLst>
+          </a:blip>
+          <a:stretch>
+            <a:fillRect/>
+          </a:stretch>
+        </p:blipFill>
+        <p:spPr>
+          <a:xfrm>
+            <a:off x="84580" y="84137"/>
+            <a:ext cx="540000" cy="607220"/>
+          </a:xfrm>
+          <a:prstGeom prst="rect">
+            <a:avLst/>
+          </a:prstGeom>
+        </p:spPr>
+      </p:pic>
+      <p:pic>
+        <p:nvPicPr>
+          <p:cNvPr id="9" name="Imagen 8">
+            <a:extLst>
+              <a:ext uri="{FF2B5EF4-FFF2-40B4-BE49-F238E27FC236}">
+                <a16:creationId xmlns:a16="http://schemas.microsoft.com/office/drawing/2014/main" id="{2D7D48E2-CEFF-1B62-7532-786A325AC742}"/>
+              </a:ext>
+            </a:extLst>
+          </p:cNvPr>
+          <p:cNvPicPr>
+            <a:picLocks noChangeAspect="1"/>
+          </p:cNvPicPr>
+          <p:nvPr userDrawn="1"/>
+        </p:nvPicPr>
+        <p:blipFill>
+          <a:blip r:embed="rId14">
+            <a:extLst>
+              <a:ext uri="{28A0092B-C50C-407E-A947-70E740481C1C}">
+                <a14:useLocalDpi xmlns:a14="http://schemas.microsoft.com/office/drawing/2010/main" val="0"/>
+              </a:ext>
+            </a:extLst>
+          </a:blip>
+          <a:stretch>
+            <a:fillRect/>
+          </a:stretch>
+        </p:blipFill>
+        <p:spPr>
+          <a:xfrm>
+            <a:off x="11587731" y="6176963"/>
+            <a:ext cx="591818" cy="600893"/>
+          </a:xfrm>
+          <a:prstGeom prst="rect">
+            <a:avLst/>
+          </a:prstGeom>
+        </p:spPr>
+      </p:pic>
     </p:spTree>
     <p:extLst>
       <p:ext uri="{BB962C8B-B14F-4D97-AF65-F5344CB8AC3E}">
@@ -3509,7 +3584,7 @@
                   </a:schemeClr>
                 </a:solidFill>
               </a:rPr>
-              <a:t>Dar de baja </a:t>
+              <a:t>EVALUAR </a:t>
             </a:r>
             <a:r>
               <a:rPr lang="es-MX" sz="3600" dirty="0">
@@ -3783,6 +3858,886 @@
         <p:spPr>
           <a:xfrm>
             <a:off x="318426" y="445008"/>
+            <a:ext cx="11268635" cy="7048083"/>
+          </a:xfrm>
+          <a:prstGeom prst="rect">
+            <a:avLst/>
+          </a:prstGeom>
+          <a:noFill/>
+        </p:spPr>
+        <p:txBody>
+          <a:bodyPr wrap="square" rtlCol="0">
+            <a:spAutoFit/>
+          </a:bodyPr>
+          <a:lstStyle/>
+          <a:p>
+            <a:pPr algn="ctr"/>
+            <a:endParaRPr lang="es-MX" sz="3600" dirty="0">
+              <a:solidFill>
+                <a:schemeClr val="bg1"/>
+              </a:solidFill>
+            </a:endParaRPr>
+          </a:p>
+          <a:p>
+            <a:pPr algn="ctr"/>
+            <a:r>
+              <a:rPr lang="es-MX" sz="3600" dirty="0">
+                <a:solidFill>
+                  <a:schemeClr val="bg1"/>
+                </a:solidFill>
+              </a:rPr>
+              <a:t>Para poner en </a:t>
+            </a:r>
+            <a:r>
+              <a:rPr lang="es-MX" sz="3600" b="1" dirty="0">
+                <a:solidFill>
+                  <a:schemeClr val="accent4">
+                    <a:lumMod val="60000"/>
+                    <a:lumOff val="40000"/>
+                  </a:schemeClr>
+                </a:solidFill>
+              </a:rPr>
+              <a:t>Revisión</a:t>
+            </a:r>
+            <a:r>
+              <a:rPr lang="es-MX" sz="3600" dirty="0">
+                <a:solidFill>
+                  <a:schemeClr val="bg1"/>
+                </a:solidFill>
+              </a:rPr>
+              <a:t> en cierre de caso de clic en el botón </a:t>
+            </a:r>
+            <a:r>
+              <a:rPr lang="es-MX" sz="3600" b="1" i="1" dirty="0">
+                <a:solidFill>
+                  <a:schemeClr val="bg1"/>
+                </a:solidFill>
+              </a:rPr>
+              <a:t>Pasar a </a:t>
+            </a:r>
+            <a:r>
+              <a:rPr lang="es-MX" sz="3600" b="1" i="1" dirty="0" err="1">
+                <a:solidFill>
+                  <a:schemeClr val="bg1"/>
+                </a:solidFill>
+              </a:rPr>
+              <a:t>revisón</a:t>
+            </a:r>
+            <a:endParaRPr lang="es-MX" sz="3600" b="1" i="1" dirty="0">
+              <a:solidFill>
+                <a:schemeClr val="bg1"/>
+              </a:solidFill>
+            </a:endParaRPr>
+          </a:p>
+          <a:p>
+            <a:pPr algn="ctr"/>
+            <a:endParaRPr lang="es-MX" sz="3600" dirty="0">
+              <a:solidFill>
+                <a:schemeClr val="bg1"/>
+              </a:solidFill>
+            </a:endParaRPr>
+          </a:p>
+          <a:p>
+            <a:pPr algn="ctr"/>
+            <a:endParaRPr lang="es-MX" sz="3600" dirty="0">
+              <a:solidFill>
+                <a:schemeClr val="bg1"/>
+              </a:solidFill>
+            </a:endParaRPr>
+          </a:p>
+          <a:p>
+            <a:pPr algn="ctr"/>
+            <a:endParaRPr lang="es-MX" sz="3600" dirty="0">
+              <a:solidFill>
+                <a:schemeClr val="bg1"/>
+              </a:solidFill>
+            </a:endParaRPr>
+          </a:p>
+          <a:p>
+            <a:pPr algn="ctr"/>
+            <a:endParaRPr lang="es-MX" sz="3600" dirty="0">
+              <a:solidFill>
+                <a:schemeClr val="bg1"/>
+              </a:solidFill>
+            </a:endParaRPr>
+          </a:p>
+          <a:p>
+            <a:pPr algn="ctr"/>
+            <a:endParaRPr lang="es-MX" sz="3600" dirty="0">
+              <a:solidFill>
+                <a:schemeClr val="bg1"/>
+              </a:solidFill>
+            </a:endParaRPr>
+          </a:p>
+          <a:p>
+            <a:pPr algn="ctr"/>
+            <a:endParaRPr lang="es-MX" sz="3600" dirty="0">
+              <a:solidFill>
+                <a:schemeClr val="bg1"/>
+              </a:solidFill>
+            </a:endParaRPr>
+          </a:p>
+          <a:p>
+            <a:pPr algn="ctr"/>
+            <a:endParaRPr lang="es-MX" sz="3600" dirty="0">
+              <a:solidFill>
+                <a:schemeClr val="bg1"/>
+              </a:solidFill>
+            </a:endParaRPr>
+          </a:p>
+          <a:p>
+            <a:pPr algn="ctr"/>
+            <a:endParaRPr lang="es-MX" sz="3600" dirty="0">
+              <a:solidFill>
+                <a:schemeClr val="bg1"/>
+              </a:solidFill>
+            </a:endParaRPr>
+          </a:p>
+          <a:p>
+            <a:pPr algn="ctr"/>
+            <a:endParaRPr lang="es-MX" sz="3600" dirty="0">
+              <a:solidFill>
+                <a:schemeClr val="bg1"/>
+              </a:solidFill>
+            </a:endParaRPr>
+          </a:p>
+          <a:p>
+            <a:r>
+              <a:rPr lang="es-CO" sz="2000" dirty="0" err="1">
+                <a:solidFill>
+                  <a:schemeClr val="bg1"/>
+                </a:solidFill>
+              </a:rPr>
+              <a:t>Amatai</a:t>
+            </a:r>
+            <a:r>
+              <a:rPr lang="es-CO" sz="2000" dirty="0">
+                <a:solidFill>
+                  <a:schemeClr val="bg1"/>
+                </a:solidFill>
+              </a:rPr>
+              <a:t> SAS</a:t>
+            </a:r>
+          </a:p>
+        </p:txBody>
+      </p:sp>
+      <p:pic>
+        <p:nvPicPr>
+          <p:cNvPr id="11" name="Imagen 10">
+            <a:extLst>
+              <a:ext uri="{FF2B5EF4-FFF2-40B4-BE49-F238E27FC236}">
+                <a16:creationId xmlns:a16="http://schemas.microsoft.com/office/drawing/2014/main" id="{5B1CAB16-AAFF-0020-E3FE-85BE9C43733E}"/>
+              </a:ext>
+            </a:extLst>
+          </p:cNvPr>
+          <p:cNvPicPr>
+            <a:picLocks noChangeAspect="1"/>
+          </p:cNvPicPr>
+          <p:nvPr/>
+        </p:nvPicPr>
+        <p:blipFill>
+          <a:blip r:embed="rId3"/>
+          <a:stretch>
+            <a:fillRect/>
+          </a:stretch>
+        </p:blipFill>
+        <p:spPr>
+          <a:xfrm>
+            <a:off x="239522" y="2903174"/>
+            <a:ext cx="11712955" cy="1051651"/>
+          </a:xfrm>
+          <a:prstGeom prst="rect">
+            <a:avLst/>
+          </a:prstGeom>
+        </p:spPr>
+      </p:pic>
+      <p:sp>
+        <p:nvSpPr>
+          <p:cNvPr id="9" name="Rectángulo 8">
+            <a:extLst>
+              <a:ext uri="{FF2B5EF4-FFF2-40B4-BE49-F238E27FC236}">
+                <a16:creationId xmlns:a16="http://schemas.microsoft.com/office/drawing/2014/main" id="{19CE3575-09A8-0984-60D0-CDEE01EEEB27}"/>
+              </a:ext>
+            </a:extLst>
+          </p:cNvPr>
+          <p:cNvSpPr/>
+          <p:nvPr/>
+        </p:nvSpPr>
+        <p:spPr>
+          <a:xfrm>
+            <a:off x="239522" y="3452565"/>
+            <a:ext cx="11712954" cy="661164"/>
+          </a:xfrm>
+          <a:prstGeom prst="rect">
+            <a:avLst/>
+          </a:prstGeom>
+          <a:ln>
+            <a:noFill/>
+          </a:ln>
+        </p:spPr>
+        <p:style>
+          <a:lnRef idx="2">
+            <a:schemeClr val="accent6"/>
+          </a:lnRef>
+          <a:fillRef idx="1">
+            <a:schemeClr val="lt1"/>
+          </a:fillRef>
+          <a:effectRef idx="0">
+            <a:schemeClr val="accent6"/>
+          </a:effectRef>
+          <a:fontRef idx="minor">
+            <a:schemeClr val="dk1"/>
+          </a:fontRef>
+        </p:style>
+        <p:txBody>
+          <a:bodyPr rtlCol="0" anchor="ctr"/>
+          <a:lstStyle/>
+          <a:p>
+            <a:pPr algn="ctr"/>
+            <a:endParaRPr lang="es-CO"/>
+          </a:p>
+        </p:txBody>
+      </p:sp>
+      <p:pic>
+        <p:nvPicPr>
+          <p:cNvPr id="6" name="Imagen 5">
+            <a:extLst>
+              <a:ext uri="{FF2B5EF4-FFF2-40B4-BE49-F238E27FC236}">
+                <a16:creationId xmlns:a16="http://schemas.microsoft.com/office/drawing/2014/main" id="{64A37F9C-3281-B95E-E2B7-E03DE749C2AA}"/>
+              </a:ext>
+            </a:extLst>
+          </p:cNvPr>
+          <p:cNvPicPr>
+            <a:picLocks noChangeAspect="1"/>
+          </p:cNvPicPr>
+          <p:nvPr/>
+        </p:nvPicPr>
+        <p:blipFill>
+          <a:blip r:embed="rId4"/>
+          <a:stretch>
+            <a:fillRect/>
+          </a:stretch>
+        </p:blipFill>
+        <p:spPr>
+          <a:xfrm>
+            <a:off x="8717173" y="3433863"/>
+            <a:ext cx="2140377" cy="661164"/>
+          </a:xfrm>
+          <a:prstGeom prst="rect">
+            <a:avLst/>
+          </a:prstGeom>
+        </p:spPr>
+      </p:pic>
+      <p:pic>
+        <p:nvPicPr>
+          <p:cNvPr id="8" name="Gráfico 7" descr="Lupa">
+            <a:extLst>
+              <a:ext uri="{FF2B5EF4-FFF2-40B4-BE49-F238E27FC236}">
+                <a16:creationId xmlns:a16="http://schemas.microsoft.com/office/drawing/2014/main" id="{70287BDA-E56B-9DF6-26A8-A0F53C4766DE}"/>
+              </a:ext>
+            </a:extLst>
+          </p:cNvPr>
+          <p:cNvPicPr>
+            <a:picLocks noChangeAspect="1"/>
+          </p:cNvPicPr>
+          <p:nvPr/>
+        </p:nvPicPr>
+        <p:blipFill>
+          <a:blip r:embed="rId5">
+            <a:extLst>
+              <a:ext uri="{28A0092B-C50C-407E-A947-70E740481C1C}">
+                <a14:useLocalDpi xmlns:a14="http://schemas.microsoft.com/office/drawing/2010/main" val="0"/>
+              </a:ext>
+              <a:ext uri="{96DAC541-7B7A-43D3-8B79-37D633B846F1}">
+                <asvg:svgBlip xmlns:asvg="http://schemas.microsoft.com/office/drawing/2016/SVG/main" r:embed="rId6"/>
+              </a:ext>
+            </a:extLst>
+          </a:blip>
+          <a:stretch>
+            <a:fillRect/>
+          </a:stretch>
+        </p:blipFill>
+        <p:spPr>
+          <a:xfrm rot="5181362">
+            <a:off x="7319456" y="2349657"/>
+            <a:ext cx="4092798" cy="4018677"/>
+          </a:xfrm>
+          <a:prstGeom prst="rect">
+            <a:avLst/>
+          </a:prstGeom>
+        </p:spPr>
+      </p:pic>
+    </p:spTree>
+    <p:extLst>
+      <p:ext uri="{BB962C8B-B14F-4D97-AF65-F5344CB8AC3E}">
+        <p14:creationId xmlns:p14="http://schemas.microsoft.com/office/powerpoint/2010/main" val="5733342"/>
+      </p:ext>
+    </p:extLst>
+  </p:cSld>
+  <p:clrMapOvr>
+    <a:masterClrMapping/>
+  </p:clrMapOvr>
+</p:sld>
+</file>
+
+<file path=ppt/slides/slide11.xml><?xml version="1.0" encoding="utf-8"?>
+<p:sld xmlns:a="http://schemas.openxmlformats.org/drawingml/2006/main" xmlns:r="http://schemas.openxmlformats.org/officeDocument/2006/relationships" xmlns:p="http://schemas.openxmlformats.org/presentationml/2006/main">
+  <p:cSld>
+    <p:spTree>
+      <p:nvGrpSpPr>
+        <p:cNvPr id="1" name=""/>
+        <p:cNvGrpSpPr/>
+        <p:nvPr/>
+      </p:nvGrpSpPr>
+      <p:grpSpPr>
+        <a:xfrm>
+          <a:off x="0" y="0"/>
+          <a:ext cx="0" cy="0"/>
+          <a:chOff x="0" y="0"/>
+          <a:chExt cx="0" cy="0"/>
+        </a:xfrm>
+      </p:grpSpPr>
+      <p:pic>
+        <p:nvPicPr>
+          <p:cNvPr id="3" name="logo">
+            <a:extLst>
+              <a:ext uri="{FF2B5EF4-FFF2-40B4-BE49-F238E27FC236}">
+                <a16:creationId xmlns:a16="http://schemas.microsoft.com/office/drawing/2014/main" id="{CB7069CB-A915-E9BA-0362-5B269561515F}"/>
+              </a:ext>
+            </a:extLst>
+          </p:cNvPr>
+          <p:cNvPicPr>
+            <a:picLocks noChangeAspect="1"/>
+          </p:cNvPicPr>
+          <p:nvPr/>
+        </p:nvPicPr>
+        <p:blipFill>
+          <a:blip r:embed="rId2">
+            <a:extLst>
+              <a:ext uri="{28A0092B-C50C-407E-A947-70E740481C1C}">
+                <a14:useLocalDpi xmlns:a14="http://schemas.microsoft.com/office/drawing/2010/main" val="0"/>
+              </a:ext>
+            </a:extLst>
+          </a:blip>
+          <a:stretch>
+            <a:fillRect/>
+          </a:stretch>
+        </p:blipFill>
+        <p:spPr>
+          <a:xfrm>
+            <a:off x="8765519" y="3350269"/>
+            <a:ext cx="3426481" cy="3473976"/>
+          </a:xfrm>
+          <a:prstGeom prst="rect">
+            <a:avLst/>
+          </a:prstGeom>
+        </p:spPr>
+      </p:pic>
+      <p:sp>
+        <p:nvSpPr>
+          <p:cNvPr id="17" name="Rectángulo 16">
+            <a:extLst>
+              <a:ext uri="{FF2B5EF4-FFF2-40B4-BE49-F238E27FC236}">
+                <a16:creationId xmlns:a16="http://schemas.microsoft.com/office/drawing/2014/main" id="{A8B8087A-F01D-7BF2-7B9B-803D42A31868}"/>
+              </a:ext>
+            </a:extLst>
+          </p:cNvPr>
+          <p:cNvSpPr/>
+          <p:nvPr/>
+        </p:nvSpPr>
+        <p:spPr>
+          <a:xfrm>
+            <a:off x="0" y="0"/>
+            <a:ext cx="12192000" cy="6858000"/>
+          </a:xfrm>
+          <a:prstGeom prst="rect">
+            <a:avLst/>
+          </a:prstGeom>
+          <a:solidFill>
+            <a:schemeClr val="tx1">
+              <a:alpha val="70000"/>
+            </a:schemeClr>
+          </a:solidFill>
+          <a:ln>
+            <a:noFill/>
+          </a:ln>
+        </p:spPr>
+        <p:style>
+          <a:lnRef idx="2">
+            <a:schemeClr val="accent1">
+              <a:shade val="50000"/>
+            </a:schemeClr>
+          </a:lnRef>
+          <a:fillRef idx="1">
+            <a:schemeClr val="accent1"/>
+          </a:fillRef>
+          <a:effectRef idx="0">
+            <a:schemeClr val="accent1"/>
+          </a:effectRef>
+          <a:fontRef idx="minor">
+            <a:schemeClr val="lt1"/>
+          </a:fontRef>
+        </p:style>
+        <p:txBody>
+          <a:bodyPr rtlCol="0" anchor="ctr"/>
+          <a:lstStyle/>
+          <a:p>
+            <a:pPr algn="ctr"/>
+            <a:endParaRPr lang="es-CO">
+              <a:ln>
+                <a:solidFill>
+                  <a:schemeClr val="accent1"/>
+                </a:solidFill>
+              </a:ln>
+            </a:endParaRPr>
+          </a:p>
+        </p:txBody>
+      </p:sp>
+      <p:sp>
+        <p:nvSpPr>
+          <p:cNvPr id="10" name="CuadroTexto 9">
+            <a:extLst>
+              <a:ext uri="{FF2B5EF4-FFF2-40B4-BE49-F238E27FC236}">
+                <a16:creationId xmlns:a16="http://schemas.microsoft.com/office/drawing/2014/main" id="{C69317F1-3BC8-CC98-94BA-756E40E92416}"/>
+              </a:ext>
+            </a:extLst>
+          </p:cNvPr>
+          <p:cNvSpPr txBox="1"/>
+          <p:nvPr/>
+        </p:nvSpPr>
+        <p:spPr>
+          <a:xfrm>
+            <a:off x="1280159" y="5503453"/>
+            <a:ext cx="9924288" cy="1200329"/>
+          </a:xfrm>
+          <a:prstGeom prst="rect">
+            <a:avLst/>
+          </a:prstGeom>
+          <a:noFill/>
+        </p:spPr>
+        <p:txBody>
+          <a:bodyPr wrap="square">
+            <a:spAutoFit/>
+          </a:bodyPr>
+          <a:lstStyle/>
+          <a:p>
+            <a:pPr algn="ctr"/>
+            <a:r>
+              <a:rPr lang="es-MX" sz="3600" dirty="0">
+                <a:solidFill>
+                  <a:schemeClr val="bg1"/>
+                </a:solidFill>
+              </a:rPr>
+              <a:t>Ingrese una descripción y de clic en botón </a:t>
+            </a:r>
+          </a:p>
+          <a:p>
+            <a:pPr algn="ctr"/>
+            <a:r>
+              <a:rPr lang="es-MX" sz="3600" b="1" i="1" dirty="0">
+                <a:solidFill>
+                  <a:schemeClr val="accent4">
+                    <a:lumMod val="60000"/>
+                    <a:lumOff val="40000"/>
+                  </a:schemeClr>
+                </a:solidFill>
+              </a:rPr>
+              <a:t>Pasar a revisión</a:t>
+            </a:r>
+          </a:p>
+        </p:txBody>
+      </p:sp>
+      <p:pic>
+        <p:nvPicPr>
+          <p:cNvPr id="4" name="Imagen 3">
+            <a:extLst>
+              <a:ext uri="{FF2B5EF4-FFF2-40B4-BE49-F238E27FC236}">
+                <a16:creationId xmlns:a16="http://schemas.microsoft.com/office/drawing/2014/main" id="{9D70D671-5EC9-54B1-0582-072BDD2C4351}"/>
+              </a:ext>
+            </a:extLst>
+          </p:cNvPr>
+          <p:cNvPicPr>
+            <a:picLocks noChangeAspect="1"/>
+          </p:cNvPicPr>
+          <p:nvPr/>
+        </p:nvPicPr>
+        <p:blipFill>
+          <a:blip r:embed="rId3"/>
+          <a:stretch>
+            <a:fillRect/>
+          </a:stretch>
+        </p:blipFill>
+        <p:spPr>
+          <a:xfrm>
+            <a:off x="3592613" y="1748644"/>
+            <a:ext cx="5006774" cy="3360711"/>
+          </a:xfrm>
+          <a:prstGeom prst="rect">
+            <a:avLst/>
+          </a:prstGeom>
+        </p:spPr>
+      </p:pic>
+    </p:spTree>
+    <p:extLst>
+      <p:ext uri="{BB962C8B-B14F-4D97-AF65-F5344CB8AC3E}">
+        <p14:creationId xmlns:p14="http://schemas.microsoft.com/office/powerpoint/2010/main" val="2790284056"/>
+      </p:ext>
+    </p:extLst>
+  </p:cSld>
+  <p:clrMapOvr>
+    <a:masterClrMapping/>
+  </p:clrMapOvr>
+</p:sld>
+</file>
+
+<file path=ppt/slides/slide12.xml><?xml version="1.0" encoding="utf-8"?>
+<p:sld xmlns:a="http://schemas.openxmlformats.org/drawingml/2006/main" xmlns:r="http://schemas.openxmlformats.org/officeDocument/2006/relationships" xmlns:p="http://schemas.openxmlformats.org/presentationml/2006/main">
+  <p:cSld>
+    <p:spTree>
+      <p:nvGrpSpPr>
+        <p:cNvPr id="1" name=""/>
+        <p:cNvGrpSpPr/>
+        <p:nvPr/>
+      </p:nvGrpSpPr>
+      <p:grpSpPr>
+        <a:xfrm>
+          <a:off x="0" y="0"/>
+          <a:ext cx="0" cy="0"/>
+          <a:chOff x="0" y="0"/>
+          <a:chExt cx="0" cy="0"/>
+        </a:xfrm>
+      </p:grpSpPr>
+      <p:pic>
+        <p:nvPicPr>
+          <p:cNvPr id="3" name="logo">
+            <a:extLst>
+              <a:ext uri="{FF2B5EF4-FFF2-40B4-BE49-F238E27FC236}">
+                <a16:creationId xmlns:a16="http://schemas.microsoft.com/office/drawing/2014/main" id="{CB7069CB-A915-E9BA-0362-5B269561515F}"/>
+              </a:ext>
+            </a:extLst>
+          </p:cNvPr>
+          <p:cNvPicPr>
+            <a:picLocks noChangeAspect="1"/>
+          </p:cNvPicPr>
+          <p:nvPr/>
+        </p:nvPicPr>
+        <p:blipFill>
+          <a:blip r:embed="rId2">
+            <a:extLst>
+              <a:ext uri="{28A0092B-C50C-407E-A947-70E740481C1C}">
+                <a14:useLocalDpi xmlns:a14="http://schemas.microsoft.com/office/drawing/2010/main" val="0"/>
+              </a:ext>
+            </a:extLst>
+          </a:blip>
+          <a:stretch>
+            <a:fillRect/>
+          </a:stretch>
+        </p:blipFill>
+        <p:spPr>
+          <a:xfrm>
+            <a:off x="8765519" y="3350269"/>
+            <a:ext cx="3426481" cy="3473976"/>
+          </a:xfrm>
+          <a:prstGeom prst="rect">
+            <a:avLst/>
+          </a:prstGeom>
+        </p:spPr>
+      </p:pic>
+      <p:sp>
+        <p:nvSpPr>
+          <p:cNvPr id="17" name="Rectángulo 16">
+            <a:extLst>
+              <a:ext uri="{FF2B5EF4-FFF2-40B4-BE49-F238E27FC236}">
+                <a16:creationId xmlns:a16="http://schemas.microsoft.com/office/drawing/2014/main" id="{A8B8087A-F01D-7BF2-7B9B-803D42A31868}"/>
+              </a:ext>
+            </a:extLst>
+          </p:cNvPr>
+          <p:cNvSpPr/>
+          <p:nvPr/>
+        </p:nvSpPr>
+        <p:spPr>
+          <a:xfrm>
+            <a:off x="0" y="0"/>
+            <a:ext cx="12192000" cy="6858000"/>
+          </a:xfrm>
+          <a:prstGeom prst="rect">
+            <a:avLst/>
+          </a:prstGeom>
+          <a:solidFill>
+            <a:schemeClr val="tx1">
+              <a:alpha val="70000"/>
+            </a:schemeClr>
+          </a:solidFill>
+          <a:ln>
+            <a:noFill/>
+          </a:ln>
+        </p:spPr>
+        <p:style>
+          <a:lnRef idx="2">
+            <a:schemeClr val="accent1">
+              <a:shade val="50000"/>
+            </a:schemeClr>
+          </a:lnRef>
+          <a:fillRef idx="1">
+            <a:schemeClr val="accent1"/>
+          </a:fillRef>
+          <a:effectRef idx="0">
+            <a:schemeClr val="accent1"/>
+          </a:effectRef>
+          <a:fontRef idx="minor">
+            <a:schemeClr val="lt1"/>
+          </a:fontRef>
+        </p:style>
+        <p:txBody>
+          <a:bodyPr rtlCol="0" anchor="ctr"/>
+          <a:lstStyle/>
+          <a:p>
+            <a:pPr algn="ctr"/>
+            <a:endParaRPr lang="es-CO">
+              <a:ln>
+                <a:solidFill>
+                  <a:schemeClr val="accent1"/>
+                </a:solidFill>
+              </a:ln>
+            </a:endParaRPr>
+          </a:p>
+        </p:txBody>
+      </p:sp>
+      <p:sp>
+        <p:nvSpPr>
+          <p:cNvPr id="2" name="CuadroTexto 1">
+            <a:extLst>
+              <a:ext uri="{FF2B5EF4-FFF2-40B4-BE49-F238E27FC236}">
+                <a16:creationId xmlns:a16="http://schemas.microsoft.com/office/drawing/2014/main" id="{4BE15536-8584-618A-A38B-56A2C9028692}"/>
+              </a:ext>
+            </a:extLst>
+          </p:cNvPr>
+          <p:cNvSpPr txBox="1"/>
+          <p:nvPr/>
+        </p:nvSpPr>
+        <p:spPr>
+          <a:xfrm>
+            <a:off x="318426" y="445008"/>
+            <a:ext cx="11268635" cy="6494085"/>
+          </a:xfrm>
+          <a:prstGeom prst="rect">
+            <a:avLst/>
+          </a:prstGeom>
+          <a:noFill/>
+        </p:spPr>
+        <p:txBody>
+          <a:bodyPr wrap="square" rtlCol="0">
+            <a:spAutoFit/>
+          </a:bodyPr>
+          <a:lstStyle/>
+          <a:p>
+            <a:pPr algn="ctr"/>
+            <a:r>
+              <a:rPr lang="es-MX" sz="3600" dirty="0">
+                <a:solidFill>
+                  <a:schemeClr val="bg1"/>
+                </a:solidFill>
+              </a:rPr>
+              <a:t>Ahora IURIS le permite pausar los expedientes!</a:t>
+            </a:r>
+          </a:p>
+          <a:p>
+            <a:endParaRPr lang="es-MX" sz="3600" dirty="0">
+              <a:solidFill>
+                <a:schemeClr val="bg1"/>
+              </a:solidFill>
+            </a:endParaRPr>
+          </a:p>
+          <a:p>
+            <a:pPr algn="just"/>
+            <a:r>
+              <a:rPr lang="es-MX" sz="3600" dirty="0">
+                <a:solidFill>
+                  <a:schemeClr val="bg1"/>
+                </a:solidFill>
+              </a:rPr>
+              <a:t>Esta funcionalidad pone en pausa el tiempo de evaluación de actuaciones en aquellos expedientes abiertos que no tendrán actuaciones en un lapso determinado de tiempo.</a:t>
+            </a:r>
+          </a:p>
+          <a:p>
+            <a:endParaRPr lang="es-MX" sz="3600" dirty="0"/>
+          </a:p>
+          <a:p>
+            <a:endParaRPr lang="es-MX" sz="3600" dirty="0"/>
+          </a:p>
+          <a:p>
+            <a:endParaRPr lang="es-MX" sz="3600" dirty="0"/>
+          </a:p>
+          <a:p>
+            <a:endParaRPr lang="es-MX" sz="3600" dirty="0"/>
+          </a:p>
+          <a:p>
+            <a:endParaRPr lang="es-MX" sz="3600" dirty="0"/>
+          </a:p>
+          <a:p>
+            <a:endParaRPr lang="es-MX" sz="3600" dirty="0"/>
+          </a:p>
+          <a:p>
+            <a:r>
+              <a:rPr lang="es-CO" sz="2000" dirty="0" err="1">
+                <a:solidFill>
+                  <a:schemeClr val="bg1"/>
+                </a:solidFill>
+              </a:rPr>
+              <a:t>Amatai</a:t>
+            </a:r>
+            <a:r>
+              <a:rPr lang="es-CO" sz="2000" dirty="0">
+                <a:solidFill>
+                  <a:schemeClr val="bg1"/>
+                </a:solidFill>
+              </a:rPr>
+              <a:t> SAS</a:t>
+            </a:r>
+          </a:p>
+        </p:txBody>
+      </p:sp>
+    </p:spTree>
+    <p:extLst>
+      <p:ext uri="{BB962C8B-B14F-4D97-AF65-F5344CB8AC3E}">
+        <p14:creationId xmlns:p14="http://schemas.microsoft.com/office/powerpoint/2010/main" val="3888979096"/>
+      </p:ext>
+    </p:extLst>
+  </p:cSld>
+  <p:clrMapOvr>
+    <a:masterClrMapping/>
+  </p:clrMapOvr>
+</p:sld>
+</file>
+
+<file path=ppt/slides/slide13.xml><?xml version="1.0" encoding="utf-8"?>
+<p:sld xmlns:a="http://schemas.openxmlformats.org/drawingml/2006/main" xmlns:r="http://schemas.openxmlformats.org/officeDocument/2006/relationships" xmlns:p="http://schemas.openxmlformats.org/presentationml/2006/main">
+  <p:cSld>
+    <p:spTree>
+      <p:nvGrpSpPr>
+        <p:cNvPr id="1" name=""/>
+        <p:cNvGrpSpPr/>
+        <p:nvPr/>
+      </p:nvGrpSpPr>
+      <p:grpSpPr>
+        <a:xfrm>
+          <a:off x="0" y="0"/>
+          <a:ext cx="0" cy="0"/>
+          <a:chOff x="0" y="0"/>
+          <a:chExt cx="0" cy="0"/>
+        </a:xfrm>
+      </p:grpSpPr>
+      <p:pic>
+        <p:nvPicPr>
+          <p:cNvPr id="3" name="logo">
+            <a:extLst>
+              <a:ext uri="{FF2B5EF4-FFF2-40B4-BE49-F238E27FC236}">
+                <a16:creationId xmlns:a16="http://schemas.microsoft.com/office/drawing/2014/main" id="{CB7069CB-A915-E9BA-0362-5B269561515F}"/>
+              </a:ext>
+            </a:extLst>
+          </p:cNvPr>
+          <p:cNvPicPr>
+            <a:picLocks noChangeAspect="1"/>
+          </p:cNvPicPr>
+          <p:nvPr/>
+        </p:nvPicPr>
+        <p:blipFill>
+          <a:blip r:embed="rId2">
+            <a:extLst>
+              <a:ext uri="{28A0092B-C50C-407E-A947-70E740481C1C}">
+                <a14:useLocalDpi xmlns:a14="http://schemas.microsoft.com/office/drawing/2010/main" val="0"/>
+              </a:ext>
+            </a:extLst>
+          </a:blip>
+          <a:stretch>
+            <a:fillRect/>
+          </a:stretch>
+        </p:blipFill>
+        <p:spPr>
+          <a:xfrm>
+            <a:off x="8765519" y="3350269"/>
+            <a:ext cx="3426481" cy="3473976"/>
+          </a:xfrm>
+          <a:prstGeom prst="rect">
+            <a:avLst/>
+          </a:prstGeom>
+        </p:spPr>
+      </p:pic>
+      <p:sp>
+        <p:nvSpPr>
+          <p:cNvPr id="17" name="Rectángulo 16">
+            <a:extLst>
+              <a:ext uri="{FF2B5EF4-FFF2-40B4-BE49-F238E27FC236}">
+                <a16:creationId xmlns:a16="http://schemas.microsoft.com/office/drawing/2014/main" id="{A8B8087A-F01D-7BF2-7B9B-803D42A31868}"/>
+              </a:ext>
+            </a:extLst>
+          </p:cNvPr>
+          <p:cNvSpPr/>
+          <p:nvPr/>
+        </p:nvSpPr>
+        <p:spPr>
+          <a:xfrm>
+            <a:off x="0" y="0"/>
+            <a:ext cx="12192000" cy="6858000"/>
+          </a:xfrm>
+          <a:prstGeom prst="rect">
+            <a:avLst/>
+          </a:prstGeom>
+          <a:solidFill>
+            <a:schemeClr val="tx1">
+              <a:alpha val="70000"/>
+            </a:schemeClr>
+          </a:solidFill>
+          <a:ln>
+            <a:noFill/>
+          </a:ln>
+        </p:spPr>
+        <p:style>
+          <a:lnRef idx="2">
+            <a:schemeClr val="accent1">
+              <a:shade val="50000"/>
+            </a:schemeClr>
+          </a:lnRef>
+          <a:fillRef idx="1">
+            <a:schemeClr val="accent1"/>
+          </a:fillRef>
+          <a:effectRef idx="0">
+            <a:schemeClr val="accent1"/>
+          </a:effectRef>
+          <a:fontRef idx="minor">
+            <a:schemeClr val="lt1"/>
+          </a:fontRef>
+        </p:style>
+        <p:txBody>
+          <a:bodyPr rtlCol="0" anchor="ctr"/>
+          <a:lstStyle/>
+          <a:p>
+            <a:pPr algn="ctr"/>
+            <a:endParaRPr lang="es-CO">
+              <a:ln>
+                <a:solidFill>
+                  <a:schemeClr val="accent1"/>
+                </a:solidFill>
+              </a:ln>
+            </a:endParaRPr>
+          </a:p>
+        </p:txBody>
+      </p:sp>
+      <p:sp>
+        <p:nvSpPr>
+          <p:cNvPr id="2" name="CuadroTexto 1">
+            <a:extLst>
+              <a:ext uri="{FF2B5EF4-FFF2-40B4-BE49-F238E27FC236}">
+                <a16:creationId xmlns:a16="http://schemas.microsoft.com/office/drawing/2014/main" id="{4BE15536-8584-618A-A38B-56A2C9028692}"/>
+              </a:ext>
+            </a:extLst>
+          </p:cNvPr>
+          <p:cNvSpPr txBox="1"/>
+          <p:nvPr/>
+        </p:nvSpPr>
+        <p:spPr>
+          <a:xfrm>
+            <a:off x="318426" y="445008"/>
             <a:ext cx="11268635" cy="6494085"/>
           </a:xfrm>
           <a:prstGeom prst="rect">
@@ -3940,7 +4895,7 @@
 </p:sld>
 </file>
 
-<file path=ppt/slides/slide11.xml><?xml version="1.0" encoding="utf-8"?>
+<file path=ppt/slides/slide14.xml><?xml version="1.0" encoding="utf-8"?>
 <p:sld xmlns:a="http://schemas.openxmlformats.org/drawingml/2006/main" xmlns:r="http://schemas.openxmlformats.org/officeDocument/2006/relationships" xmlns:p="http://schemas.openxmlformats.org/presentationml/2006/main">
   <p:cSld>
     <p:spTree>
@@ -4256,8 +5211,8 @@
         </p:nvSpPr>
         <p:spPr>
           <a:xfrm>
-            <a:off x="0" y="0"/>
-            <a:ext cx="12192000" cy="6858000"/>
+            <a:off x="0" y="-193580"/>
+            <a:ext cx="12192000" cy="7051579"/>
           </a:xfrm>
           <a:prstGeom prst="rect">
             <a:avLst/>
@@ -4317,7 +5272,7 @@
         <p:spPr>
           <a:xfrm>
             <a:off x="318426" y="445008"/>
-            <a:ext cx="11268635" cy="6494085"/>
+            <a:ext cx="11268635" cy="5940088"/>
           </a:xfrm>
           <a:prstGeom prst="rect">
             <a:avLst/>
@@ -4336,7 +5291,7 @@
                   <a:schemeClr val="bg1"/>
                 </a:solidFill>
               </a:rPr>
-              <a:t>Ahora IURIS permite </a:t>
+              <a:t>Si el caso esta </a:t>
             </a:r>
             <a:r>
               <a:rPr lang="es-MX" sz="3600" b="1" dirty="0">
@@ -4347,7 +5302,7 @@
                   </a:schemeClr>
                 </a:solidFill>
               </a:rPr>
-              <a:t>Evaluar </a:t>
+              <a:t>Cerrado - sistema</a:t>
             </a:r>
             <a:r>
               <a:rPr lang="es-MX" sz="3600" dirty="0">
@@ -4355,46 +5310,10 @@
                   <a:schemeClr val="bg1"/>
                 </a:solidFill>
               </a:rPr>
-              <a:t>y </a:t>
-            </a:r>
-            <a:r>
-              <a:rPr lang="es-MX" sz="3600" b="1" dirty="0">
-                <a:solidFill>
-                  <a:schemeClr val="accent4">
-                    <a:lumMod val="60000"/>
-                    <a:lumOff val="40000"/>
-                  </a:schemeClr>
-                </a:solidFill>
-              </a:rPr>
-              <a:t>Cerrar</a:t>
-            </a:r>
-            <a:r>
-              <a:rPr lang="es-MX" sz="3600" dirty="0">
-                <a:solidFill>
-                  <a:schemeClr val="bg1"/>
-                </a:solidFill>
-              </a:rPr>
-              <a:t> los casos de asesoría que estén en estado </a:t>
-            </a:r>
-            <a:r>
-              <a:rPr lang="es-MX" sz="3600" b="1" dirty="0">
-                <a:solidFill>
-                  <a:schemeClr val="accent4">
-                    <a:lumMod val="60000"/>
-                    <a:lumOff val="40000"/>
-                  </a:schemeClr>
-                </a:solidFill>
-              </a:rPr>
-              <a:t>Cerrado (sistema) </a:t>
-            </a:r>
-            <a:r>
-              <a:rPr lang="es-MX" sz="3600" b="1" dirty="0">
-                <a:solidFill>
-                  <a:schemeClr val="bg1"/>
-                </a:solidFill>
-              </a:rPr>
-              <a:t>durante el periodo activo.</a:t>
-            </a:r>
+              <a:t> y se evalúa en un corte diferente en el que fue asignado podrá asignar una nota de 0 a 5. La nota se asignará al corte activo.</a:t>
+            </a:r>
+          </a:p>
+          <a:p>
             <a:endParaRPr lang="es-MX" sz="3600" dirty="0">
               <a:solidFill>
                 <a:schemeClr val="bg1"/>
@@ -4402,7 +5321,6 @@
             </a:endParaRPr>
           </a:p>
           <a:p>
-            <a:pPr algn="just"/>
             <a:endParaRPr lang="es-MX" sz="3600" dirty="0">
               <a:solidFill>
                 <a:schemeClr val="bg1"/>
@@ -4410,29 +5328,39 @@
             </a:endParaRPr>
           </a:p>
           <a:p>
-            <a:r>
-              <a:rPr lang="es-MX" sz="3600" dirty="0">
-                <a:solidFill>
-                  <a:schemeClr val="bg1"/>
-                </a:solidFill>
-              </a:rPr>
-              <a:t>Anteriormente esta funcionalidad estaba disponible solo durante el corte activo.</a:t>
-            </a:r>
-          </a:p>
-          <a:p>
-            <a:endParaRPr lang="es-MX" sz="3600" dirty="0"/>
-          </a:p>
-          <a:p>
-            <a:endParaRPr lang="es-MX" sz="3600" dirty="0"/>
-          </a:p>
-          <a:p>
-            <a:endParaRPr lang="es-MX" sz="3600" dirty="0"/>
-          </a:p>
-          <a:p>
-            <a:endParaRPr lang="es-MX" sz="3600" dirty="0"/>
-          </a:p>
-          <a:p>
-            <a:endParaRPr lang="es-MX" sz="3600" dirty="0"/>
+            <a:endParaRPr lang="es-MX" sz="3600" dirty="0">
+              <a:solidFill>
+                <a:schemeClr val="bg1"/>
+              </a:solidFill>
+            </a:endParaRPr>
+          </a:p>
+          <a:p>
+            <a:endParaRPr lang="es-MX" sz="3600" dirty="0">
+              <a:solidFill>
+                <a:schemeClr val="bg1"/>
+              </a:solidFill>
+            </a:endParaRPr>
+          </a:p>
+          <a:p>
+            <a:endParaRPr lang="es-MX" sz="3600" dirty="0">
+              <a:solidFill>
+                <a:schemeClr val="bg1"/>
+              </a:solidFill>
+            </a:endParaRPr>
+          </a:p>
+          <a:p>
+            <a:endParaRPr lang="es-MX" sz="3600" dirty="0">
+              <a:solidFill>
+                <a:schemeClr val="bg1"/>
+              </a:solidFill>
+            </a:endParaRPr>
+          </a:p>
+          <a:p>
+            <a:endParaRPr lang="es-MX" sz="3600" dirty="0">
+              <a:solidFill>
+                <a:schemeClr val="bg1"/>
+              </a:solidFill>
+            </a:endParaRPr>
           </a:p>
           <a:p>
             <a:r>
@@ -4457,7 +5385,7 @@
     </p:spTree>
     <p:extLst>
       <p:ext uri="{BB962C8B-B14F-4D97-AF65-F5344CB8AC3E}">
-        <p14:creationId xmlns:p14="http://schemas.microsoft.com/office/powerpoint/2010/main" val="482223614"/>
+        <p14:creationId xmlns:p14="http://schemas.microsoft.com/office/powerpoint/2010/main" val="1049771496"/>
       </p:ext>
     </p:extLst>
   </p:cSld>
@@ -4542,7 +5470,7 @@
           </a:prstGeom>
           <a:solidFill>
             <a:schemeClr val="tx1">
-              <a:alpha val="70000"/>
+              <a:alpha val="60000"/>
             </a:schemeClr>
           </a:solidFill>
           <a:ln>
@@ -4595,7 +5523,7 @@
         <p:spPr>
           <a:xfrm>
             <a:off x="318426" y="445008"/>
-            <a:ext cx="11268635" cy="7602081"/>
+            <a:ext cx="11268635" cy="6494085"/>
           </a:xfrm>
           <a:prstGeom prst="rect">
             <a:avLst/>
@@ -4608,7 +5536,71 @@
           </a:bodyPr>
           <a:lstStyle/>
           <a:p>
-            <a:pPr algn="ctr"/>
+            <a:r>
+              <a:rPr lang="es-MX" sz="3600" dirty="0">
+                <a:solidFill>
+                  <a:schemeClr val="bg1"/>
+                </a:solidFill>
+              </a:rPr>
+              <a:t>Ahora IURIS permite a los docentes </a:t>
+            </a:r>
+            <a:r>
+              <a:rPr lang="es-MX" sz="3600" b="1" dirty="0">
+                <a:solidFill>
+                  <a:schemeClr val="accent4">
+                    <a:lumMod val="60000"/>
+                    <a:lumOff val="40000"/>
+                  </a:schemeClr>
+                </a:solidFill>
+              </a:rPr>
+              <a:t>Evaluar </a:t>
+            </a:r>
+            <a:r>
+              <a:rPr lang="es-MX" sz="3600" dirty="0">
+                <a:solidFill>
+                  <a:schemeClr val="bg1"/>
+                </a:solidFill>
+              </a:rPr>
+              <a:t>y </a:t>
+            </a:r>
+            <a:r>
+              <a:rPr lang="es-MX" sz="3600" b="1" dirty="0">
+                <a:solidFill>
+                  <a:schemeClr val="accent4">
+                    <a:lumMod val="60000"/>
+                    <a:lumOff val="40000"/>
+                  </a:schemeClr>
+                </a:solidFill>
+              </a:rPr>
+              <a:t>Cerrar</a:t>
+            </a:r>
+            <a:r>
+              <a:rPr lang="es-MX" sz="3600" dirty="0">
+                <a:solidFill>
+                  <a:schemeClr val="bg1"/>
+                </a:solidFill>
+              </a:rPr>
+              <a:t> los casos de asesoría que hayan sido asignados durante el periodo activo y que estén en estado </a:t>
+            </a:r>
+            <a:r>
+              <a:rPr lang="es-MX" sz="3600" b="1" dirty="0">
+                <a:solidFill>
+                  <a:schemeClr val="accent4">
+                    <a:lumMod val="60000"/>
+                    <a:lumOff val="40000"/>
+                  </a:schemeClr>
+                </a:solidFill>
+              </a:rPr>
+              <a:t>Cerrado (sistema)</a:t>
+            </a:r>
+            <a:r>
+              <a:rPr lang="es-MX" sz="3600" b="1" dirty="0">
+                <a:solidFill>
+                  <a:schemeClr val="bg1"/>
+                </a:solidFill>
+              </a:rPr>
+              <a:t>.</a:t>
+            </a:r>
             <a:endParaRPr lang="es-MX" sz="3600" dirty="0">
               <a:solidFill>
                 <a:schemeClr val="bg1"/>
@@ -4616,61 +5608,7 @@
             </a:endParaRPr>
           </a:p>
           <a:p>
-            <a:pPr algn="ctr"/>
-            <a:r>
-              <a:rPr lang="es-MX" sz="3600" dirty="0">
-                <a:solidFill>
-                  <a:schemeClr val="bg1"/>
-                </a:solidFill>
-              </a:rPr>
-              <a:t>Para </a:t>
-            </a:r>
-            <a:r>
-              <a:rPr lang="es-MX" sz="3600" b="1" dirty="0">
-                <a:solidFill>
-                  <a:schemeClr val="accent4">
-                    <a:lumMod val="60000"/>
-                    <a:lumOff val="40000"/>
-                  </a:schemeClr>
-                </a:solidFill>
-              </a:rPr>
-              <a:t>Evaluar y cerrar caso </a:t>
-            </a:r>
-            <a:r>
-              <a:rPr lang="es-MX" sz="3600" dirty="0">
-                <a:solidFill>
-                  <a:schemeClr val="bg1"/>
-                </a:solidFill>
-              </a:rPr>
-              <a:t>en administración del caso, pestaña </a:t>
-            </a:r>
-            <a:r>
-              <a:rPr lang="es-MX" sz="3600" b="1" i="1" dirty="0">
-                <a:solidFill>
-                  <a:schemeClr val="bg1"/>
-                </a:solidFill>
-              </a:rPr>
-              <a:t>Cierre de caso </a:t>
-            </a:r>
-            <a:r>
-              <a:rPr lang="es-MX" sz="3600" dirty="0">
-                <a:solidFill>
-                  <a:schemeClr val="bg1"/>
-                </a:solidFill>
-              </a:rPr>
-              <a:t>de clic en el botón </a:t>
-            </a:r>
-            <a:r>
-              <a:rPr lang="es-MX" sz="3600" b="1" i="1" dirty="0">
-                <a:solidFill>
-                  <a:schemeClr val="bg1"/>
-                </a:solidFill>
-              </a:rPr>
-              <a:t>Volver a evaluar y cerrar caso</a:t>
-            </a:r>
-          </a:p>
-          <a:p>
-            <a:pPr algn="ctr"/>
+            <a:pPr algn="just"/>
             <a:endParaRPr lang="es-MX" sz="3600" dirty="0">
               <a:solidFill>
                 <a:schemeClr val="bg1"/>
@@ -4678,68 +5616,29 @@
             </a:endParaRPr>
           </a:p>
           <a:p>
-            <a:pPr algn="ctr"/>
-            <a:endParaRPr lang="es-MX" sz="3600" dirty="0">
-              <a:solidFill>
-                <a:schemeClr val="bg1"/>
-              </a:solidFill>
-            </a:endParaRPr>
-          </a:p>
-          <a:p>
-            <a:pPr algn="ctr"/>
-            <a:endParaRPr lang="es-MX" sz="3600" dirty="0">
-              <a:solidFill>
-                <a:schemeClr val="bg1"/>
-              </a:solidFill>
-            </a:endParaRPr>
-          </a:p>
-          <a:p>
-            <a:pPr algn="ctr"/>
-            <a:endParaRPr lang="es-MX" sz="3600" dirty="0">
-              <a:solidFill>
-                <a:schemeClr val="bg1"/>
-              </a:solidFill>
-            </a:endParaRPr>
-          </a:p>
-          <a:p>
-            <a:pPr algn="ctr"/>
-            <a:endParaRPr lang="es-MX" sz="3600" dirty="0">
-              <a:solidFill>
-                <a:schemeClr val="bg1"/>
-              </a:solidFill>
-            </a:endParaRPr>
-          </a:p>
-          <a:p>
-            <a:pPr algn="ctr"/>
-            <a:endParaRPr lang="es-MX" sz="3600" dirty="0">
-              <a:solidFill>
-                <a:schemeClr val="bg1"/>
-              </a:solidFill>
-            </a:endParaRPr>
-          </a:p>
-          <a:p>
-            <a:pPr algn="ctr"/>
-            <a:endParaRPr lang="es-MX" sz="3600" dirty="0">
-              <a:solidFill>
-                <a:schemeClr val="bg1"/>
-              </a:solidFill>
-            </a:endParaRPr>
-          </a:p>
-          <a:p>
-            <a:pPr algn="ctr"/>
-            <a:endParaRPr lang="es-MX" sz="3600" dirty="0">
-              <a:solidFill>
-                <a:schemeClr val="bg1"/>
-              </a:solidFill>
-            </a:endParaRPr>
-          </a:p>
-          <a:p>
-            <a:pPr algn="ctr"/>
-            <a:endParaRPr lang="es-MX" sz="3600" dirty="0">
-              <a:solidFill>
-                <a:schemeClr val="bg1"/>
-              </a:solidFill>
-            </a:endParaRPr>
+            <a:r>
+              <a:rPr lang="es-MX" sz="3600" dirty="0">
+                <a:solidFill>
+                  <a:schemeClr val="bg1"/>
+                </a:solidFill>
+              </a:rPr>
+              <a:t>Anteriormente esta funcionalidad estaba disponible solo durante el corte activo.</a:t>
+            </a:r>
+          </a:p>
+          <a:p>
+            <a:endParaRPr lang="es-MX" sz="3600" dirty="0"/>
+          </a:p>
+          <a:p>
+            <a:endParaRPr lang="es-MX" sz="3600" dirty="0"/>
+          </a:p>
+          <a:p>
+            <a:endParaRPr lang="es-MX" sz="3600" dirty="0"/>
+          </a:p>
+          <a:p>
+            <a:endParaRPr lang="es-MX" sz="3600" dirty="0"/>
+          </a:p>
+          <a:p>
+            <a:endParaRPr lang="es-MX" sz="3600" dirty="0"/>
           </a:p>
           <a:p>
             <a:r>
@@ -4761,156 +5660,10 @@
           </a:p>
         </p:txBody>
       </p:sp>
-      <p:pic>
-        <p:nvPicPr>
-          <p:cNvPr id="5" name="Imagen 4">
-            <a:extLst>
-              <a:ext uri="{FF2B5EF4-FFF2-40B4-BE49-F238E27FC236}">
-                <a16:creationId xmlns:a16="http://schemas.microsoft.com/office/drawing/2014/main" id="{0AFBDE35-35CA-75AC-DD52-27FE1D7052A7}"/>
-              </a:ext>
-            </a:extLst>
-          </p:cNvPr>
-          <p:cNvPicPr>
-            <a:picLocks noChangeAspect="1"/>
-          </p:cNvPicPr>
-          <p:nvPr/>
-        </p:nvPicPr>
-        <p:blipFill>
-          <a:blip r:embed="rId3"/>
-          <a:stretch>
-            <a:fillRect/>
-          </a:stretch>
-        </p:blipFill>
-        <p:spPr>
-          <a:xfrm>
-            <a:off x="220471" y="2926036"/>
-            <a:ext cx="11751058" cy="1320012"/>
-          </a:xfrm>
-          <a:prstGeom prst="rect">
-            <a:avLst/>
-          </a:prstGeom>
-        </p:spPr>
-      </p:pic>
-      <p:sp>
-        <p:nvSpPr>
-          <p:cNvPr id="9" name="Rectángulo 8">
-            <a:extLst>
-              <a:ext uri="{FF2B5EF4-FFF2-40B4-BE49-F238E27FC236}">
-                <a16:creationId xmlns:a16="http://schemas.microsoft.com/office/drawing/2014/main" id="{19CE3575-09A8-0984-60D0-CDEE01EEEB27}"/>
-              </a:ext>
-            </a:extLst>
-          </p:cNvPr>
-          <p:cNvSpPr/>
-          <p:nvPr/>
-        </p:nvSpPr>
-        <p:spPr>
-          <a:xfrm>
-            <a:off x="8023412" y="3756212"/>
-            <a:ext cx="3882075" cy="489836"/>
-          </a:xfrm>
-          <a:prstGeom prst="rect">
-            <a:avLst/>
-          </a:prstGeom>
-          <a:ln>
-            <a:noFill/>
-          </a:ln>
-        </p:spPr>
-        <p:style>
-          <a:lnRef idx="2">
-            <a:schemeClr val="accent6"/>
-          </a:lnRef>
-          <a:fillRef idx="1">
-            <a:schemeClr val="lt1"/>
-          </a:fillRef>
-          <a:effectRef idx="0">
-            <a:schemeClr val="accent6"/>
-          </a:effectRef>
-          <a:fontRef idx="minor">
-            <a:schemeClr val="dk1"/>
-          </a:fontRef>
-        </p:style>
-        <p:txBody>
-          <a:bodyPr rtlCol="0" anchor="ctr"/>
-          <a:lstStyle/>
-          <a:p>
-            <a:pPr algn="ctr"/>
-            <a:endParaRPr lang="es-CO" dirty="0"/>
-          </a:p>
-        </p:txBody>
-      </p:sp>
-      <p:pic>
-        <p:nvPicPr>
-          <p:cNvPr id="10" name="Imagen 9">
-            <a:extLst>
-              <a:ext uri="{FF2B5EF4-FFF2-40B4-BE49-F238E27FC236}">
-                <a16:creationId xmlns:a16="http://schemas.microsoft.com/office/drawing/2014/main" id="{53A2EAAA-5EE2-C05E-D295-9FF8055A8272}"/>
-              </a:ext>
-            </a:extLst>
-          </p:cNvPr>
-          <p:cNvPicPr>
-            <a:picLocks noChangeAspect="1"/>
-          </p:cNvPicPr>
-          <p:nvPr/>
-        </p:nvPicPr>
-        <p:blipFill>
-          <a:blip r:embed="rId4"/>
-          <a:stretch>
-            <a:fillRect/>
-          </a:stretch>
-        </p:blipFill>
-        <p:spPr>
-          <a:xfrm>
-            <a:off x="9054249" y="3657600"/>
-            <a:ext cx="2453953" cy="510988"/>
-          </a:xfrm>
-          <a:prstGeom prst="rect">
-            <a:avLst/>
-          </a:prstGeom>
-        </p:spPr>
-      </p:pic>
-      <p:pic>
-        <p:nvPicPr>
-          <p:cNvPr id="8" name="Gráfico 7" descr="Lupa">
-            <a:extLst>
-              <a:ext uri="{FF2B5EF4-FFF2-40B4-BE49-F238E27FC236}">
-                <a16:creationId xmlns:a16="http://schemas.microsoft.com/office/drawing/2014/main" id="{70287BDA-E56B-9DF6-26A8-A0F53C4766DE}"/>
-              </a:ext>
-            </a:extLst>
-          </p:cNvPr>
-          <p:cNvPicPr>
-            <a:picLocks noChangeAspect="1"/>
-          </p:cNvPicPr>
-          <p:nvPr/>
-        </p:nvPicPr>
-        <p:blipFill>
-          <a:blip r:embed="rId5">
-            <a:extLst>
-              <a:ext uri="{28A0092B-C50C-407E-A947-70E740481C1C}">
-                <a14:useLocalDpi xmlns:a14="http://schemas.microsoft.com/office/drawing/2010/main" val="0"/>
-              </a:ext>
-              <a:ext uri="{96DAC541-7B7A-43D3-8B79-37D633B846F1}">
-                <asvg:svgBlip xmlns:asvg="http://schemas.microsoft.com/office/drawing/2016/SVG/main" r:embed="rId6"/>
-              </a:ext>
-            </a:extLst>
-          </a:blip>
-          <a:stretch>
-            <a:fillRect/>
-          </a:stretch>
-        </p:blipFill>
-        <p:spPr>
-          <a:xfrm rot="5689775">
-            <a:off x="7618904" y="2159922"/>
-            <a:ext cx="4373944" cy="4584270"/>
-          </a:xfrm>
-          <a:prstGeom prst="rect">
-            <a:avLst/>
-          </a:prstGeom>
-        </p:spPr>
-      </p:pic>
     </p:spTree>
     <p:extLst>
       <p:ext uri="{BB962C8B-B14F-4D97-AF65-F5344CB8AC3E}">
-        <p14:creationId xmlns:p14="http://schemas.microsoft.com/office/powerpoint/2010/main" val="2129238174"/>
+        <p14:creationId xmlns:p14="http://schemas.microsoft.com/office/powerpoint/2010/main" val="114040660"/>
       </p:ext>
     </p:extLst>
   </p:cSld>
@@ -4937,108 +5690,12 @@
           <a:chExt cx="0" cy="0"/>
         </a:xfrm>
       </p:grpSpPr>
-      <p:pic>
-        <p:nvPicPr>
-          <p:cNvPr id="3" name="logo">
-            <a:extLst>
-              <a:ext uri="{FF2B5EF4-FFF2-40B4-BE49-F238E27FC236}">
-                <a16:creationId xmlns:a16="http://schemas.microsoft.com/office/drawing/2014/main" id="{CB7069CB-A915-E9BA-0362-5B269561515F}"/>
-              </a:ext>
-            </a:extLst>
-          </p:cNvPr>
-          <p:cNvPicPr>
-            <a:picLocks noChangeAspect="1"/>
-          </p:cNvPicPr>
-          <p:nvPr/>
-        </p:nvPicPr>
-        <p:blipFill>
-          <a:blip r:embed="rId2">
-            <a:extLst>
-              <a:ext uri="{28A0092B-C50C-407E-A947-70E740481C1C}">
-                <a14:useLocalDpi xmlns:a14="http://schemas.microsoft.com/office/drawing/2010/main" val="0"/>
-              </a:ext>
-            </a:extLst>
-          </a:blip>
-          <a:stretch>
-            <a:fillRect/>
-          </a:stretch>
-        </p:blipFill>
-        <p:spPr>
-          <a:xfrm>
-            <a:off x="8765519" y="3350269"/>
-            <a:ext cx="3426481" cy="3473976"/>
-          </a:xfrm>
-          <a:prstGeom prst="rect">
-            <a:avLst/>
-          </a:prstGeom>
-        </p:spPr>
-      </p:pic>
-      <p:sp>
-        <p:nvSpPr>
-          <p:cNvPr id="17" name="Rectángulo 16">
-            <a:extLst>
-              <a:ext uri="{FF2B5EF4-FFF2-40B4-BE49-F238E27FC236}">
-                <a16:creationId xmlns:a16="http://schemas.microsoft.com/office/drawing/2014/main" id="{A8B8087A-F01D-7BF2-7B9B-803D42A31868}"/>
-              </a:ext>
-            </a:extLst>
-          </p:cNvPr>
-          <p:cNvSpPr/>
-          <p:nvPr/>
-        </p:nvSpPr>
-        <p:spPr>
-          <a:xfrm>
-            <a:off x="0" y="0"/>
-            <a:ext cx="12192000" cy="6858000"/>
-          </a:xfrm>
-          <a:prstGeom prst="rect">
-            <a:avLst/>
-          </a:prstGeom>
-          <a:solidFill>
-            <a:schemeClr val="tx1">
-              <a:alpha val="70000"/>
-            </a:schemeClr>
-          </a:solidFill>
-          <a:ln>
-            <a:noFill/>
-          </a:ln>
-        </p:spPr>
-        <p:style>
-          <a:lnRef idx="2">
-            <a:schemeClr val="accent1">
-              <a:shade val="50000"/>
-            </a:schemeClr>
-          </a:lnRef>
-          <a:fillRef idx="1">
-            <a:schemeClr val="accent1"/>
-          </a:fillRef>
-          <a:effectRef idx="0">
-            <a:schemeClr val="accent1"/>
-          </a:effectRef>
-          <a:fontRef idx="minor">
-            <a:schemeClr val="lt1"/>
-          </a:fontRef>
-        </p:style>
-        <p:txBody>
-          <a:bodyPr rtlCol="0" anchor="ctr"/>
-          <a:lstStyle/>
-          <a:p>
-            <a:pPr algn="ctr"/>
-            <a:endParaRPr lang="es-CO">
-              <a:ln>
-                <a:solidFill>
-                  <a:schemeClr val="accent1"/>
-                </a:solidFill>
-              </a:ln>
-            </a:endParaRPr>
-          </a:p>
-        </p:txBody>
-      </p:sp>
-      <p:sp>
-        <p:nvSpPr>
-          <p:cNvPr id="10" name="CuadroTexto 9">
-            <a:extLst>
-              <a:ext uri="{FF2B5EF4-FFF2-40B4-BE49-F238E27FC236}">
-                <a16:creationId xmlns:a16="http://schemas.microsoft.com/office/drawing/2014/main" id="{C69317F1-3BC8-CC98-94BA-756E40E92416}"/>
+      <p:sp>
+        <p:nvSpPr>
+          <p:cNvPr id="2" name="CuadroTexto 1">
+            <a:extLst>
+              <a:ext uri="{FF2B5EF4-FFF2-40B4-BE49-F238E27FC236}">
+                <a16:creationId xmlns:a16="http://schemas.microsoft.com/office/drawing/2014/main" id="{4BE15536-8584-618A-A38B-56A2C9028692}"/>
               </a:ext>
             </a:extLst>
           </p:cNvPr>
@@ -5047,8 +5704,8 @@
         </p:nvSpPr>
         <p:spPr>
           <a:xfrm>
-            <a:off x="1280159" y="5503453"/>
-            <a:ext cx="9924288" cy="1200329"/>
+            <a:off x="638175" y="900469"/>
+            <a:ext cx="11168342" cy="5262979"/>
           </a:xfrm>
           <a:prstGeom prst="rect">
             <a:avLst/>
@@ -5056,76 +5713,142 @@
           <a:noFill/>
         </p:spPr>
         <p:txBody>
-          <a:bodyPr wrap="square">
+          <a:bodyPr wrap="square" rtlCol="0">
             <a:spAutoFit/>
           </a:bodyPr>
           <a:lstStyle/>
           <a:p>
-            <a:pPr algn="ctr"/>
-            <a:r>
-              <a:rPr lang="es-MX" sz="3600" dirty="0">
-                <a:solidFill>
-                  <a:schemeClr val="bg1"/>
+            <a:pPr algn="just"/>
+            <a:r>
+              <a:rPr lang="es-MX" sz="2800" dirty="0"/>
+              <a:t>Teniendo en cuenta la necesidad de brindar alternativas que permitan la gestión de casos de asesoría vencidos que se evalúan por el sistema (</a:t>
+            </a:r>
+            <a:r>
+              <a:rPr lang="es-MX" sz="2800" b="1" dirty="0">
+                <a:solidFill>
+                  <a:srgbClr val="D68843"/>
                 </a:solidFill>
               </a:rPr>
-              <a:t>Rellene los campo con las notas correspondientes y el debido concepto y presione </a:t>
-            </a:r>
-            <a:r>
-              <a:rPr lang="es-MX" sz="3600" b="1" dirty="0">
-                <a:solidFill>
-                  <a:schemeClr val="accent4">
-                    <a:lumMod val="60000"/>
-                    <a:lumOff val="40000"/>
-                  </a:schemeClr>
+              <a:t>Cerrado - sistema</a:t>
+            </a:r>
+            <a:r>
+              <a:rPr lang="es-MX" sz="2800" dirty="0"/>
+              <a:t>) ahora IURIS permite a los docentes, director general y director administrativo volver a </a:t>
+            </a:r>
+            <a:r>
+              <a:rPr lang="es-MX" sz="2800" b="1" dirty="0">
+                <a:solidFill>
+                  <a:srgbClr val="D68843"/>
                 </a:solidFill>
               </a:rPr>
-              <a:t>Enviar</a:t>
-            </a:r>
-            <a:endParaRPr lang="es-MX" sz="3600" b="1" i="1" dirty="0">
-              <a:solidFill>
-                <a:schemeClr val="accent4">
-                  <a:lumMod val="60000"/>
-                  <a:lumOff val="40000"/>
-                </a:schemeClr>
-              </a:solidFill>
-            </a:endParaRPr>
-          </a:p>
-        </p:txBody>
-      </p:sp>
-      <p:pic>
-        <p:nvPicPr>
-          <p:cNvPr id="9" name="Imagen 8">
-            <a:extLst>
-              <a:ext uri="{FF2B5EF4-FFF2-40B4-BE49-F238E27FC236}">
-                <a16:creationId xmlns:a16="http://schemas.microsoft.com/office/drawing/2014/main" id="{148AB8EB-5199-7878-EFD1-0403F7A0D122}"/>
-              </a:ext>
-            </a:extLst>
-          </p:cNvPr>
-          <p:cNvPicPr>
-            <a:picLocks noChangeAspect="1"/>
-          </p:cNvPicPr>
-          <p:nvPr/>
-        </p:nvPicPr>
-        <p:blipFill>
-          <a:blip r:embed="rId3"/>
-          <a:stretch>
-            <a:fillRect/>
-          </a:stretch>
-        </p:blipFill>
-        <p:spPr>
-          <a:xfrm>
-            <a:off x="2954613" y="855968"/>
-            <a:ext cx="5810906" cy="4613730"/>
-          </a:xfrm>
-          <a:prstGeom prst="rect">
-            <a:avLst/>
-          </a:prstGeom>
-        </p:spPr>
-      </p:pic>
+              <a:t>Evaluar </a:t>
+            </a:r>
+            <a:r>
+              <a:rPr lang="es-MX" sz="2800" dirty="0">
+                <a:solidFill>
+                  <a:srgbClr val="D68843"/>
+                </a:solidFill>
+              </a:rPr>
+              <a:t>y </a:t>
+            </a:r>
+            <a:r>
+              <a:rPr lang="es-MX" sz="2800" b="1" dirty="0">
+                <a:solidFill>
+                  <a:srgbClr val="D68843"/>
+                </a:solidFill>
+              </a:rPr>
+              <a:t>Cerrar</a:t>
+            </a:r>
+            <a:r>
+              <a:rPr lang="es-MX" sz="2800" dirty="0">
+                <a:solidFill>
+                  <a:srgbClr val="D68843"/>
+                </a:solidFill>
+              </a:rPr>
+              <a:t> </a:t>
+            </a:r>
+            <a:r>
+              <a:rPr lang="es-MX" sz="2800" dirty="0"/>
+              <a:t>estos casos teniendo en cuenta los siguientes parámetros</a:t>
+            </a:r>
+            <a:r>
+              <a:rPr lang="es-MX" sz="2800" b="1" dirty="0"/>
+              <a:t>.</a:t>
+            </a:r>
+          </a:p>
+          <a:p>
+            <a:pPr marL="514350" indent="-514350" algn="just">
+              <a:buFont typeface="+mj-lt"/>
+              <a:buAutoNum type="arabicPeriod"/>
+            </a:pPr>
+            <a:r>
+              <a:rPr lang="es-MX" sz="2800" dirty="0"/>
+              <a:t>Si el caso está </a:t>
+            </a:r>
+            <a:r>
+              <a:rPr lang="es-MX" sz="2800" b="1" dirty="0">
+                <a:solidFill>
+                  <a:srgbClr val="D68843"/>
+                </a:solidFill>
+              </a:rPr>
+              <a:t>Cerrado - sistema </a:t>
+            </a:r>
+            <a:r>
+              <a:rPr lang="es-MX" sz="2800" dirty="0"/>
+              <a:t>y </a:t>
+            </a:r>
+            <a:r>
+              <a:rPr lang="es-MX" sz="2800" b="1" dirty="0">
+                <a:solidFill>
+                  <a:srgbClr val="D68843"/>
+                </a:solidFill>
+              </a:rPr>
+              <a:t>NO</a:t>
+            </a:r>
+            <a:r>
+              <a:rPr lang="es-MX" sz="2800" dirty="0"/>
+              <a:t> fue enviado a solicitud de cierre podrá asignar una nota de 0 a 3. </a:t>
+            </a:r>
+          </a:p>
+          <a:p>
+            <a:pPr marL="514350" indent="-514350" algn="just">
+              <a:buFont typeface="+mj-lt"/>
+              <a:buAutoNum type="arabicPeriod"/>
+            </a:pPr>
+            <a:r>
+              <a:rPr lang="es-MX" sz="2800" dirty="0"/>
+              <a:t>Si el caso está </a:t>
+            </a:r>
+            <a:r>
+              <a:rPr lang="es-MX" sz="2800" b="1" dirty="0">
+                <a:solidFill>
+                  <a:srgbClr val="D68843"/>
+                </a:solidFill>
+              </a:rPr>
+              <a:t>Cerrado - sistema </a:t>
+            </a:r>
+            <a:r>
+              <a:rPr lang="es-MX" sz="2800" dirty="0"/>
+              <a:t>y fue enviado a solicitud de cierre podrá asignar una nota de 0 a 5. </a:t>
+            </a:r>
+          </a:p>
+          <a:p>
+            <a:pPr algn="just"/>
+            <a:endParaRPr lang="es-MX" sz="2800" dirty="0"/>
+          </a:p>
+          <a:p>
+            <a:pPr algn="just"/>
+            <a:r>
+              <a:rPr lang="es-MX" sz="2800" dirty="0"/>
+              <a:t>Tenga en cuenta que la nueva nota se asignará al corte en el cual se venció el caso.</a:t>
+            </a:r>
+          </a:p>
+        </p:txBody>
+      </p:sp>
     </p:spTree>
     <p:extLst>
       <p:ext uri="{BB962C8B-B14F-4D97-AF65-F5344CB8AC3E}">
-        <p14:creationId xmlns:p14="http://schemas.microsoft.com/office/powerpoint/2010/main" val="1720992572"/>
+        <p14:creationId xmlns:p14="http://schemas.microsoft.com/office/powerpoint/2010/main" val="482223614"/>
       </p:ext>
     </p:extLst>
   </p:cSld>
@@ -5152,12 +5875,69 @@
           <a:chExt cx="0" cy="0"/>
         </a:xfrm>
       </p:grpSpPr>
+      <p:sp>
+        <p:nvSpPr>
+          <p:cNvPr id="2" name="CuadroTexto 1">
+            <a:extLst>
+              <a:ext uri="{FF2B5EF4-FFF2-40B4-BE49-F238E27FC236}">
+                <a16:creationId xmlns:a16="http://schemas.microsoft.com/office/drawing/2014/main" id="{4BE15536-8584-618A-A38B-56A2C9028692}"/>
+              </a:ext>
+            </a:extLst>
+          </p:cNvPr>
+          <p:cNvSpPr txBox="1"/>
+          <p:nvPr/>
+        </p:nvSpPr>
+        <p:spPr>
+          <a:xfrm>
+            <a:off x="461682" y="300852"/>
+            <a:ext cx="11268635" cy="1754326"/>
+          </a:xfrm>
+          <a:prstGeom prst="rect">
+            <a:avLst/>
+          </a:prstGeom>
+          <a:noFill/>
+        </p:spPr>
+        <p:txBody>
+          <a:bodyPr wrap="square" rtlCol="0">
+            <a:spAutoFit/>
+          </a:bodyPr>
+          <a:lstStyle/>
+          <a:p>
+            <a:pPr algn="ctr"/>
+            <a:r>
+              <a:rPr lang="es-MX" sz="3600" dirty="0"/>
+              <a:t>Para </a:t>
+            </a:r>
+            <a:r>
+              <a:rPr lang="es-MX" sz="3600" b="1" dirty="0"/>
+              <a:t>Evaluar y cerrar caso </a:t>
+            </a:r>
+            <a:r>
+              <a:rPr lang="es-MX" sz="3600" dirty="0"/>
+              <a:t>en administración del caso, pestaña </a:t>
+            </a:r>
+            <a:r>
+              <a:rPr lang="es-MX" sz="3600" b="1" i="1" dirty="0"/>
+              <a:t>Cierre de caso </a:t>
+            </a:r>
+            <a:r>
+              <a:rPr lang="es-MX" sz="3600" dirty="0"/>
+              <a:t>de clic en el botón </a:t>
+            </a:r>
+            <a:r>
+              <a:rPr lang="es-MX" sz="3600" b="1" i="1" dirty="0"/>
+              <a:t>Volver a evaluar y cerrar caso</a:t>
+            </a:r>
+            <a:endParaRPr lang="es-CO" sz="2000" dirty="0"/>
+          </a:p>
+        </p:txBody>
+      </p:sp>
       <p:pic>
         <p:nvPicPr>
-          <p:cNvPr id="3" name="logo">
-            <a:extLst>
-              <a:ext uri="{FF2B5EF4-FFF2-40B4-BE49-F238E27FC236}">
-                <a16:creationId xmlns:a16="http://schemas.microsoft.com/office/drawing/2014/main" id="{CB7069CB-A915-E9BA-0362-5B269561515F}"/>
+          <p:cNvPr id="5" name="Imagen 4">
+            <a:extLst>
+              <a:ext uri="{FF2B5EF4-FFF2-40B4-BE49-F238E27FC236}">
+                <a16:creationId xmlns:a16="http://schemas.microsoft.com/office/drawing/2014/main" id="{0AFBDE35-35CA-75AC-DD52-27FE1D7052A7}"/>
               </a:ext>
             </a:extLst>
           </p:cNvPr>
@@ -5167,21 +5947,15 @@
           <p:nvPr/>
         </p:nvPicPr>
         <p:blipFill>
-          <a:blip r:embed="rId2">
-            <a:extLst>
-              <a:ext uri="{28A0092B-C50C-407E-A947-70E740481C1C}">
-                <a14:useLocalDpi xmlns:a14="http://schemas.microsoft.com/office/drawing/2010/main" val="0"/>
-              </a:ext>
-            </a:extLst>
-          </a:blip>
+          <a:blip r:embed="rId2"/>
           <a:stretch>
             <a:fillRect/>
           </a:stretch>
         </p:blipFill>
         <p:spPr>
           <a:xfrm>
-            <a:off x="8765519" y="3350269"/>
-            <a:ext cx="3426481" cy="3473976"/>
+            <a:off x="220471" y="2926036"/>
+            <a:ext cx="11751058" cy="1320012"/>
           </a:xfrm>
           <a:prstGeom prst="rect">
             <a:avLst/>
@@ -5190,10 +5964,10 @@
       </p:pic>
       <p:sp>
         <p:nvSpPr>
-          <p:cNvPr id="17" name="Rectángulo 16">
-            <a:extLst>
-              <a:ext uri="{FF2B5EF4-FFF2-40B4-BE49-F238E27FC236}">
-                <a16:creationId xmlns:a16="http://schemas.microsoft.com/office/drawing/2014/main" id="{A8B8087A-F01D-7BF2-7B9B-803D42A31868}"/>
+          <p:cNvPr id="9" name="Rectángulo 8">
+            <a:extLst>
+              <a:ext uri="{FF2B5EF4-FFF2-40B4-BE49-F238E27FC236}">
+                <a16:creationId xmlns:a16="http://schemas.microsoft.com/office/drawing/2014/main" id="{19CE3575-09A8-0984-60D0-CDEE01EEEB27}"/>
               </a:ext>
             </a:extLst>
           </p:cNvPr>
@@ -5202,263 +5976,8 @@
         </p:nvSpPr>
         <p:spPr>
           <a:xfrm>
-            <a:off x="0" y="0"/>
-            <a:ext cx="12192000" cy="6858000"/>
-          </a:xfrm>
-          <a:prstGeom prst="rect">
-            <a:avLst/>
-          </a:prstGeom>
-          <a:solidFill>
-            <a:schemeClr val="tx1">
-              <a:alpha val="70000"/>
-            </a:schemeClr>
-          </a:solidFill>
-          <a:ln>
-            <a:noFill/>
-          </a:ln>
-        </p:spPr>
-        <p:style>
-          <a:lnRef idx="2">
-            <a:schemeClr val="accent1">
-              <a:shade val="50000"/>
-            </a:schemeClr>
-          </a:lnRef>
-          <a:fillRef idx="1">
-            <a:schemeClr val="accent1"/>
-          </a:fillRef>
-          <a:effectRef idx="0">
-            <a:schemeClr val="accent1"/>
-          </a:effectRef>
-          <a:fontRef idx="minor">
-            <a:schemeClr val="lt1"/>
-          </a:fontRef>
-        </p:style>
-        <p:txBody>
-          <a:bodyPr rtlCol="0" anchor="ctr"/>
-          <a:lstStyle/>
-          <a:p>
-            <a:pPr algn="ctr"/>
-            <a:endParaRPr lang="es-CO">
-              <a:ln>
-                <a:solidFill>
-                  <a:schemeClr val="accent1"/>
-                </a:solidFill>
-              </a:ln>
-            </a:endParaRPr>
-          </a:p>
-        </p:txBody>
-      </p:sp>
-      <p:pic>
-        <p:nvPicPr>
-          <p:cNvPr id="6" name="Imagen 5">
-            <a:extLst>
-              <a:ext uri="{FF2B5EF4-FFF2-40B4-BE49-F238E27FC236}">
-                <a16:creationId xmlns:a16="http://schemas.microsoft.com/office/drawing/2014/main" id="{E88D09ED-200D-E71D-7D1B-4F0CB9EB1154}"/>
-              </a:ext>
-            </a:extLst>
-          </p:cNvPr>
-          <p:cNvPicPr>
-            <a:picLocks noChangeAspect="1"/>
-          </p:cNvPicPr>
-          <p:nvPr/>
-        </p:nvPicPr>
-        <p:blipFill>
-          <a:blip r:embed="rId3"/>
-          <a:stretch>
-            <a:fillRect/>
-          </a:stretch>
-        </p:blipFill>
-        <p:spPr>
-          <a:xfrm>
-            <a:off x="49006" y="2373538"/>
-            <a:ext cx="12093988" cy="2110923"/>
-          </a:xfrm>
-          <a:prstGeom prst="rect">
-            <a:avLst/>
-          </a:prstGeom>
-        </p:spPr>
-      </p:pic>
-      <p:sp>
-        <p:nvSpPr>
-          <p:cNvPr id="2" name="CuadroTexto 1">
-            <a:extLst>
-              <a:ext uri="{FF2B5EF4-FFF2-40B4-BE49-F238E27FC236}">
-                <a16:creationId xmlns:a16="http://schemas.microsoft.com/office/drawing/2014/main" id="{4BE15536-8584-618A-A38B-56A2C9028692}"/>
-              </a:ext>
-            </a:extLst>
-          </p:cNvPr>
-          <p:cNvSpPr txBox="1"/>
-          <p:nvPr/>
-        </p:nvSpPr>
-        <p:spPr>
-          <a:xfrm>
-            <a:off x="318426" y="445008"/>
-            <a:ext cx="11268635" cy="7048083"/>
-          </a:xfrm>
-          <a:prstGeom prst="rect">
-            <a:avLst/>
-          </a:prstGeom>
-          <a:noFill/>
-        </p:spPr>
-        <p:txBody>
-          <a:bodyPr wrap="square" rtlCol="0">
-            <a:spAutoFit/>
-          </a:bodyPr>
-          <a:lstStyle/>
-          <a:p>
-            <a:pPr algn="ctr"/>
-            <a:endParaRPr lang="es-MX" sz="3600" dirty="0">
-              <a:solidFill>
-                <a:schemeClr val="bg1"/>
-              </a:solidFill>
-            </a:endParaRPr>
-          </a:p>
-          <a:p>
-            <a:pPr algn="ctr"/>
-            <a:r>
-              <a:rPr lang="es-MX" sz="3600" dirty="0">
-                <a:solidFill>
-                  <a:schemeClr val="bg1"/>
-                </a:solidFill>
-              </a:rPr>
-              <a:t>Para </a:t>
-            </a:r>
-            <a:r>
-              <a:rPr lang="es-MX" sz="3600" b="1" dirty="0">
-                <a:solidFill>
-                  <a:schemeClr val="accent4">
-                    <a:lumMod val="60000"/>
-                    <a:lumOff val="40000"/>
-                  </a:schemeClr>
-                </a:solidFill>
-              </a:rPr>
-              <a:t>Dar de baja</a:t>
-            </a:r>
-            <a:r>
-              <a:rPr lang="es-MX" sz="3600" dirty="0">
-                <a:solidFill>
-                  <a:schemeClr val="bg1"/>
-                </a:solidFill>
-              </a:rPr>
-              <a:t> en administración del caso de clic en el botón </a:t>
-            </a:r>
-            <a:r>
-              <a:rPr lang="es-MX" sz="3600" b="1" i="1" dirty="0">
-                <a:solidFill>
-                  <a:schemeClr val="bg1"/>
-                </a:solidFill>
-              </a:rPr>
-              <a:t>Dar de baja</a:t>
-            </a:r>
-          </a:p>
-          <a:p>
-            <a:pPr algn="ctr"/>
-            <a:endParaRPr lang="es-MX" sz="3600" dirty="0">
-              <a:solidFill>
-                <a:schemeClr val="bg1"/>
-              </a:solidFill>
-            </a:endParaRPr>
-          </a:p>
-          <a:p>
-            <a:pPr algn="ctr"/>
-            <a:endParaRPr lang="es-MX" sz="3600" dirty="0">
-              <a:solidFill>
-                <a:schemeClr val="bg1"/>
-              </a:solidFill>
-            </a:endParaRPr>
-          </a:p>
-          <a:p>
-            <a:pPr algn="ctr"/>
-            <a:endParaRPr lang="es-MX" sz="3600" dirty="0">
-              <a:solidFill>
-                <a:schemeClr val="bg1"/>
-              </a:solidFill>
-            </a:endParaRPr>
-          </a:p>
-          <a:p>
-            <a:pPr algn="ctr"/>
-            <a:endParaRPr lang="es-MX" sz="3600" dirty="0">
-              <a:solidFill>
-                <a:schemeClr val="bg1"/>
-              </a:solidFill>
-            </a:endParaRPr>
-          </a:p>
-          <a:p>
-            <a:pPr algn="ctr"/>
-            <a:endParaRPr lang="es-MX" sz="3600" dirty="0">
-              <a:solidFill>
-                <a:schemeClr val="bg1"/>
-              </a:solidFill>
-            </a:endParaRPr>
-          </a:p>
-          <a:p>
-            <a:pPr algn="ctr"/>
-            <a:endParaRPr lang="es-MX" sz="3600" dirty="0">
-              <a:solidFill>
-                <a:schemeClr val="bg1"/>
-              </a:solidFill>
-            </a:endParaRPr>
-          </a:p>
-          <a:p>
-            <a:pPr algn="ctr"/>
-            <a:endParaRPr lang="es-MX" sz="3600" dirty="0">
-              <a:solidFill>
-                <a:schemeClr val="bg1"/>
-              </a:solidFill>
-            </a:endParaRPr>
-          </a:p>
-          <a:p>
-            <a:pPr algn="ctr"/>
-            <a:endParaRPr lang="es-MX" sz="3600" dirty="0">
-              <a:solidFill>
-                <a:schemeClr val="bg1"/>
-              </a:solidFill>
-            </a:endParaRPr>
-          </a:p>
-          <a:p>
-            <a:pPr algn="ctr"/>
-            <a:endParaRPr lang="es-MX" sz="3600" dirty="0">
-              <a:solidFill>
-                <a:schemeClr val="bg1"/>
-              </a:solidFill>
-            </a:endParaRPr>
-          </a:p>
-          <a:p>
-            <a:r>
-              <a:rPr lang="es-CO" sz="2000" dirty="0" err="1">
-                <a:solidFill>
-                  <a:schemeClr val="bg1"/>
-                </a:solidFill>
-              </a:rPr>
-              <a:t>Amatai</a:t>
-            </a:r>
-            <a:r>
-              <a:rPr lang="es-CO" sz="2000" dirty="0">
-                <a:solidFill>
-                  <a:schemeClr val="bg1"/>
-                </a:solidFill>
-              </a:rPr>
-              <a:t> SAS</a:t>
-            </a:r>
-          </a:p>
-        </p:txBody>
-      </p:sp>
-      <p:sp>
-        <p:nvSpPr>
-          <p:cNvPr id="9" name="Rectángulo 8">
-            <a:extLst>
-              <a:ext uri="{FF2B5EF4-FFF2-40B4-BE49-F238E27FC236}">
-                <a16:creationId xmlns:a16="http://schemas.microsoft.com/office/drawing/2014/main" id="{19CE3575-09A8-0984-60D0-CDEE01EEEB27}"/>
-              </a:ext>
-            </a:extLst>
-          </p:cNvPr>
-          <p:cNvSpPr/>
-          <p:nvPr/>
-        </p:nvSpPr>
-        <p:spPr>
-          <a:xfrm>
-            <a:off x="87005" y="3007481"/>
-            <a:ext cx="3338947" cy="696160"/>
+            <a:off x="8023412" y="3756212"/>
+            <a:ext cx="3882075" cy="489836"/>
           </a:xfrm>
           <a:prstGeom prst="rect">
             <a:avLst/>
@@ -5486,45 +6005,16 @@
           <a:lstStyle/>
           <a:p>
             <a:pPr algn="ctr"/>
-            <a:endParaRPr lang="es-CO"/>
+            <a:endParaRPr lang="es-CO" dirty="0"/>
           </a:p>
         </p:txBody>
       </p:sp>
       <p:pic>
         <p:nvPicPr>
-          <p:cNvPr id="11" name="Imagen 10">
-            <a:extLst>
-              <a:ext uri="{FF2B5EF4-FFF2-40B4-BE49-F238E27FC236}">
-                <a16:creationId xmlns:a16="http://schemas.microsoft.com/office/drawing/2014/main" id="{A19EB478-5B09-1BEA-819C-157C47F50696}"/>
-              </a:ext>
-            </a:extLst>
-          </p:cNvPr>
-          <p:cNvPicPr>
-            <a:picLocks noChangeAspect="1"/>
-          </p:cNvPicPr>
-          <p:nvPr/>
-        </p:nvPicPr>
-        <p:blipFill rotWithShape="1">
-          <a:blip r:embed="rId4"/>
-          <a:srcRect t="34649"/>
-          <a:stretch/>
-        </p:blipFill>
-        <p:spPr>
-          <a:xfrm>
-            <a:off x="318425" y="3007059"/>
-            <a:ext cx="2130959" cy="732442"/>
-          </a:xfrm>
-          <a:prstGeom prst="rect">
-            <a:avLst/>
-          </a:prstGeom>
-        </p:spPr>
-      </p:pic>
-      <p:pic>
-        <p:nvPicPr>
-          <p:cNvPr id="8" name="Gráfico 7" descr="Lupa">
-            <a:extLst>
-              <a:ext uri="{FF2B5EF4-FFF2-40B4-BE49-F238E27FC236}">
-                <a16:creationId xmlns:a16="http://schemas.microsoft.com/office/drawing/2014/main" id="{70287BDA-E56B-9DF6-26A8-A0F53C4766DE}"/>
+          <p:cNvPr id="10" name="Imagen 9">
+            <a:extLst>
+              <a:ext uri="{FF2B5EF4-FFF2-40B4-BE49-F238E27FC236}">
+                <a16:creationId xmlns:a16="http://schemas.microsoft.com/office/drawing/2014/main" id="{53A2EAAA-5EE2-C05E-D295-9FF8055A8272}"/>
               </a:ext>
             </a:extLst>
           </p:cNvPr>
@@ -5534,13 +6024,43 @@
           <p:nvPr/>
         </p:nvPicPr>
         <p:blipFill>
-          <a:blip r:embed="rId5">
+          <a:blip r:embed="rId3"/>
+          <a:stretch>
+            <a:fillRect/>
+          </a:stretch>
+        </p:blipFill>
+        <p:spPr>
+          <a:xfrm>
+            <a:off x="9054249" y="3657600"/>
+            <a:ext cx="2453953" cy="510988"/>
+          </a:xfrm>
+          <a:prstGeom prst="rect">
+            <a:avLst/>
+          </a:prstGeom>
+        </p:spPr>
+      </p:pic>
+      <p:pic>
+        <p:nvPicPr>
+          <p:cNvPr id="8" name="Gráfico 7" descr="Lupa">
+            <a:extLst>
+              <a:ext uri="{FF2B5EF4-FFF2-40B4-BE49-F238E27FC236}">
+                <a16:creationId xmlns:a16="http://schemas.microsoft.com/office/drawing/2014/main" id="{70287BDA-E56B-9DF6-26A8-A0F53C4766DE}"/>
+              </a:ext>
+            </a:extLst>
+          </p:cNvPr>
+          <p:cNvPicPr>
+            <a:picLocks noChangeAspect="1"/>
+          </p:cNvPicPr>
+          <p:nvPr/>
+        </p:nvPicPr>
+        <p:blipFill>
+          <a:blip r:embed="rId4">
             <a:extLst>
               <a:ext uri="{28A0092B-C50C-407E-A947-70E740481C1C}">
                 <a14:useLocalDpi xmlns:a14="http://schemas.microsoft.com/office/drawing/2010/main" val="0"/>
               </a:ext>
               <a:ext uri="{96DAC541-7B7A-43D3-8B79-37D633B846F1}">
-                <asvg:svgBlip xmlns:asvg="http://schemas.microsoft.com/office/drawing/2016/SVG/main" r:embed="rId6"/>
+                <asvg:svgBlip xmlns:asvg="http://schemas.microsoft.com/office/drawing/2016/SVG/main" r:embed="rId5"/>
               </a:ext>
             </a:extLst>
           </a:blip>
@@ -5549,9 +6069,9 @@
           </a:stretch>
         </p:blipFill>
         <p:spPr>
-          <a:xfrm rot="1121602">
-            <a:off x="-379857" y="1674076"/>
-            <a:ext cx="3882034" cy="3952767"/>
+          <a:xfrm rot="5689775">
+            <a:off x="7618904" y="2159922"/>
+            <a:ext cx="4373944" cy="4584270"/>
           </a:xfrm>
           <a:prstGeom prst="rect">
             <a:avLst/>
@@ -5561,7 +6081,7 @@
     </p:spTree>
     <p:extLst>
       <p:ext uri="{BB962C8B-B14F-4D97-AF65-F5344CB8AC3E}">
-        <p14:creationId xmlns:p14="http://schemas.microsoft.com/office/powerpoint/2010/main" val="1830992768"/>
+        <p14:creationId xmlns:p14="http://schemas.microsoft.com/office/powerpoint/2010/main" val="2129238174"/>
       </p:ext>
     </p:extLst>
   </p:cSld>
@@ -5588,42 +6108,6 @@
           <a:chExt cx="0" cy="0"/>
         </a:xfrm>
       </p:grpSpPr>
-      <p:pic>
-        <p:nvPicPr>
-          <p:cNvPr id="3" name="logo">
-            <a:extLst>
-              <a:ext uri="{FF2B5EF4-FFF2-40B4-BE49-F238E27FC236}">
-                <a16:creationId xmlns:a16="http://schemas.microsoft.com/office/drawing/2014/main" id="{CB7069CB-A915-E9BA-0362-5B269561515F}"/>
-              </a:ext>
-            </a:extLst>
-          </p:cNvPr>
-          <p:cNvPicPr>
-            <a:picLocks noChangeAspect="1"/>
-          </p:cNvPicPr>
-          <p:nvPr/>
-        </p:nvPicPr>
-        <p:blipFill>
-          <a:blip r:embed="rId2">
-            <a:extLst>
-              <a:ext uri="{28A0092B-C50C-407E-A947-70E740481C1C}">
-                <a14:useLocalDpi xmlns:a14="http://schemas.microsoft.com/office/drawing/2010/main" val="0"/>
-              </a:ext>
-            </a:extLst>
-          </a:blip>
-          <a:stretch>
-            <a:fillRect/>
-          </a:stretch>
-        </p:blipFill>
-        <p:spPr>
-          <a:xfrm>
-            <a:off x="8765519" y="3350269"/>
-            <a:ext cx="3426481" cy="3473976"/>
-          </a:xfrm>
-          <a:prstGeom prst="rect">
-            <a:avLst/>
-          </a:prstGeom>
-        </p:spPr>
-      </p:pic>
       <p:sp>
         <p:nvSpPr>
           <p:cNvPr id="17" name="Rectángulo 16">
@@ -5638,15 +6122,15 @@
         </p:nvSpPr>
         <p:spPr>
           <a:xfrm>
-            <a:off x="0" y="0"/>
-            <a:ext cx="12192000" cy="6858000"/>
+            <a:off x="0" y="5095874"/>
+            <a:ext cx="8943975" cy="1762125"/>
           </a:xfrm>
           <a:prstGeom prst="rect">
             <a:avLst/>
           </a:prstGeom>
           <a:solidFill>
             <a:schemeClr val="tx1">
-              <a:alpha val="70000"/>
+              <a:alpha val="0"/>
             </a:schemeClr>
           </a:solidFill>
           <a:ln>
@@ -5674,7 +6158,7 @@
           <a:lstStyle/>
           <a:p>
             <a:pPr algn="ctr"/>
-            <a:endParaRPr lang="es-CO">
+            <a:endParaRPr lang="es-CO" dirty="0">
               <a:ln>
                 <a:solidFill>
                   <a:schemeClr val="accent1"/>
@@ -5684,12 +6168,53 @@
           </a:p>
         </p:txBody>
       </p:sp>
+      <p:sp>
+        <p:nvSpPr>
+          <p:cNvPr id="10" name="CuadroTexto 9">
+            <a:extLst>
+              <a:ext uri="{FF2B5EF4-FFF2-40B4-BE49-F238E27FC236}">
+                <a16:creationId xmlns:a16="http://schemas.microsoft.com/office/drawing/2014/main" id="{C69317F1-3BC8-CC98-94BA-756E40E92416}"/>
+              </a:ext>
+            </a:extLst>
+          </p:cNvPr>
+          <p:cNvSpPr txBox="1"/>
+          <p:nvPr/>
+        </p:nvSpPr>
+        <p:spPr>
+          <a:xfrm>
+            <a:off x="861059" y="5399755"/>
+            <a:ext cx="9924288" cy="1200329"/>
+          </a:xfrm>
+          <a:prstGeom prst="rect">
+            <a:avLst/>
+          </a:prstGeom>
+          <a:noFill/>
+        </p:spPr>
+        <p:txBody>
+          <a:bodyPr wrap="square">
+            <a:spAutoFit/>
+          </a:bodyPr>
+          <a:lstStyle/>
+          <a:p>
+            <a:pPr algn="ctr"/>
+            <a:r>
+              <a:rPr lang="es-MX" sz="3600" dirty="0"/>
+              <a:t>Rellene los campo con las notas correspondientes y el debido concepto y presione </a:t>
+            </a:r>
+            <a:r>
+              <a:rPr lang="es-MX" sz="3600" b="1" dirty="0"/>
+              <a:t>Enviar</a:t>
+            </a:r>
+            <a:endParaRPr lang="es-MX" sz="3600" b="1" i="1" dirty="0"/>
+          </a:p>
+        </p:txBody>
+      </p:sp>
       <p:pic>
         <p:nvPicPr>
-          <p:cNvPr id="5" name="Imagen 4">
-            <a:extLst>
-              <a:ext uri="{FF2B5EF4-FFF2-40B4-BE49-F238E27FC236}">
-                <a16:creationId xmlns:a16="http://schemas.microsoft.com/office/drawing/2014/main" id="{BA4C5974-D310-4C4E-4C92-272A535AA142}"/>
+          <p:cNvPr id="9" name="Imagen 8">
+            <a:extLst>
+              <a:ext uri="{FF2B5EF4-FFF2-40B4-BE49-F238E27FC236}">
+                <a16:creationId xmlns:a16="http://schemas.microsoft.com/office/drawing/2014/main" id="{148AB8EB-5199-7878-EFD1-0403F7A0D122}"/>
               </a:ext>
             </a:extLst>
           </p:cNvPr>
@@ -5699,15 +6224,15 @@
           <p:nvPr/>
         </p:nvPicPr>
         <p:blipFill>
-          <a:blip r:embed="rId3"/>
+          <a:blip r:embed="rId2"/>
           <a:stretch>
             <a:fillRect/>
           </a:stretch>
         </p:blipFill>
         <p:spPr>
           <a:xfrm>
-            <a:off x="3605555" y="231425"/>
-            <a:ext cx="5273497" cy="5151566"/>
+            <a:off x="1577932" y="1549711"/>
+            <a:ext cx="4657691" cy="3698103"/>
           </a:xfrm>
           <a:prstGeom prst="rect">
             <a:avLst/>
@@ -5716,10 +6241,10 @@
       </p:pic>
       <p:sp>
         <p:nvSpPr>
-          <p:cNvPr id="10" name="CuadroTexto 9">
-            <a:extLst>
-              <a:ext uri="{FF2B5EF4-FFF2-40B4-BE49-F238E27FC236}">
-                <a16:creationId xmlns:a16="http://schemas.microsoft.com/office/drawing/2014/main" id="{C69317F1-3BC8-CC98-94BA-756E40E92416}"/>
+          <p:cNvPr id="2" name="CuadroTexto 1">
+            <a:extLst>
+              <a:ext uri="{FF2B5EF4-FFF2-40B4-BE49-F238E27FC236}">
+                <a16:creationId xmlns:a16="http://schemas.microsoft.com/office/drawing/2014/main" id="{AF724902-20D6-3D3C-6AAC-C2E7C4E58A8C}"/>
               </a:ext>
             </a:extLst>
           </p:cNvPr>
@@ -5728,7 +6253,7 @@
         </p:nvSpPr>
         <p:spPr>
           <a:xfrm>
-            <a:off x="1280159" y="5503453"/>
+            <a:off x="1273479" y="170900"/>
             <a:ext cx="9924288" cy="1200329"/>
           </a:xfrm>
           <a:prstGeom prst="rect">
@@ -5744,42 +6269,108 @@
           <a:p>
             <a:pPr algn="ctr"/>
             <a:r>
-              <a:rPr lang="es-MX" sz="3600" dirty="0">
-                <a:solidFill>
-                  <a:schemeClr val="bg1"/>
-                </a:solidFill>
-              </a:rPr>
-              <a:t>Ingrese una descripción y de clic en botón </a:t>
-            </a:r>
-          </a:p>
+              <a:rPr lang="es-MX" sz="3600" dirty="0"/>
+              <a:t>Si el expediente fue enviado a cierre el sistema le mostrará el siguiente formulario</a:t>
+            </a:r>
+            <a:endParaRPr lang="es-MX" sz="3600" b="1" i="1" dirty="0"/>
+          </a:p>
+        </p:txBody>
+      </p:sp>
+      <p:sp>
+        <p:nvSpPr>
+          <p:cNvPr id="11" name="Flecha: hacia la izquierda 10">
+            <a:extLst>
+              <a:ext uri="{FF2B5EF4-FFF2-40B4-BE49-F238E27FC236}">
+                <a16:creationId xmlns:a16="http://schemas.microsoft.com/office/drawing/2014/main" id="{E1E1555B-E540-70DD-68BF-D433A13A7A76}"/>
+              </a:ext>
+            </a:extLst>
+          </p:cNvPr>
+          <p:cNvSpPr/>
+          <p:nvPr/>
+        </p:nvSpPr>
+        <p:spPr>
+          <a:xfrm>
+            <a:off x="4934401" y="1559934"/>
+            <a:ext cx="2043953" cy="598756"/>
+          </a:xfrm>
+          <a:prstGeom prst="leftArrow">
+            <a:avLst/>
+          </a:prstGeom>
+          <a:solidFill>
+            <a:srgbClr val="268C91"/>
+          </a:solidFill>
+          <a:ln>
+            <a:solidFill>
+              <a:srgbClr val="268C91"/>
+            </a:solidFill>
+          </a:ln>
+        </p:spPr>
+        <p:style>
+          <a:lnRef idx="2">
+            <a:schemeClr val="accent1">
+              <a:shade val="15000"/>
+            </a:schemeClr>
+          </a:lnRef>
+          <a:fillRef idx="1">
+            <a:schemeClr val="accent1"/>
+          </a:fillRef>
+          <a:effectRef idx="0">
+            <a:schemeClr val="accent1"/>
+          </a:effectRef>
+          <a:fontRef idx="minor">
+            <a:schemeClr val="lt1"/>
+          </a:fontRef>
+        </p:style>
+        <p:txBody>
+          <a:bodyPr rtlCol="0" anchor="ctr"/>
+          <a:lstStyle/>
           <a:p>
             <a:pPr algn="ctr"/>
-            <a:r>
-              <a:rPr lang="es-MX" sz="3600" dirty="0">
-                <a:solidFill>
-                  <a:schemeClr val="accent4">
-                    <a:lumMod val="60000"/>
-                    <a:lumOff val="40000"/>
-                  </a:schemeClr>
-                </a:solidFill>
-              </a:rPr>
-              <a:t>Si, dar de baja</a:t>
-            </a:r>
-            <a:endParaRPr lang="es-MX" sz="3600" b="1" i="1" dirty="0">
-              <a:solidFill>
-                <a:schemeClr val="accent4">
-                  <a:lumMod val="60000"/>
-                  <a:lumOff val="40000"/>
-                </a:schemeClr>
-              </a:solidFill>
-            </a:endParaRPr>
+            <a:endParaRPr lang="es-CO"/>
+          </a:p>
+        </p:txBody>
+      </p:sp>
+      <p:sp>
+        <p:nvSpPr>
+          <p:cNvPr id="12" name="CuadroTexto 11">
+            <a:extLst>
+              <a:ext uri="{FF2B5EF4-FFF2-40B4-BE49-F238E27FC236}">
+                <a16:creationId xmlns:a16="http://schemas.microsoft.com/office/drawing/2014/main" id="{9D0BEF1D-198B-D1FF-1876-470AB6F5E43E}"/>
+              </a:ext>
+            </a:extLst>
+          </p:cNvPr>
+          <p:cNvSpPr txBox="1"/>
+          <p:nvPr/>
+        </p:nvSpPr>
+        <p:spPr>
+          <a:xfrm>
+            <a:off x="6453187" y="1954331"/>
+            <a:ext cx="4981575" cy="954107"/>
+          </a:xfrm>
+          <a:prstGeom prst="rect">
+            <a:avLst/>
+          </a:prstGeom>
+          <a:noFill/>
+        </p:spPr>
+        <p:txBody>
+          <a:bodyPr wrap="square">
+            <a:spAutoFit/>
+          </a:bodyPr>
+          <a:lstStyle/>
+          <a:p>
+            <a:pPr algn="ctr"/>
+            <a:r>
+              <a:rPr lang="es-MX" sz="2800" dirty="0"/>
+              <a:t>Indica el corte al que se asignará la nota</a:t>
+            </a:r>
+            <a:endParaRPr lang="es-MX" sz="2800" b="1" i="1" dirty="0"/>
           </a:p>
         </p:txBody>
       </p:sp>
     </p:spTree>
     <p:extLst>
       <p:ext uri="{BB962C8B-B14F-4D97-AF65-F5344CB8AC3E}">
-        <p14:creationId xmlns:p14="http://schemas.microsoft.com/office/powerpoint/2010/main" val="1612107509"/>
+        <p14:creationId xmlns:p14="http://schemas.microsoft.com/office/powerpoint/2010/main" val="1720992572"/>
       </p:ext>
     </p:extLst>
   </p:cSld>
@@ -5806,42 +6397,6 @@
           <a:chExt cx="0" cy="0"/>
         </a:xfrm>
       </p:grpSpPr>
-      <p:pic>
-        <p:nvPicPr>
-          <p:cNvPr id="3" name="logo">
-            <a:extLst>
-              <a:ext uri="{FF2B5EF4-FFF2-40B4-BE49-F238E27FC236}">
-                <a16:creationId xmlns:a16="http://schemas.microsoft.com/office/drawing/2014/main" id="{CB7069CB-A915-E9BA-0362-5B269561515F}"/>
-              </a:ext>
-            </a:extLst>
-          </p:cNvPr>
-          <p:cNvPicPr>
-            <a:picLocks noChangeAspect="1"/>
-          </p:cNvPicPr>
-          <p:nvPr/>
-        </p:nvPicPr>
-        <p:blipFill>
-          <a:blip r:embed="rId2">
-            <a:extLst>
-              <a:ext uri="{28A0092B-C50C-407E-A947-70E740481C1C}">
-                <a14:useLocalDpi xmlns:a14="http://schemas.microsoft.com/office/drawing/2010/main" val="0"/>
-              </a:ext>
-            </a:extLst>
-          </a:blip>
-          <a:stretch>
-            <a:fillRect/>
-          </a:stretch>
-        </p:blipFill>
-        <p:spPr>
-          <a:xfrm>
-            <a:off x="8765519" y="3350269"/>
-            <a:ext cx="3426481" cy="3473976"/>
-          </a:xfrm>
-          <a:prstGeom prst="rect">
-            <a:avLst/>
-          </a:prstGeom>
-        </p:spPr>
-      </p:pic>
       <p:sp>
         <p:nvSpPr>
           <p:cNvPr id="17" name="Rectángulo 16">
@@ -5856,15 +6411,15 @@
         </p:nvSpPr>
         <p:spPr>
           <a:xfrm>
-            <a:off x="0" y="0"/>
-            <a:ext cx="12192000" cy="6858000"/>
+            <a:off x="0" y="5095874"/>
+            <a:ext cx="8943975" cy="1762125"/>
           </a:xfrm>
           <a:prstGeom prst="rect">
             <a:avLst/>
           </a:prstGeom>
           <a:solidFill>
             <a:schemeClr val="tx1">
-              <a:alpha val="70000"/>
+              <a:alpha val="0"/>
             </a:schemeClr>
           </a:solidFill>
           <a:ln>
@@ -5892,7 +6447,7 @@
           <a:lstStyle/>
           <a:p>
             <a:pPr algn="ctr"/>
-            <a:endParaRPr lang="es-CO">
+            <a:endParaRPr lang="es-CO" dirty="0">
               <a:ln>
                 <a:solidFill>
                   <a:schemeClr val="accent1"/>
@@ -5904,10 +6459,10 @@
       </p:sp>
       <p:sp>
         <p:nvSpPr>
-          <p:cNvPr id="2" name="CuadroTexto 1">
-            <a:extLst>
-              <a:ext uri="{FF2B5EF4-FFF2-40B4-BE49-F238E27FC236}">
-                <a16:creationId xmlns:a16="http://schemas.microsoft.com/office/drawing/2014/main" id="{4BE15536-8584-618A-A38B-56A2C9028692}"/>
+          <p:cNvPr id="10" name="CuadroTexto 9">
+            <a:extLst>
+              <a:ext uri="{FF2B5EF4-FFF2-40B4-BE49-F238E27FC236}">
+                <a16:creationId xmlns:a16="http://schemas.microsoft.com/office/drawing/2014/main" id="{C69317F1-3BC8-CC98-94BA-756E40E92416}"/>
               </a:ext>
             </a:extLst>
           </p:cNvPr>
@@ -5916,8 +6471,8 @@
         </p:nvSpPr>
         <p:spPr>
           <a:xfrm>
-            <a:off x="318426" y="445008"/>
-            <a:ext cx="11268635" cy="7048083"/>
+            <a:off x="5754220" y="4263625"/>
+            <a:ext cx="6315075" cy="1754326"/>
           </a:xfrm>
           <a:prstGeom prst="rect">
             <a:avLst/>
@@ -5925,167 +6480,78 @@
           <a:noFill/>
         </p:spPr>
         <p:txBody>
-          <a:bodyPr wrap="square" rtlCol="0">
+          <a:bodyPr wrap="square">
             <a:spAutoFit/>
           </a:bodyPr>
           <a:lstStyle/>
           <a:p>
+            <a:r>
+              <a:rPr lang="es-MX" sz="3600" dirty="0"/>
+              <a:t>Rellene los campos con las notas correspondientes y el debido concepto y presione </a:t>
+            </a:r>
+            <a:r>
+              <a:rPr lang="es-MX" sz="3600" b="1" dirty="0"/>
+              <a:t>Enviar</a:t>
+            </a:r>
+            <a:endParaRPr lang="es-MX" sz="3600" b="1" i="1" dirty="0"/>
+          </a:p>
+        </p:txBody>
+      </p:sp>
+      <p:sp>
+        <p:nvSpPr>
+          <p:cNvPr id="2" name="CuadroTexto 1">
+            <a:extLst>
+              <a:ext uri="{FF2B5EF4-FFF2-40B4-BE49-F238E27FC236}">
+                <a16:creationId xmlns:a16="http://schemas.microsoft.com/office/drawing/2014/main" id="{AF724902-20D6-3D3C-6AAC-C2E7C4E58A8C}"/>
+              </a:ext>
+            </a:extLst>
+          </p:cNvPr>
+          <p:cNvSpPr txBox="1"/>
+          <p:nvPr/>
+        </p:nvSpPr>
+        <p:spPr>
+          <a:xfrm>
+            <a:off x="1273479" y="170900"/>
+            <a:ext cx="9924288" cy="1200329"/>
+          </a:xfrm>
+          <a:prstGeom prst="rect">
+            <a:avLst/>
+          </a:prstGeom>
+          <a:noFill/>
+        </p:spPr>
+        <p:txBody>
+          <a:bodyPr wrap="square">
+            <a:spAutoFit/>
+          </a:bodyPr>
+          <a:lstStyle/>
+          <a:p>
             <a:pPr algn="ctr"/>
-            <a:endParaRPr lang="es-MX" sz="3600" dirty="0">
-              <a:solidFill>
-                <a:schemeClr val="bg1"/>
-              </a:solidFill>
-            </a:endParaRPr>
-          </a:p>
-          <a:p>
-            <a:pPr algn="ctr"/>
-            <a:r>
-              <a:rPr lang="es-MX" sz="3600" dirty="0">
-                <a:solidFill>
-                  <a:schemeClr val="bg1"/>
+            <a:r>
+              <a:rPr lang="es-MX" sz="3600" dirty="0"/>
+              <a:t>Si el expediente </a:t>
+            </a:r>
+            <a:r>
+              <a:rPr lang="es-MX" sz="3600" b="1" dirty="0">
+                <a:solidFill>
+                  <a:srgbClr val="D68843"/>
                 </a:solidFill>
               </a:rPr>
-              <a:t>Para poner en </a:t>
-            </a:r>
-            <a:r>
-              <a:rPr lang="es-MX" sz="3600" b="1" dirty="0">
-                <a:solidFill>
-                  <a:schemeClr val="accent4">
-                    <a:lumMod val="60000"/>
-                    <a:lumOff val="40000"/>
-                  </a:schemeClr>
-                </a:solidFill>
-              </a:rPr>
-              <a:t>Revisión</a:t>
-            </a:r>
-            <a:r>
-              <a:rPr lang="es-MX" sz="3600" dirty="0">
-                <a:solidFill>
-                  <a:schemeClr val="bg1"/>
-                </a:solidFill>
-              </a:rPr>
-              <a:t> en cierre de caso de clic en el botón </a:t>
-            </a:r>
-            <a:r>
-              <a:rPr lang="es-MX" sz="3600" b="1" i="1" dirty="0">
-                <a:solidFill>
-                  <a:schemeClr val="bg1"/>
-                </a:solidFill>
-              </a:rPr>
-              <a:t>Pasar a </a:t>
-            </a:r>
-            <a:r>
-              <a:rPr lang="es-MX" sz="3600" b="1" i="1" dirty="0" err="1">
-                <a:solidFill>
-                  <a:schemeClr val="bg1"/>
-                </a:solidFill>
-              </a:rPr>
-              <a:t>revisón</a:t>
-            </a:r>
-            <a:endParaRPr lang="es-MX" sz="3600" b="1" i="1" dirty="0">
-              <a:solidFill>
-                <a:schemeClr val="bg1"/>
-              </a:solidFill>
-            </a:endParaRPr>
-          </a:p>
-          <a:p>
-            <a:pPr algn="ctr"/>
-            <a:endParaRPr lang="es-MX" sz="3600" dirty="0">
-              <a:solidFill>
-                <a:schemeClr val="bg1"/>
-              </a:solidFill>
-            </a:endParaRPr>
-          </a:p>
-          <a:p>
-            <a:pPr algn="ctr"/>
-            <a:endParaRPr lang="es-MX" sz="3600" dirty="0">
-              <a:solidFill>
-                <a:schemeClr val="bg1"/>
-              </a:solidFill>
-            </a:endParaRPr>
-          </a:p>
-          <a:p>
-            <a:pPr algn="ctr"/>
-            <a:endParaRPr lang="es-MX" sz="3600" dirty="0">
-              <a:solidFill>
-                <a:schemeClr val="bg1"/>
-              </a:solidFill>
-            </a:endParaRPr>
-          </a:p>
-          <a:p>
-            <a:pPr algn="ctr"/>
-            <a:endParaRPr lang="es-MX" sz="3600" dirty="0">
-              <a:solidFill>
-                <a:schemeClr val="bg1"/>
-              </a:solidFill>
-            </a:endParaRPr>
-          </a:p>
-          <a:p>
-            <a:pPr algn="ctr"/>
-            <a:endParaRPr lang="es-MX" sz="3600" dirty="0">
-              <a:solidFill>
-                <a:schemeClr val="bg1"/>
-              </a:solidFill>
-            </a:endParaRPr>
-          </a:p>
-          <a:p>
-            <a:pPr algn="ctr"/>
-            <a:endParaRPr lang="es-MX" sz="3600" dirty="0">
-              <a:solidFill>
-                <a:schemeClr val="bg1"/>
-              </a:solidFill>
-            </a:endParaRPr>
-          </a:p>
-          <a:p>
-            <a:pPr algn="ctr"/>
-            <a:endParaRPr lang="es-MX" sz="3600" dirty="0">
-              <a:solidFill>
-                <a:schemeClr val="bg1"/>
-              </a:solidFill>
-            </a:endParaRPr>
-          </a:p>
-          <a:p>
-            <a:pPr algn="ctr"/>
-            <a:endParaRPr lang="es-MX" sz="3600" dirty="0">
-              <a:solidFill>
-                <a:schemeClr val="bg1"/>
-              </a:solidFill>
-            </a:endParaRPr>
-          </a:p>
-          <a:p>
-            <a:pPr algn="ctr"/>
-            <a:endParaRPr lang="es-MX" sz="3600" dirty="0">
-              <a:solidFill>
-                <a:schemeClr val="bg1"/>
-              </a:solidFill>
-            </a:endParaRPr>
-          </a:p>
-          <a:p>
-            <a:r>
-              <a:rPr lang="es-CO" sz="2000" dirty="0" err="1">
-                <a:solidFill>
-                  <a:schemeClr val="bg1"/>
-                </a:solidFill>
-              </a:rPr>
-              <a:t>Amatai</a:t>
-            </a:r>
-            <a:r>
-              <a:rPr lang="es-CO" sz="2000" dirty="0">
-                <a:solidFill>
-                  <a:schemeClr val="bg1"/>
-                </a:solidFill>
-              </a:rPr>
-              <a:t> SAS</a:t>
-            </a:r>
+              <a:t>NO</a:t>
+            </a:r>
+            <a:r>
+              <a:rPr lang="es-MX" sz="3600" dirty="0"/>
+              <a:t> fue enviado a cierre el sistema le mostrará el siguiente formulario</a:t>
+            </a:r>
+            <a:endParaRPr lang="es-MX" sz="3600" b="1" i="1" dirty="0"/>
           </a:p>
         </p:txBody>
       </p:sp>
       <p:pic>
         <p:nvPicPr>
-          <p:cNvPr id="11" name="Imagen 10">
-            <a:extLst>
-              <a:ext uri="{FF2B5EF4-FFF2-40B4-BE49-F238E27FC236}">
-                <a16:creationId xmlns:a16="http://schemas.microsoft.com/office/drawing/2014/main" id="{5B1CAB16-AAFF-0020-E3FE-85BE9C43733E}"/>
+          <p:cNvPr id="5" name="Imagen 4">
+            <a:extLst>
+              <a:ext uri="{FF2B5EF4-FFF2-40B4-BE49-F238E27FC236}">
+                <a16:creationId xmlns:a16="http://schemas.microsoft.com/office/drawing/2014/main" id="{ED2E2905-3E2C-69E2-5A9B-B4466660BADD}"/>
               </a:ext>
             </a:extLst>
           </p:cNvPr>
@@ -6095,15 +6561,15 @@
           <p:nvPr/>
         </p:nvPicPr>
         <p:blipFill>
-          <a:blip r:embed="rId3"/>
+          <a:blip r:embed="rId2"/>
           <a:stretch>
             <a:fillRect/>
           </a:stretch>
         </p:blipFill>
         <p:spPr>
           <a:xfrm>
-            <a:off x="239522" y="2903174"/>
-            <a:ext cx="11712955" cy="1051651"/>
+            <a:off x="495300" y="1488522"/>
+            <a:ext cx="5137336" cy="5057415"/>
           </a:xfrm>
           <a:prstGeom prst="rect">
             <a:avLst/>
@@ -6112,10 +6578,10 @@
       </p:pic>
       <p:sp>
         <p:nvSpPr>
-          <p:cNvPr id="9" name="Rectángulo 8">
-            <a:extLst>
-              <a:ext uri="{FF2B5EF4-FFF2-40B4-BE49-F238E27FC236}">
-                <a16:creationId xmlns:a16="http://schemas.microsoft.com/office/drawing/2014/main" id="{19CE3575-09A8-0984-60D0-CDEE01EEEB27}"/>
+          <p:cNvPr id="6" name="Flecha: hacia la izquierda 5">
+            <a:extLst>
+              <a:ext uri="{FF2B5EF4-FFF2-40B4-BE49-F238E27FC236}">
+                <a16:creationId xmlns:a16="http://schemas.microsoft.com/office/drawing/2014/main" id="{5D20A52D-0436-1D23-9673-F7DCA1BDB1A4}"/>
               </a:ext>
             </a:extLst>
           </p:cNvPr>
@@ -6124,28 +6590,126 @@
         </p:nvSpPr>
         <p:spPr>
           <a:xfrm>
-            <a:off x="239522" y="3452565"/>
-            <a:ext cx="11712954" cy="661164"/>
+            <a:off x="3993636" y="1536431"/>
+            <a:ext cx="2043953" cy="598756"/>
+          </a:xfrm>
+          <a:prstGeom prst="leftArrow">
+            <a:avLst/>
+          </a:prstGeom>
+          <a:solidFill>
+            <a:srgbClr val="268C91"/>
+          </a:solidFill>
+          <a:ln>
+            <a:solidFill>
+              <a:srgbClr val="268C91"/>
+            </a:solidFill>
+          </a:ln>
+        </p:spPr>
+        <p:style>
+          <a:lnRef idx="2">
+            <a:schemeClr val="accent1">
+              <a:shade val="15000"/>
+            </a:schemeClr>
+          </a:lnRef>
+          <a:fillRef idx="1">
+            <a:schemeClr val="accent1"/>
+          </a:fillRef>
+          <a:effectRef idx="0">
+            <a:schemeClr val="accent1"/>
+          </a:effectRef>
+          <a:fontRef idx="minor">
+            <a:schemeClr val="lt1"/>
+          </a:fontRef>
+        </p:style>
+        <p:txBody>
+          <a:bodyPr rtlCol="0" anchor="ctr"/>
+          <a:lstStyle/>
+          <a:p>
+            <a:pPr algn="ctr"/>
+            <a:endParaRPr lang="es-CO"/>
+          </a:p>
+        </p:txBody>
+      </p:sp>
+      <p:sp>
+        <p:nvSpPr>
+          <p:cNvPr id="3" name="CuadroTexto 2">
+            <a:extLst>
+              <a:ext uri="{FF2B5EF4-FFF2-40B4-BE49-F238E27FC236}">
+                <a16:creationId xmlns:a16="http://schemas.microsoft.com/office/drawing/2014/main" id="{B9552762-DFC6-9EDC-1C32-BCC44D072E7F}"/>
+              </a:ext>
+            </a:extLst>
+          </p:cNvPr>
+          <p:cNvSpPr txBox="1"/>
+          <p:nvPr/>
+        </p:nvSpPr>
+        <p:spPr>
+          <a:xfrm>
+            <a:off x="5929872" y="1658133"/>
+            <a:ext cx="4981575" cy="954107"/>
           </a:xfrm>
           <a:prstGeom prst="rect">
             <a:avLst/>
           </a:prstGeom>
+          <a:noFill/>
+        </p:spPr>
+        <p:txBody>
+          <a:bodyPr wrap="square">
+            <a:spAutoFit/>
+          </a:bodyPr>
+          <a:lstStyle/>
+          <a:p>
+            <a:pPr algn="ctr"/>
+            <a:r>
+              <a:rPr lang="es-MX" sz="2800" dirty="0"/>
+              <a:t>Indica el corte al que se asignará la nota</a:t>
+            </a:r>
+            <a:endParaRPr lang="es-MX" sz="2800" b="1" i="1" dirty="0"/>
+          </a:p>
+        </p:txBody>
+      </p:sp>
+      <p:sp>
+        <p:nvSpPr>
+          <p:cNvPr id="4" name="Flecha: hacia la izquierda 3">
+            <a:extLst>
+              <a:ext uri="{FF2B5EF4-FFF2-40B4-BE49-F238E27FC236}">
+                <a16:creationId xmlns:a16="http://schemas.microsoft.com/office/drawing/2014/main" id="{7FF5DA75-80F6-B698-EA66-5A6ED3F43048}"/>
+              </a:ext>
+            </a:extLst>
+          </p:cNvPr>
+          <p:cNvSpPr/>
+          <p:nvPr/>
+        </p:nvSpPr>
+        <p:spPr>
+          <a:xfrm>
+            <a:off x="2800349" y="4136485"/>
+            <a:ext cx="2043953" cy="647327"/>
+          </a:xfrm>
+          <a:prstGeom prst="leftArrow">
+            <a:avLst/>
+          </a:prstGeom>
+          <a:solidFill>
+            <a:srgbClr val="268C91"/>
+          </a:solidFill>
           <a:ln>
-            <a:noFill/>
+            <a:solidFill>
+              <a:srgbClr val="268C91"/>
+            </a:solidFill>
           </a:ln>
         </p:spPr>
         <p:style>
           <a:lnRef idx="2">
-            <a:schemeClr val="accent6"/>
+            <a:schemeClr val="accent1">
+              <a:shade val="15000"/>
+            </a:schemeClr>
           </a:lnRef>
           <a:fillRef idx="1">
-            <a:schemeClr val="lt1"/>
+            <a:schemeClr val="accent1"/>
           </a:fillRef>
           <a:effectRef idx="0">
-            <a:schemeClr val="accent6"/>
+            <a:schemeClr val="accent1"/>
           </a:effectRef>
           <a:fontRef idx="minor">
-            <a:schemeClr val="dk1"/>
+            <a:schemeClr val="lt1"/>
           </a:fontRef>
         </p:style>
         <p:txBody>
@@ -6153,83 +6717,17 @@
           <a:lstStyle/>
           <a:p>
             <a:pPr algn="ctr"/>
-            <a:endParaRPr lang="es-CO"/>
-          </a:p>
-        </p:txBody>
-      </p:sp>
-      <p:pic>
-        <p:nvPicPr>
-          <p:cNvPr id="6" name="Imagen 5">
-            <a:extLst>
-              <a:ext uri="{FF2B5EF4-FFF2-40B4-BE49-F238E27FC236}">
-                <a16:creationId xmlns:a16="http://schemas.microsoft.com/office/drawing/2014/main" id="{64A37F9C-3281-B95E-E2B7-E03DE749C2AA}"/>
-              </a:ext>
-            </a:extLst>
-          </p:cNvPr>
-          <p:cNvPicPr>
-            <a:picLocks noChangeAspect="1"/>
-          </p:cNvPicPr>
-          <p:nvPr/>
-        </p:nvPicPr>
-        <p:blipFill>
-          <a:blip r:embed="rId4"/>
-          <a:stretch>
-            <a:fillRect/>
-          </a:stretch>
-        </p:blipFill>
-        <p:spPr>
-          <a:xfrm>
-            <a:off x="8717173" y="3433863"/>
-            <a:ext cx="2140377" cy="661164"/>
-          </a:xfrm>
-          <a:prstGeom prst="rect">
-            <a:avLst/>
-          </a:prstGeom>
-        </p:spPr>
-      </p:pic>
-      <p:pic>
-        <p:nvPicPr>
-          <p:cNvPr id="8" name="Gráfico 7" descr="Lupa">
-            <a:extLst>
-              <a:ext uri="{FF2B5EF4-FFF2-40B4-BE49-F238E27FC236}">
-                <a16:creationId xmlns:a16="http://schemas.microsoft.com/office/drawing/2014/main" id="{70287BDA-E56B-9DF6-26A8-A0F53C4766DE}"/>
-              </a:ext>
-            </a:extLst>
-          </p:cNvPr>
-          <p:cNvPicPr>
-            <a:picLocks noChangeAspect="1"/>
-          </p:cNvPicPr>
-          <p:nvPr/>
-        </p:nvPicPr>
-        <p:blipFill>
-          <a:blip r:embed="rId5">
-            <a:extLst>
-              <a:ext uri="{28A0092B-C50C-407E-A947-70E740481C1C}">
-                <a14:useLocalDpi xmlns:a14="http://schemas.microsoft.com/office/drawing/2010/main" val="0"/>
-              </a:ext>
-              <a:ext uri="{96DAC541-7B7A-43D3-8B79-37D633B846F1}">
-                <asvg:svgBlip xmlns:asvg="http://schemas.microsoft.com/office/drawing/2016/SVG/main" r:embed="rId6"/>
-              </a:ext>
-            </a:extLst>
-          </a:blip>
-          <a:stretch>
-            <a:fillRect/>
-          </a:stretch>
-        </p:blipFill>
-        <p:spPr>
-          <a:xfrm rot="5181362">
-            <a:off x="7319456" y="2349657"/>
-            <a:ext cx="4092798" cy="4018677"/>
-          </a:xfrm>
-          <a:prstGeom prst="rect">
-            <a:avLst/>
-          </a:prstGeom>
-        </p:spPr>
-      </p:pic>
+            <a:r>
+              <a:rPr lang="es-CO" sz="1200" dirty="0"/>
+              <a:t>Puede cambiar las notas</a:t>
+            </a:r>
+          </a:p>
+        </p:txBody>
+      </p:sp>
     </p:spTree>
     <p:extLst>
       <p:ext uri="{BB962C8B-B14F-4D97-AF65-F5344CB8AC3E}">
-        <p14:creationId xmlns:p14="http://schemas.microsoft.com/office/powerpoint/2010/main" val="5733342"/>
+        <p14:creationId xmlns:p14="http://schemas.microsoft.com/office/powerpoint/2010/main" val="4049931818"/>
       </p:ext>
     </p:extLst>
   </p:cSld>
@@ -6352,66 +6850,12 @@
           </a:p>
         </p:txBody>
       </p:sp>
-      <p:sp>
-        <p:nvSpPr>
-          <p:cNvPr id="10" name="CuadroTexto 9">
-            <a:extLst>
-              <a:ext uri="{FF2B5EF4-FFF2-40B4-BE49-F238E27FC236}">
-                <a16:creationId xmlns:a16="http://schemas.microsoft.com/office/drawing/2014/main" id="{C69317F1-3BC8-CC98-94BA-756E40E92416}"/>
-              </a:ext>
-            </a:extLst>
-          </p:cNvPr>
-          <p:cNvSpPr txBox="1"/>
-          <p:nvPr/>
-        </p:nvSpPr>
-        <p:spPr>
-          <a:xfrm>
-            <a:off x="1280159" y="5503453"/>
-            <a:ext cx="9924288" cy="1200329"/>
-          </a:xfrm>
-          <a:prstGeom prst="rect">
-            <a:avLst/>
-          </a:prstGeom>
-          <a:noFill/>
-        </p:spPr>
-        <p:txBody>
-          <a:bodyPr wrap="square">
-            <a:spAutoFit/>
-          </a:bodyPr>
-          <a:lstStyle/>
-          <a:p>
-            <a:pPr algn="ctr"/>
-            <a:r>
-              <a:rPr lang="es-MX" sz="3600" dirty="0">
-                <a:solidFill>
-                  <a:schemeClr val="bg1"/>
-                </a:solidFill>
-              </a:rPr>
-              <a:t>Ingrese una descripción y de clic en botón </a:t>
-            </a:r>
-          </a:p>
-          <a:p>
-            <a:pPr algn="ctr"/>
-            <a:r>
-              <a:rPr lang="es-MX" sz="3600" b="1" i="1" dirty="0">
-                <a:solidFill>
-                  <a:schemeClr val="accent4">
-                    <a:lumMod val="60000"/>
-                    <a:lumOff val="40000"/>
-                  </a:schemeClr>
-                </a:solidFill>
-              </a:rPr>
-              <a:t>Pasar a revisión</a:t>
-            </a:r>
-          </a:p>
-        </p:txBody>
-      </p:sp>
       <p:pic>
         <p:nvPicPr>
-          <p:cNvPr id="4" name="Imagen 3">
-            <a:extLst>
-              <a:ext uri="{FF2B5EF4-FFF2-40B4-BE49-F238E27FC236}">
-                <a16:creationId xmlns:a16="http://schemas.microsoft.com/office/drawing/2014/main" id="{9D70D671-5EC9-54B1-0582-072BDD2C4351}"/>
+          <p:cNvPr id="6" name="Imagen 5">
+            <a:extLst>
+              <a:ext uri="{FF2B5EF4-FFF2-40B4-BE49-F238E27FC236}">
+                <a16:creationId xmlns:a16="http://schemas.microsoft.com/office/drawing/2014/main" id="{E88D09ED-200D-E71D-7D1B-4F0CB9EB1154}"/>
               </a:ext>
             </a:extLst>
           </p:cNvPr>
@@ -6428,8 +6872,288 @@
         </p:blipFill>
         <p:spPr>
           <a:xfrm>
-            <a:off x="3592613" y="1748644"/>
-            <a:ext cx="5006774" cy="3360711"/>
+            <a:off x="49006" y="2373538"/>
+            <a:ext cx="12093988" cy="2110923"/>
+          </a:xfrm>
+          <a:prstGeom prst="rect">
+            <a:avLst/>
+          </a:prstGeom>
+        </p:spPr>
+      </p:pic>
+      <p:sp>
+        <p:nvSpPr>
+          <p:cNvPr id="2" name="CuadroTexto 1">
+            <a:extLst>
+              <a:ext uri="{FF2B5EF4-FFF2-40B4-BE49-F238E27FC236}">
+                <a16:creationId xmlns:a16="http://schemas.microsoft.com/office/drawing/2014/main" id="{4BE15536-8584-618A-A38B-56A2C9028692}"/>
+              </a:ext>
+            </a:extLst>
+          </p:cNvPr>
+          <p:cNvSpPr txBox="1"/>
+          <p:nvPr/>
+        </p:nvSpPr>
+        <p:spPr>
+          <a:xfrm>
+            <a:off x="318426" y="445008"/>
+            <a:ext cx="11268635" cy="7048083"/>
+          </a:xfrm>
+          <a:prstGeom prst="rect">
+            <a:avLst/>
+          </a:prstGeom>
+          <a:noFill/>
+        </p:spPr>
+        <p:txBody>
+          <a:bodyPr wrap="square" rtlCol="0">
+            <a:spAutoFit/>
+          </a:bodyPr>
+          <a:lstStyle/>
+          <a:p>
+            <a:pPr algn="ctr"/>
+            <a:endParaRPr lang="es-MX" sz="3600" dirty="0">
+              <a:solidFill>
+                <a:schemeClr val="bg1"/>
+              </a:solidFill>
+            </a:endParaRPr>
+          </a:p>
+          <a:p>
+            <a:pPr algn="ctr"/>
+            <a:r>
+              <a:rPr lang="es-MX" sz="3600" dirty="0">
+                <a:solidFill>
+                  <a:schemeClr val="bg1"/>
+                </a:solidFill>
+              </a:rPr>
+              <a:t>Para </a:t>
+            </a:r>
+            <a:r>
+              <a:rPr lang="es-MX" sz="3600" b="1" dirty="0">
+                <a:solidFill>
+                  <a:schemeClr val="accent4">
+                    <a:lumMod val="60000"/>
+                    <a:lumOff val="40000"/>
+                  </a:schemeClr>
+                </a:solidFill>
+              </a:rPr>
+              <a:t>Dar de baja</a:t>
+            </a:r>
+            <a:r>
+              <a:rPr lang="es-MX" sz="3600" dirty="0">
+                <a:solidFill>
+                  <a:schemeClr val="bg1"/>
+                </a:solidFill>
+              </a:rPr>
+              <a:t> en administración del caso de clic en el botón </a:t>
+            </a:r>
+            <a:r>
+              <a:rPr lang="es-MX" sz="3600" b="1" i="1" dirty="0">
+                <a:solidFill>
+                  <a:schemeClr val="bg1"/>
+                </a:solidFill>
+              </a:rPr>
+              <a:t>Dar de baja</a:t>
+            </a:r>
+          </a:p>
+          <a:p>
+            <a:pPr algn="ctr"/>
+            <a:endParaRPr lang="es-MX" sz="3600" dirty="0">
+              <a:solidFill>
+                <a:schemeClr val="bg1"/>
+              </a:solidFill>
+            </a:endParaRPr>
+          </a:p>
+          <a:p>
+            <a:pPr algn="ctr"/>
+            <a:endParaRPr lang="es-MX" sz="3600" dirty="0">
+              <a:solidFill>
+                <a:schemeClr val="bg1"/>
+              </a:solidFill>
+            </a:endParaRPr>
+          </a:p>
+          <a:p>
+            <a:pPr algn="ctr"/>
+            <a:endParaRPr lang="es-MX" sz="3600" dirty="0">
+              <a:solidFill>
+                <a:schemeClr val="bg1"/>
+              </a:solidFill>
+            </a:endParaRPr>
+          </a:p>
+          <a:p>
+            <a:pPr algn="ctr"/>
+            <a:endParaRPr lang="es-MX" sz="3600" dirty="0">
+              <a:solidFill>
+                <a:schemeClr val="bg1"/>
+              </a:solidFill>
+            </a:endParaRPr>
+          </a:p>
+          <a:p>
+            <a:pPr algn="ctr"/>
+            <a:endParaRPr lang="es-MX" sz="3600" dirty="0">
+              <a:solidFill>
+                <a:schemeClr val="bg1"/>
+              </a:solidFill>
+            </a:endParaRPr>
+          </a:p>
+          <a:p>
+            <a:pPr algn="ctr"/>
+            <a:endParaRPr lang="es-MX" sz="3600" dirty="0">
+              <a:solidFill>
+                <a:schemeClr val="bg1"/>
+              </a:solidFill>
+            </a:endParaRPr>
+          </a:p>
+          <a:p>
+            <a:pPr algn="ctr"/>
+            <a:endParaRPr lang="es-MX" sz="3600" dirty="0">
+              <a:solidFill>
+                <a:schemeClr val="bg1"/>
+              </a:solidFill>
+            </a:endParaRPr>
+          </a:p>
+          <a:p>
+            <a:pPr algn="ctr"/>
+            <a:endParaRPr lang="es-MX" sz="3600" dirty="0">
+              <a:solidFill>
+                <a:schemeClr val="bg1"/>
+              </a:solidFill>
+            </a:endParaRPr>
+          </a:p>
+          <a:p>
+            <a:pPr algn="ctr"/>
+            <a:endParaRPr lang="es-MX" sz="3600" dirty="0">
+              <a:solidFill>
+                <a:schemeClr val="bg1"/>
+              </a:solidFill>
+            </a:endParaRPr>
+          </a:p>
+          <a:p>
+            <a:r>
+              <a:rPr lang="es-CO" sz="2000" dirty="0" err="1">
+                <a:solidFill>
+                  <a:schemeClr val="bg1"/>
+                </a:solidFill>
+              </a:rPr>
+              <a:t>Amatai</a:t>
+            </a:r>
+            <a:r>
+              <a:rPr lang="es-CO" sz="2000" dirty="0">
+                <a:solidFill>
+                  <a:schemeClr val="bg1"/>
+                </a:solidFill>
+              </a:rPr>
+              <a:t> SAS</a:t>
+            </a:r>
+          </a:p>
+        </p:txBody>
+      </p:sp>
+      <p:sp>
+        <p:nvSpPr>
+          <p:cNvPr id="9" name="Rectángulo 8">
+            <a:extLst>
+              <a:ext uri="{FF2B5EF4-FFF2-40B4-BE49-F238E27FC236}">
+                <a16:creationId xmlns:a16="http://schemas.microsoft.com/office/drawing/2014/main" id="{19CE3575-09A8-0984-60D0-CDEE01EEEB27}"/>
+              </a:ext>
+            </a:extLst>
+          </p:cNvPr>
+          <p:cNvSpPr/>
+          <p:nvPr/>
+        </p:nvSpPr>
+        <p:spPr>
+          <a:xfrm>
+            <a:off x="87005" y="3007481"/>
+            <a:ext cx="3338947" cy="696160"/>
+          </a:xfrm>
+          <a:prstGeom prst="rect">
+            <a:avLst/>
+          </a:prstGeom>
+          <a:ln>
+            <a:noFill/>
+          </a:ln>
+        </p:spPr>
+        <p:style>
+          <a:lnRef idx="2">
+            <a:schemeClr val="accent6"/>
+          </a:lnRef>
+          <a:fillRef idx="1">
+            <a:schemeClr val="lt1"/>
+          </a:fillRef>
+          <a:effectRef idx="0">
+            <a:schemeClr val="accent6"/>
+          </a:effectRef>
+          <a:fontRef idx="minor">
+            <a:schemeClr val="dk1"/>
+          </a:fontRef>
+        </p:style>
+        <p:txBody>
+          <a:bodyPr rtlCol="0" anchor="ctr"/>
+          <a:lstStyle/>
+          <a:p>
+            <a:pPr algn="ctr"/>
+            <a:endParaRPr lang="es-CO"/>
+          </a:p>
+        </p:txBody>
+      </p:sp>
+      <p:pic>
+        <p:nvPicPr>
+          <p:cNvPr id="11" name="Imagen 10">
+            <a:extLst>
+              <a:ext uri="{FF2B5EF4-FFF2-40B4-BE49-F238E27FC236}">
+                <a16:creationId xmlns:a16="http://schemas.microsoft.com/office/drawing/2014/main" id="{A19EB478-5B09-1BEA-819C-157C47F50696}"/>
+              </a:ext>
+            </a:extLst>
+          </p:cNvPr>
+          <p:cNvPicPr>
+            <a:picLocks noChangeAspect="1"/>
+          </p:cNvPicPr>
+          <p:nvPr/>
+        </p:nvPicPr>
+        <p:blipFill rotWithShape="1">
+          <a:blip r:embed="rId4"/>
+          <a:srcRect t="34649"/>
+          <a:stretch/>
+        </p:blipFill>
+        <p:spPr>
+          <a:xfrm>
+            <a:off x="318425" y="3007059"/>
+            <a:ext cx="2130959" cy="732442"/>
+          </a:xfrm>
+          <a:prstGeom prst="rect">
+            <a:avLst/>
+          </a:prstGeom>
+        </p:spPr>
+      </p:pic>
+      <p:pic>
+        <p:nvPicPr>
+          <p:cNvPr id="8" name="Gráfico 7" descr="Lupa">
+            <a:extLst>
+              <a:ext uri="{FF2B5EF4-FFF2-40B4-BE49-F238E27FC236}">
+                <a16:creationId xmlns:a16="http://schemas.microsoft.com/office/drawing/2014/main" id="{70287BDA-E56B-9DF6-26A8-A0F53C4766DE}"/>
+              </a:ext>
+            </a:extLst>
+          </p:cNvPr>
+          <p:cNvPicPr>
+            <a:picLocks noChangeAspect="1"/>
+          </p:cNvPicPr>
+          <p:nvPr/>
+        </p:nvPicPr>
+        <p:blipFill>
+          <a:blip r:embed="rId5">
+            <a:extLst>
+              <a:ext uri="{28A0092B-C50C-407E-A947-70E740481C1C}">
+                <a14:useLocalDpi xmlns:a14="http://schemas.microsoft.com/office/drawing/2010/main" val="0"/>
+              </a:ext>
+              <a:ext uri="{96DAC541-7B7A-43D3-8B79-37D633B846F1}">
+                <asvg:svgBlip xmlns:asvg="http://schemas.microsoft.com/office/drawing/2016/SVG/main" r:embed="rId6"/>
+              </a:ext>
+            </a:extLst>
+          </a:blip>
+          <a:stretch>
+            <a:fillRect/>
+          </a:stretch>
+        </p:blipFill>
+        <p:spPr>
+          <a:xfrm rot="1121602">
+            <a:off x="-379857" y="1674076"/>
+            <a:ext cx="3882034" cy="3952767"/>
           </a:xfrm>
           <a:prstGeom prst="rect">
             <a:avLst/>
@@ -6439,7 +7163,7 @@
     </p:spTree>
     <p:extLst>
       <p:ext uri="{BB962C8B-B14F-4D97-AF65-F5344CB8AC3E}">
-        <p14:creationId xmlns:p14="http://schemas.microsoft.com/office/powerpoint/2010/main" val="2790284056"/>
+        <p14:creationId xmlns:p14="http://schemas.microsoft.com/office/powerpoint/2010/main" val="1830992768"/>
       </p:ext>
     </p:extLst>
   </p:cSld>
@@ -6562,12 +7286,42 @@
           </a:p>
         </p:txBody>
       </p:sp>
-      <p:sp>
-        <p:nvSpPr>
-          <p:cNvPr id="2" name="CuadroTexto 1">
-            <a:extLst>
-              <a:ext uri="{FF2B5EF4-FFF2-40B4-BE49-F238E27FC236}">
-                <a16:creationId xmlns:a16="http://schemas.microsoft.com/office/drawing/2014/main" id="{4BE15536-8584-618A-A38B-56A2C9028692}"/>
+      <p:pic>
+        <p:nvPicPr>
+          <p:cNvPr id="5" name="Imagen 4">
+            <a:extLst>
+              <a:ext uri="{FF2B5EF4-FFF2-40B4-BE49-F238E27FC236}">
+                <a16:creationId xmlns:a16="http://schemas.microsoft.com/office/drawing/2014/main" id="{BA4C5974-D310-4C4E-4C92-272A535AA142}"/>
+              </a:ext>
+            </a:extLst>
+          </p:cNvPr>
+          <p:cNvPicPr>
+            <a:picLocks noChangeAspect="1"/>
+          </p:cNvPicPr>
+          <p:nvPr/>
+        </p:nvPicPr>
+        <p:blipFill>
+          <a:blip r:embed="rId3"/>
+          <a:stretch>
+            <a:fillRect/>
+          </a:stretch>
+        </p:blipFill>
+        <p:spPr>
+          <a:xfrm>
+            <a:off x="3605555" y="231425"/>
+            <a:ext cx="5273497" cy="5151566"/>
+          </a:xfrm>
+          <a:prstGeom prst="rect">
+            <a:avLst/>
+          </a:prstGeom>
+        </p:spPr>
+      </p:pic>
+      <p:sp>
+        <p:nvSpPr>
+          <p:cNvPr id="10" name="CuadroTexto 9">
+            <a:extLst>
+              <a:ext uri="{FF2B5EF4-FFF2-40B4-BE49-F238E27FC236}">
+                <a16:creationId xmlns:a16="http://schemas.microsoft.com/office/drawing/2014/main" id="{C69317F1-3BC8-CC98-94BA-756E40E92416}"/>
               </a:ext>
             </a:extLst>
           </p:cNvPr>
@@ -6576,8 +7330,8 @@
         </p:nvSpPr>
         <p:spPr>
           <a:xfrm>
-            <a:off x="318426" y="445008"/>
-            <a:ext cx="11268635" cy="6494085"/>
+            <a:off x="1280159" y="5503453"/>
+            <a:ext cx="9924288" cy="1200329"/>
           </a:xfrm>
           <a:prstGeom prst="rect">
             <a:avLst/>
@@ -6585,7 +7339,7 @@
           <a:noFill/>
         </p:spPr>
         <p:txBody>
-          <a:bodyPr wrap="square" rtlCol="0">
+          <a:bodyPr wrap="square">
             <a:spAutoFit/>
           </a:bodyPr>
           <a:lstStyle/>
@@ -6597,69 +7351,37 @@
                   <a:schemeClr val="bg1"/>
                 </a:solidFill>
               </a:rPr>
-              <a:t>Ahora IURIS le permite pausar los expedientes!</a:t>
-            </a:r>
-          </a:p>
-          <a:p>
-            <a:endParaRPr lang="es-MX" sz="3600" dirty="0">
+              <a:t>Ingrese una descripción y de clic en botón </a:t>
+            </a:r>
+          </a:p>
+          <a:p>
+            <a:pPr algn="ctr"/>
+            <a:r>
+              <a:rPr lang="es-MX" sz="3600" dirty="0">
+                <a:solidFill>
+                  <a:schemeClr val="accent4">
+                    <a:lumMod val="60000"/>
+                    <a:lumOff val="40000"/>
+                  </a:schemeClr>
+                </a:solidFill>
+              </a:rPr>
+              <a:t>Si, dar de baja</a:t>
+            </a:r>
+            <a:endParaRPr lang="es-MX" sz="3600" b="1" i="1" dirty="0">
               <a:solidFill>
-                <a:schemeClr val="bg1"/>
+                <a:schemeClr val="accent4">
+                  <a:lumMod val="60000"/>
+                  <a:lumOff val="40000"/>
+                </a:schemeClr>
               </a:solidFill>
             </a:endParaRPr>
-          </a:p>
-          <a:p>
-            <a:pPr algn="just"/>
-            <a:r>
-              <a:rPr lang="es-MX" sz="3600" dirty="0">
-                <a:solidFill>
-                  <a:schemeClr val="bg1"/>
-                </a:solidFill>
-              </a:rPr>
-              <a:t>Esta funcionalidad pone en pausa el tiempo de evaluación de actuaciones en aquellos expedientes abiertos que no tendrán actuaciones en un lapso determinado de tiempo.</a:t>
-            </a:r>
-          </a:p>
-          <a:p>
-            <a:endParaRPr lang="es-MX" sz="3600" dirty="0"/>
-          </a:p>
-          <a:p>
-            <a:endParaRPr lang="es-MX" sz="3600" dirty="0"/>
-          </a:p>
-          <a:p>
-            <a:endParaRPr lang="es-MX" sz="3600" dirty="0"/>
-          </a:p>
-          <a:p>
-            <a:endParaRPr lang="es-MX" sz="3600" dirty="0"/>
-          </a:p>
-          <a:p>
-            <a:endParaRPr lang="es-MX" sz="3600" dirty="0"/>
-          </a:p>
-          <a:p>
-            <a:endParaRPr lang="es-MX" sz="3600" dirty="0"/>
-          </a:p>
-          <a:p>
-            <a:r>
-              <a:rPr lang="es-CO" sz="2000" dirty="0" err="1">
-                <a:solidFill>
-                  <a:schemeClr val="bg1"/>
-                </a:solidFill>
-              </a:rPr>
-              <a:t>Amatai</a:t>
-            </a:r>
-            <a:r>
-              <a:rPr lang="es-CO" sz="2000" dirty="0">
-                <a:solidFill>
-                  <a:schemeClr val="bg1"/>
-                </a:solidFill>
-              </a:rPr>
-              <a:t> SAS</a:t>
-            </a:r>
           </a:p>
         </p:txBody>
       </p:sp>
     </p:spTree>
     <p:extLst>
       <p:ext uri="{BB962C8B-B14F-4D97-AF65-F5344CB8AC3E}">
-        <p14:creationId xmlns:p14="http://schemas.microsoft.com/office/powerpoint/2010/main" val="3888979096"/>
+        <p14:creationId xmlns:p14="http://schemas.microsoft.com/office/powerpoint/2010/main" val="1612107509"/>
       </p:ext>
     </p:extLst>
   </p:cSld>
